--- a/Лекции/01. Введение. Основы аналитики данных.pptx
+++ b/Лекции/01. Введение. Основы аналитики данных.pptx
@@ -5,7 +5,7 @@
     <p:sldMasterId id="2147483648" r:id="rId1"/>
   </p:sldMasterIdLst>
   <p:notesMasterIdLst>
-    <p:notesMasterId r:id="rId34"/>
+    <p:notesMasterId r:id="rId30"/>
   </p:notesMasterIdLst>
   <p:sldIdLst>
     <p:sldId id="256" r:id="rId2"/>
@@ -29,17 +29,13 @@
     <p:sldId id="371" r:id="rId20"/>
     <p:sldId id="372" r:id="rId21"/>
     <p:sldId id="373" r:id="rId22"/>
-    <p:sldId id="340" r:id="rId23"/>
-    <p:sldId id="341" r:id="rId24"/>
-    <p:sldId id="339" r:id="rId25"/>
-    <p:sldId id="374" r:id="rId26"/>
-    <p:sldId id="375" r:id="rId27"/>
-    <p:sldId id="343" r:id="rId28"/>
-    <p:sldId id="347" r:id="rId29"/>
-    <p:sldId id="348" r:id="rId30"/>
-    <p:sldId id="360" r:id="rId31"/>
-    <p:sldId id="345" r:id="rId32"/>
-    <p:sldId id="318" r:id="rId33"/>
+    <p:sldId id="339" r:id="rId23"/>
+    <p:sldId id="374" r:id="rId24"/>
+    <p:sldId id="375" r:id="rId25"/>
+    <p:sldId id="348" r:id="rId26"/>
+    <p:sldId id="360" r:id="rId27"/>
+    <p:sldId id="345" r:id="rId28"/>
+    <p:sldId id="318" r:id="rId29"/>
   </p:sldIdLst>
   <p:sldSz cx="12192000" cy="6858000"/>
   <p:notesSz cx="6858000" cy="9144000"/>
@@ -3356,7 +3352,7 @@
           <a:p>
             <a:fld id="{07467A74-FEEF-45B0-ABD3-14EA22804807}" type="datetimeFigureOut">
               <a:rPr lang="ru-RU" smtClean="0"/>
-              <a:t>10.02.2026</a:t>
+              <a:t>04.09.2026</a:t>
             </a:fld>
             <a:endParaRPr lang="ru-RU"/>
           </a:p>
@@ -4777,7 +4773,7 @@
     </p:spTree>
     <p:extLst>
       <p:ext uri="{BB962C8B-B14F-4D97-AF65-F5344CB8AC3E}">
-        <p14:creationId xmlns:p14="http://schemas.microsoft.com/office/powerpoint/2010/main" val="3931395196"/>
+        <p14:creationId xmlns:p14="http://schemas.microsoft.com/office/powerpoint/2010/main" val="3366237790"/>
       </p:ext>
     </p:extLst>
   </p:cSld>
@@ -4876,174 +4872,6 @@
   <p:cSld>
     <p:spTree>
       <p:nvGrpSpPr>
-        <p:cNvPr id="1" name=""/>
-        <p:cNvGrpSpPr/>
-        <p:nvPr/>
-      </p:nvGrpSpPr>
-      <p:grpSpPr>
-        <a:xfrm>
-          <a:off x="0" y="0"/>
-          <a:ext cx="0" cy="0"/>
-          <a:chOff x="0" y="0"/>
-          <a:chExt cx="0" cy="0"/>
-        </a:xfrm>
-      </p:grpSpPr>
-      <p:sp>
-        <p:nvSpPr>
-          <p:cNvPr id="2" name="Образ слайда 1"/>
-          <p:cNvSpPr>
-            <a:spLocks noGrp="1" noRot="1" noChangeAspect="1"/>
-          </p:cNvSpPr>
-          <p:nvPr>
-            <p:ph type="sldImg"/>
-          </p:nvPr>
-        </p:nvSpPr>
-        <p:spPr/>
-      </p:sp>
-      <p:sp>
-        <p:nvSpPr>
-          <p:cNvPr id="3" name="Заметки 2"/>
-          <p:cNvSpPr>
-            <a:spLocks noGrp="1"/>
-          </p:cNvSpPr>
-          <p:nvPr>
-            <p:ph type="body" idx="1"/>
-          </p:nvPr>
-        </p:nvSpPr>
-        <p:spPr/>
-        <p:txBody>
-          <a:bodyPr/>
-          <a:lstStyle/>
-          <a:p>
-            <a:endParaRPr lang="ru-RU" dirty="0"/>
-          </a:p>
-        </p:txBody>
-      </p:sp>
-      <p:sp>
-        <p:nvSpPr>
-          <p:cNvPr id="4" name="Номер слайда 3"/>
-          <p:cNvSpPr>
-            <a:spLocks noGrp="1"/>
-          </p:cNvSpPr>
-          <p:nvPr>
-            <p:ph type="sldNum" sz="quarter" idx="5"/>
-          </p:nvPr>
-        </p:nvSpPr>
-        <p:spPr/>
-        <p:txBody>
-          <a:bodyPr/>
-          <a:lstStyle/>
-          <a:p>
-            <a:fld id="{5E9A7E3A-ADC7-4226-B3BF-DCB7408A146C}" type="slidenum">
-              <a:rPr lang="ru-RU" smtClean="0"/>
-              <a:t>23</a:t>
-            </a:fld>
-            <a:endParaRPr lang="ru-RU"/>
-          </a:p>
-        </p:txBody>
-      </p:sp>
-    </p:spTree>
-    <p:extLst>
-      <p:ext uri="{BB962C8B-B14F-4D97-AF65-F5344CB8AC3E}">
-        <p14:creationId xmlns:p14="http://schemas.microsoft.com/office/powerpoint/2010/main" val="4196560102"/>
-      </p:ext>
-    </p:extLst>
-  </p:cSld>
-  <p:clrMapOvr>
-    <a:masterClrMapping/>
-  </p:clrMapOvr>
-</p:notes>
-</file>
-
-<file path=ppt/notesSlides/notesSlide21.xml><?xml version="1.0" encoding="utf-8"?>
-<p:notes xmlns:a="http://schemas.openxmlformats.org/drawingml/2006/main" xmlns:r="http://schemas.openxmlformats.org/officeDocument/2006/relationships" xmlns:p="http://schemas.openxmlformats.org/presentationml/2006/main">
-  <p:cSld>
-    <p:spTree>
-      <p:nvGrpSpPr>
-        <p:cNvPr id="1" name=""/>
-        <p:cNvGrpSpPr/>
-        <p:nvPr/>
-      </p:nvGrpSpPr>
-      <p:grpSpPr>
-        <a:xfrm>
-          <a:off x="0" y="0"/>
-          <a:ext cx="0" cy="0"/>
-          <a:chOff x="0" y="0"/>
-          <a:chExt cx="0" cy="0"/>
-        </a:xfrm>
-      </p:grpSpPr>
-      <p:sp>
-        <p:nvSpPr>
-          <p:cNvPr id="2" name="Образ слайда 1"/>
-          <p:cNvSpPr>
-            <a:spLocks noGrp="1" noRot="1" noChangeAspect="1"/>
-          </p:cNvSpPr>
-          <p:nvPr>
-            <p:ph type="sldImg"/>
-          </p:nvPr>
-        </p:nvSpPr>
-        <p:spPr/>
-      </p:sp>
-      <p:sp>
-        <p:nvSpPr>
-          <p:cNvPr id="3" name="Заметки 2"/>
-          <p:cNvSpPr>
-            <a:spLocks noGrp="1"/>
-          </p:cNvSpPr>
-          <p:nvPr>
-            <p:ph type="body" idx="1"/>
-          </p:nvPr>
-        </p:nvSpPr>
-        <p:spPr/>
-        <p:txBody>
-          <a:bodyPr/>
-          <a:lstStyle/>
-          <a:p>
-            <a:endParaRPr lang="ru-RU" dirty="0"/>
-          </a:p>
-        </p:txBody>
-      </p:sp>
-      <p:sp>
-        <p:nvSpPr>
-          <p:cNvPr id="4" name="Номер слайда 3"/>
-          <p:cNvSpPr>
-            <a:spLocks noGrp="1"/>
-          </p:cNvSpPr>
-          <p:nvPr>
-            <p:ph type="sldNum" sz="quarter" idx="5"/>
-          </p:nvPr>
-        </p:nvSpPr>
-        <p:spPr/>
-        <p:txBody>
-          <a:bodyPr/>
-          <a:lstStyle/>
-          <a:p>
-            <a:fld id="{5E9A7E3A-ADC7-4226-B3BF-DCB7408A146C}" type="slidenum">
-              <a:rPr lang="ru-RU" smtClean="0"/>
-              <a:t>24</a:t>
-            </a:fld>
-            <a:endParaRPr lang="ru-RU"/>
-          </a:p>
-        </p:txBody>
-      </p:sp>
-    </p:spTree>
-    <p:extLst>
-      <p:ext uri="{BB962C8B-B14F-4D97-AF65-F5344CB8AC3E}">
-        <p14:creationId xmlns:p14="http://schemas.microsoft.com/office/powerpoint/2010/main" val="3366237790"/>
-      </p:ext>
-    </p:extLst>
-  </p:cSld>
-  <p:clrMapOvr>
-    <a:masterClrMapping/>
-  </p:clrMapOvr>
-</p:notes>
-</file>
-
-<file path=ppt/notesSlides/notesSlide22.xml><?xml version="1.0" encoding="utf-8"?>
-<p:notes xmlns:a="http://schemas.openxmlformats.org/drawingml/2006/main" xmlns:r="http://schemas.openxmlformats.org/officeDocument/2006/relationships" xmlns:p="http://schemas.openxmlformats.org/presentationml/2006/main">
-  <p:cSld>
-    <p:spTree>
-      <p:nvGrpSpPr>
         <p:cNvPr id="1" name="">
           <a:extLst>
             <a:ext uri="{FF2B5EF4-FFF2-40B4-BE49-F238E27FC236}">
@@ -5128,7 +4956,7 @@
           <a:p>
             <a:fld id="{5E9A7E3A-ADC7-4226-B3BF-DCB7408A146C}" type="slidenum">
               <a:rPr lang="ru-RU" smtClean="0"/>
-              <a:t>25</a:t>
+              <a:t>23</a:t>
             </a:fld>
             <a:endParaRPr lang="ru-RU"/>
           </a:p>
@@ -5147,7 +4975,7 @@
 </p:notes>
 </file>
 
-<file path=ppt/notesSlides/notesSlide23.xml><?xml version="1.0" encoding="utf-8"?>
+<file path=ppt/notesSlides/notesSlide21.xml><?xml version="1.0" encoding="utf-8"?>
 <p:notes xmlns:a="http://schemas.openxmlformats.org/drawingml/2006/main" xmlns:r="http://schemas.openxmlformats.org/officeDocument/2006/relationships" xmlns:p="http://schemas.openxmlformats.org/presentationml/2006/main">
   <p:cSld>
     <p:spTree>
@@ -5236,7 +5064,7 @@
           <a:p>
             <a:fld id="{5E9A7E3A-ADC7-4226-B3BF-DCB7408A146C}" type="slidenum">
               <a:rPr lang="ru-RU" smtClean="0"/>
-              <a:t>26</a:t>
+              <a:t>24</a:t>
             </a:fld>
             <a:endParaRPr lang="ru-RU"/>
           </a:p>
@@ -5246,6 +5074,174 @@
     <p:extLst>
       <p:ext uri="{BB962C8B-B14F-4D97-AF65-F5344CB8AC3E}">
         <p14:creationId xmlns:p14="http://schemas.microsoft.com/office/powerpoint/2010/main" val="1803873941"/>
+      </p:ext>
+    </p:extLst>
+  </p:cSld>
+  <p:clrMapOvr>
+    <a:masterClrMapping/>
+  </p:clrMapOvr>
+</p:notes>
+</file>
+
+<file path=ppt/notesSlides/notesSlide22.xml><?xml version="1.0" encoding="utf-8"?>
+<p:notes xmlns:a="http://schemas.openxmlformats.org/drawingml/2006/main" xmlns:r="http://schemas.openxmlformats.org/officeDocument/2006/relationships" xmlns:p="http://schemas.openxmlformats.org/presentationml/2006/main">
+  <p:cSld>
+    <p:spTree>
+      <p:nvGrpSpPr>
+        <p:cNvPr id="1" name=""/>
+        <p:cNvGrpSpPr/>
+        <p:nvPr/>
+      </p:nvGrpSpPr>
+      <p:grpSpPr>
+        <a:xfrm>
+          <a:off x="0" y="0"/>
+          <a:ext cx="0" cy="0"/>
+          <a:chOff x="0" y="0"/>
+          <a:chExt cx="0" cy="0"/>
+        </a:xfrm>
+      </p:grpSpPr>
+      <p:sp>
+        <p:nvSpPr>
+          <p:cNvPr id="2" name="Образ слайда 1"/>
+          <p:cNvSpPr>
+            <a:spLocks noGrp="1" noRot="1" noChangeAspect="1"/>
+          </p:cNvSpPr>
+          <p:nvPr>
+            <p:ph type="sldImg"/>
+          </p:nvPr>
+        </p:nvSpPr>
+        <p:spPr/>
+      </p:sp>
+      <p:sp>
+        <p:nvSpPr>
+          <p:cNvPr id="3" name="Заметки 2"/>
+          <p:cNvSpPr>
+            <a:spLocks noGrp="1"/>
+          </p:cNvSpPr>
+          <p:nvPr>
+            <p:ph type="body" idx="1"/>
+          </p:nvPr>
+        </p:nvSpPr>
+        <p:spPr/>
+        <p:txBody>
+          <a:bodyPr/>
+          <a:lstStyle/>
+          <a:p>
+            <a:endParaRPr lang="ru-RU" dirty="0"/>
+          </a:p>
+        </p:txBody>
+      </p:sp>
+      <p:sp>
+        <p:nvSpPr>
+          <p:cNvPr id="4" name="Номер слайда 3"/>
+          <p:cNvSpPr>
+            <a:spLocks noGrp="1"/>
+          </p:cNvSpPr>
+          <p:nvPr>
+            <p:ph type="sldNum" sz="quarter" idx="5"/>
+          </p:nvPr>
+        </p:nvSpPr>
+        <p:spPr/>
+        <p:txBody>
+          <a:bodyPr/>
+          <a:lstStyle/>
+          <a:p>
+            <a:fld id="{5E9A7E3A-ADC7-4226-B3BF-DCB7408A146C}" type="slidenum">
+              <a:rPr lang="ru-RU" smtClean="0"/>
+              <a:t>25</a:t>
+            </a:fld>
+            <a:endParaRPr lang="ru-RU"/>
+          </a:p>
+        </p:txBody>
+      </p:sp>
+    </p:spTree>
+    <p:extLst>
+      <p:ext uri="{BB962C8B-B14F-4D97-AF65-F5344CB8AC3E}">
+        <p14:creationId xmlns:p14="http://schemas.microsoft.com/office/powerpoint/2010/main" val="3377006987"/>
+      </p:ext>
+    </p:extLst>
+  </p:cSld>
+  <p:clrMapOvr>
+    <a:masterClrMapping/>
+  </p:clrMapOvr>
+</p:notes>
+</file>
+
+<file path=ppt/notesSlides/notesSlide23.xml><?xml version="1.0" encoding="utf-8"?>
+<p:notes xmlns:a="http://schemas.openxmlformats.org/drawingml/2006/main" xmlns:r="http://schemas.openxmlformats.org/officeDocument/2006/relationships" xmlns:p="http://schemas.openxmlformats.org/presentationml/2006/main">
+  <p:cSld>
+    <p:spTree>
+      <p:nvGrpSpPr>
+        <p:cNvPr id="1" name=""/>
+        <p:cNvGrpSpPr/>
+        <p:nvPr/>
+      </p:nvGrpSpPr>
+      <p:grpSpPr>
+        <a:xfrm>
+          <a:off x="0" y="0"/>
+          <a:ext cx="0" cy="0"/>
+          <a:chOff x="0" y="0"/>
+          <a:chExt cx="0" cy="0"/>
+        </a:xfrm>
+      </p:grpSpPr>
+      <p:sp>
+        <p:nvSpPr>
+          <p:cNvPr id="2" name="Образ слайда 1"/>
+          <p:cNvSpPr>
+            <a:spLocks noGrp="1" noRot="1" noChangeAspect="1"/>
+          </p:cNvSpPr>
+          <p:nvPr>
+            <p:ph type="sldImg"/>
+          </p:nvPr>
+        </p:nvSpPr>
+        <p:spPr/>
+      </p:sp>
+      <p:sp>
+        <p:nvSpPr>
+          <p:cNvPr id="3" name="Заметки 2"/>
+          <p:cNvSpPr>
+            <a:spLocks noGrp="1"/>
+          </p:cNvSpPr>
+          <p:nvPr>
+            <p:ph type="body" idx="1"/>
+          </p:nvPr>
+        </p:nvSpPr>
+        <p:spPr/>
+        <p:txBody>
+          <a:bodyPr/>
+          <a:lstStyle/>
+          <a:p>
+            <a:endParaRPr lang="ru-RU" dirty="0"/>
+          </a:p>
+        </p:txBody>
+      </p:sp>
+      <p:sp>
+        <p:nvSpPr>
+          <p:cNvPr id="4" name="Номер слайда 3"/>
+          <p:cNvSpPr>
+            <a:spLocks noGrp="1"/>
+          </p:cNvSpPr>
+          <p:nvPr>
+            <p:ph type="sldNum" sz="quarter" idx="5"/>
+          </p:nvPr>
+        </p:nvSpPr>
+        <p:spPr/>
+        <p:txBody>
+          <a:bodyPr/>
+          <a:lstStyle/>
+          <a:p>
+            <a:fld id="{5E9A7E3A-ADC7-4226-B3BF-DCB7408A146C}" type="slidenum">
+              <a:rPr lang="ru-RU" smtClean="0"/>
+              <a:t>26</a:t>
+            </a:fld>
+            <a:endParaRPr lang="ru-RU"/>
+          </a:p>
+        </p:txBody>
+      </p:sp>
+    </p:spTree>
+    <p:extLst>
+      <p:ext uri="{BB962C8B-B14F-4D97-AF65-F5344CB8AC3E}">
+        <p14:creationId xmlns:p14="http://schemas.microsoft.com/office/powerpoint/2010/main" val="4103745003"/>
       </p:ext>
     </p:extLst>
   </p:cSld>
@@ -5321,342 +5317,6 @@
             <a:fld id="{5E9A7E3A-ADC7-4226-B3BF-DCB7408A146C}" type="slidenum">
               <a:rPr lang="ru-RU" smtClean="0"/>
               <a:t>27</a:t>
-            </a:fld>
-            <a:endParaRPr lang="ru-RU"/>
-          </a:p>
-        </p:txBody>
-      </p:sp>
-    </p:spTree>
-    <p:extLst>
-      <p:ext uri="{BB962C8B-B14F-4D97-AF65-F5344CB8AC3E}">
-        <p14:creationId xmlns:p14="http://schemas.microsoft.com/office/powerpoint/2010/main" val="1957457122"/>
-      </p:ext>
-    </p:extLst>
-  </p:cSld>
-  <p:clrMapOvr>
-    <a:masterClrMapping/>
-  </p:clrMapOvr>
-</p:notes>
-</file>
-
-<file path=ppt/notesSlides/notesSlide25.xml><?xml version="1.0" encoding="utf-8"?>
-<p:notes xmlns:a="http://schemas.openxmlformats.org/drawingml/2006/main" xmlns:r="http://schemas.openxmlformats.org/officeDocument/2006/relationships" xmlns:p="http://schemas.openxmlformats.org/presentationml/2006/main">
-  <p:cSld>
-    <p:spTree>
-      <p:nvGrpSpPr>
-        <p:cNvPr id="1" name=""/>
-        <p:cNvGrpSpPr/>
-        <p:nvPr/>
-      </p:nvGrpSpPr>
-      <p:grpSpPr>
-        <a:xfrm>
-          <a:off x="0" y="0"/>
-          <a:ext cx="0" cy="0"/>
-          <a:chOff x="0" y="0"/>
-          <a:chExt cx="0" cy="0"/>
-        </a:xfrm>
-      </p:grpSpPr>
-      <p:sp>
-        <p:nvSpPr>
-          <p:cNvPr id="2" name="Образ слайда 1"/>
-          <p:cNvSpPr>
-            <a:spLocks noGrp="1" noRot="1" noChangeAspect="1"/>
-          </p:cNvSpPr>
-          <p:nvPr>
-            <p:ph type="sldImg"/>
-          </p:nvPr>
-        </p:nvSpPr>
-        <p:spPr/>
-      </p:sp>
-      <p:sp>
-        <p:nvSpPr>
-          <p:cNvPr id="3" name="Заметки 2"/>
-          <p:cNvSpPr>
-            <a:spLocks noGrp="1"/>
-          </p:cNvSpPr>
-          <p:nvPr>
-            <p:ph type="body" idx="1"/>
-          </p:nvPr>
-        </p:nvSpPr>
-        <p:spPr/>
-        <p:txBody>
-          <a:bodyPr/>
-          <a:lstStyle/>
-          <a:p>
-            <a:endParaRPr lang="ru-RU" dirty="0"/>
-          </a:p>
-        </p:txBody>
-      </p:sp>
-      <p:sp>
-        <p:nvSpPr>
-          <p:cNvPr id="4" name="Номер слайда 3"/>
-          <p:cNvSpPr>
-            <a:spLocks noGrp="1"/>
-          </p:cNvSpPr>
-          <p:nvPr>
-            <p:ph type="sldNum" sz="quarter" idx="5"/>
-          </p:nvPr>
-        </p:nvSpPr>
-        <p:spPr/>
-        <p:txBody>
-          <a:bodyPr/>
-          <a:lstStyle/>
-          <a:p>
-            <a:fld id="{5E9A7E3A-ADC7-4226-B3BF-DCB7408A146C}" type="slidenum">
-              <a:rPr lang="ru-RU" smtClean="0"/>
-              <a:t>28</a:t>
-            </a:fld>
-            <a:endParaRPr lang="ru-RU"/>
-          </a:p>
-        </p:txBody>
-      </p:sp>
-    </p:spTree>
-    <p:extLst>
-      <p:ext uri="{BB962C8B-B14F-4D97-AF65-F5344CB8AC3E}">
-        <p14:creationId xmlns:p14="http://schemas.microsoft.com/office/powerpoint/2010/main" val="3465797690"/>
-      </p:ext>
-    </p:extLst>
-  </p:cSld>
-  <p:clrMapOvr>
-    <a:masterClrMapping/>
-  </p:clrMapOvr>
-</p:notes>
-</file>
-
-<file path=ppt/notesSlides/notesSlide26.xml><?xml version="1.0" encoding="utf-8"?>
-<p:notes xmlns:a="http://schemas.openxmlformats.org/drawingml/2006/main" xmlns:r="http://schemas.openxmlformats.org/officeDocument/2006/relationships" xmlns:p="http://schemas.openxmlformats.org/presentationml/2006/main">
-  <p:cSld>
-    <p:spTree>
-      <p:nvGrpSpPr>
-        <p:cNvPr id="1" name=""/>
-        <p:cNvGrpSpPr/>
-        <p:nvPr/>
-      </p:nvGrpSpPr>
-      <p:grpSpPr>
-        <a:xfrm>
-          <a:off x="0" y="0"/>
-          <a:ext cx="0" cy="0"/>
-          <a:chOff x="0" y="0"/>
-          <a:chExt cx="0" cy="0"/>
-        </a:xfrm>
-      </p:grpSpPr>
-      <p:sp>
-        <p:nvSpPr>
-          <p:cNvPr id="2" name="Образ слайда 1"/>
-          <p:cNvSpPr>
-            <a:spLocks noGrp="1" noRot="1" noChangeAspect="1"/>
-          </p:cNvSpPr>
-          <p:nvPr>
-            <p:ph type="sldImg"/>
-          </p:nvPr>
-        </p:nvSpPr>
-        <p:spPr/>
-      </p:sp>
-      <p:sp>
-        <p:nvSpPr>
-          <p:cNvPr id="3" name="Заметки 2"/>
-          <p:cNvSpPr>
-            <a:spLocks noGrp="1"/>
-          </p:cNvSpPr>
-          <p:nvPr>
-            <p:ph type="body" idx="1"/>
-          </p:nvPr>
-        </p:nvSpPr>
-        <p:spPr/>
-        <p:txBody>
-          <a:bodyPr/>
-          <a:lstStyle/>
-          <a:p>
-            <a:endParaRPr lang="ru-RU" dirty="0"/>
-          </a:p>
-        </p:txBody>
-      </p:sp>
-      <p:sp>
-        <p:nvSpPr>
-          <p:cNvPr id="4" name="Номер слайда 3"/>
-          <p:cNvSpPr>
-            <a:spLocks noGrp="1"/>
-          </p:cNvSpPr>
-          <p:nvPr>
-            <p:ph type="sldNum" sz="quarter" idx="5"/>
-          </p:nvPr>
-        </p:nvSpPr>
-        <p:spPr/>
-        <p:txBody>
-          <a:bodyPr/>
-          <a:lstStyle/>
-          <a:p>
-            <a:fld id="{5E9A7E3A-ADC7-4226-B3BF-DCB7408A146C}" type="slidenum">
-              <a:rPr lang="ru-RU" smtClean="0"/>
-              <a:t>29</a:t>
-            </a:fld>
-            <a:endParaRPr lang="ru-RU"/>
-          </a:p>
-        </p:txBody>
-      </p:sp>
-    </p:spTree>
-    <p:extLst>
-      <p:ext uri="{BB962C8B-B14F-4D97-AF65-F5344CB8AC3E}">
-        <p14:creationId xmlns:p14="http://schemas.microsoft.com/office/powerpoint/2010/main" val="3377006987"/>
-      </p:ext>
-    </p:extLst>
-  </p:cSld>
-  <p:clrMapOvr>
-    <a:masterClrMapping/>
-  </p:clrMapOvr>
-</p:notes>
-</file>
-
-<file path=ppt/notesSlides/notesSlide27.xml><?xml version="1.0" encoding="utf-8"?>
-<p:notes xmlns:a="http://schemas.openxmlformats.org/drawingml/2006/main" xmlns:r="http://schemas.openxmlformats.org/officeDocument/2006/relationships" xmlns:p="http://schemas.openxmlformats.org/presentationml/2006/main">
-  <p:cSld>
-    <p:spTree>
-      <p:nvGrpSpPr>
-        <p:cNvPr id="1" name=""/>
-        <p:cNvGrpSpPr/>
-        <p:nvPr/>
-      </p:nvGrpSpPr>
-      <p:grpSpPr>
-        <a:xfrm>
-          <a:off x="0" y="0"/>
-          <a:ext cx="0" cy="0"/>
-          <a:chOff x="0" y="0"/>
-          <a:chExt cx="0" cy="0"/>
-        </a:xfrm>
-      </p:grpSpPr>
-      <p:sp>
-        <p:nvSpPr>
-          <p:cNvPr id="2" name="Образ слайда 1"/>
-          <p:cNvSpPr>
-            <a:spLocks noGrp="1" noRot="1" noChangeAspect="1"/>
-          </p:cNvSpPr>
-          <p:nvPr>
-            <p:ph type="sldImg"/>
-          </p:nvPr>
-        </p:nvSpPr>
-        <p:spPr/>
-      </p:sp>
-      <p:sp>
-        <p:nvSpPr>
-          <p:cNvPr id="3" name="Заметки 2"/>
-          <p:cNvSpPr>
-            <a:spLocks noGrp="1"/>
-          </p:cNvSpPr>
-          <p:nvPr>
-            <p:ph type="body" idx="1"/>
-          </p:nvPr>
-        </p:nvSpPr>
-        <p:spPr/>
-        <p:txBody>
-          <a:bodyPr/>
-          <a:lstStyle/>
-          <a:p>
-            <a:endParaRPr lang="ru-RU" dirty="0"/>
-          </a:p>
-        </p:txBody>
-      </p:sp>
-      <p:sp>
-        <p:nvSpPr>
-          <p:cNvPr id="4" name="Номер слайда 3"/>
-          <p:cNvSpPr>
-            <a:spLocks noGrp="1"/>
-          </p:cNvSpPr>
-          <p:nvPr>
-            <p:ph type="sldNum" sz="quarter" idx="5"/>
-          </p:nvPr>
-        </p:nvSpPr>
-        <p:spPr/>
-        <p:txBody>
-          <a:bodyPr/>
-          <a:lstStyle/>
-          <a:p>
-            <a:fld id="{5E9A7E3A-ADC7-4226-B3BF-DCB7408A146C}" type="slidenum">
-              <a:rPr lang="ru-RU" smtClean="0"/>
-              <a:t>30</a:t>
-            </a:fld>
-            <a:endParaRPr lang="ru-RU"/>
-          </a:p>
-        </p:txBody>
-      </p:sp>
-    </p:spTree>
-    <p:extLst>
-      <p:ext uri="{BB962C8B-B14F-4D97-AF65-F5344CB8AC3E}">
-        <p14:creationId xmlns:p14="http://schemas.microsoft.com/office/powerpoint/2010/main" val="4103745003"/>
-      </p:ext>
-    </p:extLst>
-  </p:cSld>
-  <p:clrMapOvr>
-    <a:masterClrMapping/>
-  </p:clrMapOvr>
-</p:notes>
-</file>
-
-<file path=ppt/notesSlides/notesSlide28.xml><?xml version="1.0" encoding="utf-8"?>
-<p:notes xmlns:a="http://schemas.openxmlformats.org/drawingml/2006/main" xmlns:r="http://schemas.openxmlformats.org/officeDocument/2006/relationships" xmlns:p="http://schemas.openxmlformats.org/presentationml/2006/main">
-  <p:cSld>
-    <p:spTree>
-      <p:nvGrpSpPr>
-        <p:cNvPr id="1" name=""/>
-        <p:cNvGrpSpPr/>
-        <p:nvPr/>
-      </p:nvGrpSpPr>
-      <p:grpSpPr>
-        <a:xfrm>
-          <a:off x="0" y="0"/>
-          <a:ext cx="0" cy="0"/>
-          <a:chOff x="0" y="0"/>
-          <a:chExt cx="0" cy="0"/>
-        </a:xfrm>
-      </p:grpSpPr>
-      <p:sp>
-        <p:nvSpPr>
-          <p:cNvPr id="2" name="Образ слайда 1"/>
-          <p:cNvSpPr>
-            <a:spLocks noGrp="1" noRot="1" noChangeAspect="1"/>
-          </p:cNvSpPr>
-          <p:nvPr>
-            <p:ph type="sldImg"/>
-          </p:nvPr>
-        </p:nvSpPr>
-        <p:spPr/>
-      </p:sp>
-      <p:sp>
-        <p:nvSpPr>
-          <p:cNvPr id="3" name="Заметки 2"/>
-          <p:cNvSpPr>
-            <a:spLocks noGrp="1"/>
-          </p:cNvSpPr>
-          <p:nvPr>
-            <p:ph type="body" idx="1"/>
-          </p:nvPr>
-        </p:nvSpPr>
-        <p:spPr/>
-        <p:txBody>
-          <a:bodyPr/>
-          <a:lstStyle/>
-          <a:p>
-            <a:endParaRPr lang="ru-RU" dirty="0"/>
-          </a:p>
-        </p:txBody>
-      </p:sp>
-      <p:sp>
-        <p:nvSpPr>
-          <p:cNvPr id="4" name="Номер слайда 3"/>
-          <p:cNvSpPr>
-            <a:spLocks noGrp="1"/>
-          </p:cNvSpPr>
-          <p:nvPr>
-            <p:ph type="sldNum" sz="quarter" idx="5"/>
-          </p:nvPr>
-        </p:nvSpPr>
-        <p:spPr/>
-        <p:txBody>
-          <a:bodyPr/>
-          <a:lstStyle/>
-          <a:p>
-            <a:fld id="{5E9A7E3A-ADC7-4226-B3BF-DCB7408A146C}" type="slidenum">
-              <a:rPr lang="ru-RU" smtClean="0"/>
-              <a:t>31</a:t>
             </a:fld>
             <a:endParaRPr lang="ru-RU"/>
           </a:p>
@@ -6392,7 +6052,7 @@
           <a:p>
             <a:fld id="{44AC4E9E-3BE5-4665-BAE6-72CA507E8656}" type="datetimeFigureOut">
               <a:rPr lang="ru-RU" smtClean="0"/>
-              <a:t>10.02.2026</a:t>
+              <a:t>04.09.2026</a:t>
             </a:fld>
             <a:endParaRPr lang="ru-RU"/>
           </a:p>
@@ -6560,7 +6220,7 @@
           <a:p>
             <a:fld id="{44AC4E9E-3BE5-4665-BAE6-72CA507E8656}" type="datetimeFigureOut">
               <a:rPr lang="ru-RU" smtClean="0"/>
-              <a:t>10.02.2026</a:t>
+              <a:t>04.09.2026</a:t>
             </a:fld>
             <a:endParaRPr lang="ru-RU"/>
           </a:p>
@@ -6738,7 +6398,7 @@
           <a:p>
             <a:fld id="{44AC4E9E-3BE5-4665-BAE6-72CA507E8656}" type="datetimeFigureOut">
               <a:rPr lang="ru-RU" smtClean="0"/>
-              <a:t>10.02.2026</a:t>
+              <a:t>04.09.2026</a:t>
             </a:fld>
             <a:endParaRPr lang="ru-RU"/>
           </a:p>
@@ -6906,7 +6566,7 @@
           <a:p>
             <a:fld id="{44AC4E9E-3BE5-4665-BAE6-72CA507E8656}" type="datetimeFigureOut">
               <a:rPr lang="ru-RU" smtClean="0"/>
-              <a:t>10.02.2026</a:t>
+              <a:t>04.09.2026</a:t>
             </a:fld>
             <a:endParaRPr lang="ru-RU"/>
           </a:p>
@@ -7151,7 +6811,7 @@
           <a:p>
             <a:fld id="{44AC4E9E-3BE5-4665-BAE6-72CA507E8656}" type="datetimeFigureOut">
               <a:rPr lang="ru-RU" smtClean="0"/>
-              <a:t>10.02.2026</a:t>
+              <a:t>04.09.2026</a:t>
             </a:fld>
             <a:endParaRPr lang="ru-RU"/>
           </a:p>
@@ -7380,7 +7040,7 @@
           <a:p>
             <a:fld id="{44AC4E9E-3BE5-4665-BAE6-72CA507E8656}" type="datetimeFigureOut">
               <a:rPr lang="ru-RU" smtClean="0"/>
-              <a:t>10.02.2026</a:t>
+              <a:t>04.09.2026</a:t>
             </a:fld>
             <a:endParaRPr lang="ru-RU"/>
           </a:p>
@@ -7744,7 +7404,7 @@
           <a:p>
             <a:fld id="{44AC4E9E-3BE5-4665-BAE6-72CA507E8656}" type="datetimeFigureOut">
               <a:rPr lang="ru-RU" smtClean="0"/>
-              <a:t>10.02.2026</a:t>
+              <a:t>04.09.2026</a:t>
             </a:fld>
             <a:endParaRPr lang="ru-RU"/>
           </a:p>
@@ -7861,7 +7521,7 @@
           <a:p>
             <a:fld id="{44AC4E9E-3BE5-4665-BAE6-72CA507E8656}" type="datetimeFigureOut">
               <a:rPr lang="ru-RU" smtClean="0"/>
-              <a:t>10.02.2026</a:t>
+              <a:t>04.09.2026</a:t>
             </a:fld>
             <a:endParaRPr lang="ru-RU"/>
           </a:p>
@@ -7956,7 +7616,7 @@
           <a:p>
             <a:fld id="{44AC4E9E-3BE5-4665-BAE6-72CA507E8656}" type="datetimeFigureOut">
               <a:rPr lang="ru-RU" smtClean="0"/>
-              <a:t>10.02.2026</a:t>
+              <a:t>04.09.2026</a:t>
             </a:fld>
             <a:endParaRPr lang="ru-RU"/>
           </a:p>
@@ -8231,7 +7891,7 @@
           <a:p>
             <a:fld id="{44AC4E9E-3BE5-4665-BAE6-72CA507E8656}" type="datetimeFigureOut">
               <a:rPr lang="ru-RU" smtClean="0"/>
-              <a:t>10.02.2026</a:t>
+              <a:t>04.09.2026</a:t>
             </a:fld>
             <a:endParaRPr lang="ru-RU"/>
           </a:p>
@@ -8483,7 +8143,7 @@
           <a:p>
             <a:fld id="{44AC4E9E-3BE5-4665-BAE6-72CA507E8656}" type="datetimeFigureOut">
               <a:rPr lang="ru-RU" smtClean="0"/>
-              <a:t>10.02.2026</a:t>
+              <a:t>04.09.2026</a:t>
             </a:fld>
             <a:endParaRPr lang="ru-RU"/>
           </a:p>
@@ -8694,7 +8354,7 @@
           <a:p>
             <a:fld id="{44AC4E9E-3BE5-4665-BAE6-72CA507E8656}" type="datetimeFigureOut">
               <a:rPr lang="ru-RU" smtClean="0"/>
-              <a:t>10.02.2026</a:t>
+              <a:t>04.09.2026</a:t>
             </a:fld>
             <a:endParaRPr lang="ru-RU"/>
           </a:p>
@@ -15512,7 +15172,7 @@
                   <a:srgbClr val="FF0000"/>
                 </a:solidFill>
               </a:rPr>
-              <a:t>Данных много. Но данных мало…</a:t>
+              <a:t>Что можно делать с данными</a:t>
             </a:r>
           </a:p>
         </p:txBody>
@@ -15585,7 +15245,7 @@
           <p:cNvPr id="8" name="Содержимое 2">
             <a:extLst>
               <a:ext uri="{FF2B5EF4-FFF2-40B4-BE49-F238E27FC236}">
-                <a16:creationId xmlns:a16="http://schemas.microsoft.com/office/drawing/2014/main" id="{BBB4BE21-2603-4775-ADB6-08BF47858F24}"/>
+                <a16:creationId xmlns:a16="http://schemas.microsoft.com/office/drawing/2014/main" id="{1911E992-A783-4615-9C07-413E34B01F15}"/>
               </a:ext>
             </a:extLst>
           </p:cNvPr>
@@ -15596,8 +15256,8 @@
         </p:nvSpPr>
         <p:spPr>
           <a:xfrm>
-            <a:off x="201323" y="1519939"/>
-            <a:ext cx="3871955" cy="4525962"/>
+            <a:off x="743210" y="1251752"/>
+            <a:ext cx="5352790" cy="5165549"/>
           </a:xfrm>
           <a:prstGeom prst="rect">
             <a:avLst/>
@@ -15773,116 +15433,57 @@
           </a:lstStyle>
           <a:p>
             <a:r>
-              <a:rPr lang="ru-RU" altLang="ru-RU" sz="2000" dirty="0"/>
-              <a:t>Файлы</a:t>
-            </a:r>
-            <a:r>
-              <a:rPr lang="en-US" altLang="ru-RU" sz="2000" dirty="0"/>
-              <a:t> </a:t>
-            </a:r>
-            <a:r>
-              <a:rPr lang="ru-RU" altLang="ru-RU" sz="2000" dirty="0"/>
-              <a:t>различной структуры</a:t>
-            </a:r>
-          </a:p>
-          <a:p>
-            <a:r>
-              <a:rPr lang="en-US" altLang="ru-RU" sz="2000" dirty="0"/>
-              <a:t>XML/JSON</a:t>
-            </a:r>
-            <a:r>
-              <a:rPr lang="ru-RU" altLang="ru-RU" sz="2000" dirty="0"/>
-              <a:t> + </a:t>
-            </a:r>
-            <a:r>
-              <a:rPr lang="en-US" altLang="ru-RU" sz="2000" dirty="0"/>
-              <a:t>API</a:t>
-            </a:r>
-            <a:endParaRPr lang="ru-RU" altLang="ru-RU" sz="2000" dirty="0"/>
-          </a:p>
-          <a:p>
-            <a:r>
-              <a:rPr lang="ru-RU" altLang="ru-RU" sz="2000" dirty="0"/>
-              <a:t>Телеметрия</a:t>
-            </a:r>
-            <a:r>
-              <a:rPr lang="en-US" altLang="ru-RU" sz="2000" dirty="0"/>
-              <a:t> (OPC, </a:t>
-            </a:r>
-            <a:r>
-              <a:rPr lang="en-US" altLang="ru-RU" sz="2000" dirty="0" err="1"/>
-              <a:t>snmp</a:t>
-            </a:r>
-            <a:r>
-              <a:rPr lang="en-US" altLang="ru-RU" sz="2000" dirty="0"/>
-              <a:t>, </a:t>
-            </a:r>
-            <a:r>
-              <a:rPr lang="en-US" altLang="ru-RU" sz="2000" dirty="0" err="1"/>
-              <a:t>modbus</a:t>
-            </a:r>
-            <a:r>
-              <a:rPr lang="en-US" altLang="ru-RU" sz="2000" dirty="0"/>
-              <a:t>, syslog)</a:t>
-            </a:r>
-            <a:endParaRPr lang="ru-RU" altLang="ru-RU" sz="2000" dirty="0"/>
-          </a:p>
-          <a:p>
-            <a:r>
-              <a:rPr lang="ru-RU" altLang="ru-RU" sz="2000" dirty="0"/>
-              <a:t>Базы данных</a:t>
-            </a:r>
-            <a:r>
-              <a:rPr lang="en-US" altLang="ru-RU" sz="2000" dirty="0"/>
-              <a:t> (SQL, </a:t>
-            </a:r>
-            <a:r>
-              <a:rPr lang="en-US" altLang="ru-RU" sz="2000" dirty="0" err="1"/>
-              <a:t>noSQL</a:t>
-            </a:r>
-            <a:r>
-              <a:rPr lang="en-US" altLang="ru-RU" sz="2000" dirty="0"/>
-              <a:t>)</a:t>
-            </a:r>
-          </a:p>
-          <a:p>
-            <a:r>
-              <a:rPr lang="en-US" altLang="ru-RU" sz="2000" dirty="0"/>
-              <a:t>IoT</a:t>
-            </a:r>
-          </a:p>
-          <a:p>
-            <a:r>
-              <a:rPr lang="ru-RU" altLang="ru-RU" sz="2000" dirty="0"/>
-              <a:t>Физические системы безопасности (СВН, СКУД)</a:t>
-            </a:r>
-          </a:p>
-          <a:p>
-            <a:r>
-              <a:rPr lang="ru-RU" altLang="ru-RU" sz="2000" dirty="0"/>
-              <a:t>Данные из информационных систем</a:t>
-            </a:r>
-            <a:r>
-              <a:rPr lang="en-US" altLang="ru-RU" sz="2000" dirty="0"/>
-              <a:t> (CRM, ERP)</a:t>
-            </a:r>
-            <a:endParaRPr lang="ru-RU" altLang="ru-RU" sz="2000" dirty="0"/>
-          </a:p>
-          <a:p>
-            <a:r>
-              <a:rPr lang="ru-RU" altLang="ru-RU" sz="2000" dirty="0"/>
-              <a:t>…</a:t>
-            </a:r>
-            <a:endParaRPr lang="en-US" altLang="ru-RU" sz="2000" dirty="0"/>
+              <a:rPr lang="ru-RU" altLang="ru-RU" dirty="0"/>
+              <a:t>Поиск, извлечение, сбор</a:t>
+            </a:r>
+          </a:p>
+          <a:p>
+            <a:r>
+              <a:rPr lang="ru-RU" altLang="ru-RU" dirty="0"/>
+              <a:t>Обработка</a:t>
+            </a:r>
+          </a:p>
+          <a:p>
+            <a:r>
+              <a:rPr lang="ru-RU" altLang="ru-RU" dirty="0"/>
+              <a:t>Передача и хранение</a:t>
+            </a:r>
+          </a:p>
+          <a:p>
+            <a:r>
+              <a:rPr lang="ru-RU" altLang="ru-RU" dirty="0"/>
+              <a:t>Анализ, верификация, исправление ошибок, подготовка к использованию</a:t>
+            </a:r>
+          </a:p>
+          <a:p>
+            <a:r>
+              <a:rPr lang="ru-RU" altLang="ru-RU" dirty="0"/>
+              <a:t>Организация доступа</a:t>
+            </a:r>
+          </a:p>
+          <a:p>
+            <a:r>
+              <a:rPr lang="ru-RU" altLang="ru-RU" dirty="0"/>
+              <a:t>Использование</a:t>
+            </a:r>
+          </a:p>
+          <a:p>
+            <a:r>
+              <a:rPr lang="ru-RU" altLang="ru-RU" dirty="0"/>
+              <a:t>Создание полезного продукта (визуализация, аналитика, автоматизация)</a:t>
+            </a:r>
+          </a:p>
+          <a:p>
+            <a:endParaRPr lang="ru-RU" altLang="ru-RU" dirty="0"/>
           </a:p>
         </p:txBody>
       </p:sp>
       <p:pic>
         <p:nvPicPr>
-          <p:cNvPr id="10" name="Рисунок 4">
+          <p:cNvPr id="10" name="Picture 2">
             <a:extLst>
               <a:ext uri="{FF2B5EF4-FFF2-40B4-BE49-F238E27FC236}">
-                <a16:creationId xmlns:a16="http://schemas.microsoft.com/office/drawing/2014/main" id="{7AC9B5E0-F6DE-4AB5-8FAB-F2DDB50FB0FE}"/>
+                <a16:creationId xmlns:a16="http://schemas.microsoft.com/office/drawing/2014/main" id="{66493536-D35C-4EAE-9BD3-D9746273E5C2}"/>
               </a:ext>
             </a:extLst>
           </p:cNvPr>
@@ -15892,7 +15493,7 @@
           <p:nvPr/>
         </p:nvPicPr>
         <p:blipFill>
-          <a:blip r:embed="rId4" cstate="print">
+          <a:blip r:embed="rId4">
             <a:extLst>
               <a:ext uri="{28A0092B-C50C-407E-A947-70E740481C1C}">
                 <a14:useLocalDpi xmlns:a14="http://schemas.microsoft.com/office/drawing/2010/main" val="0"/>
@@ -15906,8 +15507,8 @@
         </p:blipFill>
         <p:spPr bwMode="auto">
           <a:xfrm>
-            <a:off x="4184448" y="3328194"/>
-            <a:ext cx="4700588" cy="2166937"/>
+            <a:off x="6668510" y="1251752"/>
+            <a:ext cx="5174282" cy="2444990"/>
           </a:xfrm>
           <a:prstGeom prst="rect">
             <a:avLst/>
@@ -15939,10 +15540,10 @@
       </p:pic>
       <p:pic>
         <p:nvPicPr>
-          <p:cNvPr id="11" name="Рисунок 5">
+          <p:cNvPr id="11" name="Picture 2">
             <a:extLst>
               <a:ext uri="{FF2B5EF4-FFF2-40B4-BE49-F238E27FC236}">
-                <a16:creationId xmlns:a16="http://schemas.microsoft.com/office/drawing/2014/main" id="{FCDE85B7-7F6D-4E80-BC4B-1E994A15BA6C}"/>
+                <a16:creationId xmlns:a16="http://schemas.microsoft.com/office/drawing/2014/main" id="{B205F4BD-BECF-439A-9F3E-6C07574BB76E}"/>
               </a:ext>
             </a:extLst>
           </p:cNvPr>
@@ -15966,8 +15567,8 @@
         </p:blipFill>
         <p:spPr bwMode="auto">
           <a:xfrm>
-            <a:off x="9157078" y="4356329"/>
-            <a:ext cx="1593850" cy="1782763"/>
+            <a:off x="6668510" y="3811003"/>
+            <a:ext cx="5183855" cy="2499456"/>
           </a:xfrm>
           <a:prstGeom prst="rect">
             <a:avLst/>
@@ -15997,130 +15598,10 @@
           </a:extLst>
         </p:spPr>
       </p:pic>
-      <p:pic>
-        <p:nvPicPr>
-          <p:cNvPr id="13" name="Рисунок 6">
-            <a:extLst>
-              <a:ext uri="{FF2B5EF4-FFF2-40B4-BE49-F238E27FC236}">
-                <a16:creationId xmlns:a16="http://schemas.microsoft.com/office/drawing/2014/main" id="{CF8B2F26-5361-4488-90AE-48AA0A3233C9}"/>
-              </a:ext>
-            </a:extLst>
-          </p:cNvPr>
-          <p:cNvPicPr>
-            <a:picLocks noChangeAspect="1" noChangeArrowheads="1"/>
-          </p:cNvPicPr>
-          <p:nvPr/>
-        </p:nvPicPr>
-        <p:blipFill>
-          <a:blip r:embed="rId6" cstate="print">
-            <a:extLst>
-              <a:ext uri="{28A0092B-C50C-407E-A947-70E740481C1C}">
-                <a14:useLocalDpi xmlns:a14="http://schemas.microsoft.com/office/drawing/2010/main" val="0"/>
-              </a:ext>
-            </a:extLst>
-          </a:blip>
-          <a:srcRect/>
-          <a:stretch>
-            <a:fillRect/>
-          </a:stretch>
-        </p:blipFill>
-        <p:spPr bwMode="auto">
-          <a:xfrm>
-            <a:off x="4900498" y="1032253"/>
-            <a:ext cx="5484812" cy="1208087"/>
-          </a:xfrm>
-          <a:prstGeom prst="rect">
-            <a:avLst/>
-          </a:prstGeom>
-          <a:noFill/>
-          <a:ln>
-            <a:noFill/>
-          </a:ln>
-          <a:extLst>
-            <a:ext uri="{909E8E84-426E-40DD-AFC4-6F175D3DCCD1}">
-              <a14:hiddenFill xmlns:a14="http://schemas.microsoft.com/office/drawing/2010/main">
-                <a:solidFill>
-                  <a:srgbClr val="FFFFFF"/>
-                </a:solidFill>
-              </a14:hiddenFill>
-            </a:ext>
-            <a:ext uri="{91240B29-F687-4F45-9708-019B960494DF}">
-              <a14:hiddenLine xmlns:a14="http://schemas.microsoft.com/office/drawing/2010/main" w="9525">
-                <a:solidFill>
-                  <a:srgbClr val="000000"/>
-                </a:solidFill>
-                <a:miter lim="800000"/>
-                <a:headEnd/>
-                <a:tailEnd/>
-              </a14:hiddenLine>
-            </a:ext>
-          </a:extLst>
-        </p:spPr>
-      </p:pic>
-      <p:pic>
-        <p:nvPicPr>
-          <p:cNvPr id="14" name="Рисунок 2">
-            <a:extLst>
-              <a:ext uri="{FF2B5EF4-FFF2-40B4-BE49-F238E27FC236}">
-                <a16:creationId xmlns:a16="http://schemas.microsoft.com/office/drawing/2014/main" id="{DDB7C5D0-9456-42F9-85AA-F763F899DF54}"/>
-              </a:ext>
-            </a:extLst>
-          </p:cNvPr>
-          <p:cNvPicPr>
-            <a:picLocks noChangeAspect="1" noChangeArrowheads="1"/>
-          </p:cNvPicPr>
-          <p:nvPr/>
-        </p:nvPicPr>
-        <p:blipFill>
-          <a:blip r:embed="rId7">
-            <a:extLst>
-              <a:ext uri="{28A0092B-C50C-407E-A947-70E740481C1C}">
-                <a14:useLocalDpi xmlns:a14="http://schemas.microsoft.com/office/drawing/2010/main" val="0"/>
-              </a:ext>
-            </a:extLst>
-          </a:blip>
-          <a:srcRect/>
-          <a:stretch>
-            <a:fillRect/>
-          </a:stretch>
-        </p:blipFill>
-        <p:spPr bwMode="auto">
-          <a:xfrm>
-            <a:off x="9013648" y="2398854"/>
-            <a:ext cx="2977029" cy="1317800"/>
-          </a:xfrm>
-          <a:prstGeom prst="rect">
-            <a:avLst/>
-          </a:prstGeom>
-          <a:noFill/>
-          <a:ln>
-            <a:noFill/>
-          </a:ln>
-          <a:extLst>
-            <a:ext uri="{909E8E84-426E-40DD-AFC4-6F175D3DCCD1}">
-              <a14:hiddenFill xmlns:a14="http://schemas.microsoft.com/office/drawing/2010/main">
-                <a:solidFill>
-                  <a:srgbClr val="FFFFFF"/>
-                </a:solidFill>
-              </a14:hiddenFill>
-            </a:ext>
-            <a:ext uri="{91240B29-F687-4F45-9708-019B960494DF}">
-              <a14:hiddenLine xmlns:a14="http://schemas.microsoft.com/office/drawing/2010/main" w="9525">
-                <a:solidFill>
-                  <a:srgbClr val="000000"/>
-                </a:solidFill>
-                <a:miter lim="800000"/>
-                <a:headEnd/>
-                <a:tailEnd/>
-              </a14:hiddenLine>
-            </a:ext>
-          </a:extLst>
-        </p:spPr>
-      </p:pic>
     </p:spTree>
     <p:extLst>
       <p:ext uri="{BB962C8B-B14F-4D97-AF65-F5344CB8AC3E}">
-        <p14:creationId xmlns:p14="http://schemas.microsoft.com/office/powerpoint/2010/main" val="1869688364"/>
+        <p14:creationId xmlns:p14="http://schemas.microsoft.com/office/powerpoint/2010/main" val="871366438"/>
       </p:ext>
     </p:extLst>
   </p:cSld>
@@ -16135,7 +15616,13 @@
   <p:cSld>
     <p:spTree>
       <p:nvGrpSpPr>
-        <p:cNvPr id="1" name=""/>
+        <p:cNvPr id="1" name="">
+          <a:extLst>
+            <a:ext uri="{FF2B5EF4-FFF2-40B4-BE49-F238E27FC236}">
+              <a16:creationId xmlns:a16="http://schemas.microsoft.com/office/drawing/2014/main" id="{577301C0-FA7A-3623-C320-711F5F141BE3}"/>
+            </a:ext>
+          </a:extLst>
+        </p:cNvPr>
         <p:cNvGrpSpPr/>
         <p:nvPr/>
       </p:nvGrpSpPr>
@@ -16149,7 +15636,13 @@
       </p:grpSpPr>
       <p:sp>
         <p:nvSpPr>
-          <p:cNvPr id="3" name="Прямоугольник 2"/>
+          <p:cNvPr id="3" name="Прямоугольник 2">
+            <a:extLst>
+              <a:ext uri="{FF2B5EF4-FFF2-40B4-BE49-F238E27FC236}">
+                <a16:creationId xmlns:a16="http://schemas.microsoft.com/office/drawing/2014/main" id="{87D26C56-559A-4EF7-6010-FF64E3A9E949}"/>
+              </a:ext>
+            </a:extLst>
+          </p:cNvPr>
           <p:cNvSpPr/>
           <p:nvPr/>
         </p:nvSpPr>
@@ -16202,7 +15695,7 @@
           <p:cNvPr id="4" name="TextBox 9">
             <a:extLst>
               <a:ext uri="{FF2B5EF4-FFF2-40B4-BE49-F238E27FC236}">
-                <a16:creationId xmlns:a16="http://schemas.microsoft.com/office/drawing/2014/main" id="{6D1610F7-A0C9-4E50-9206-D9E394A55B73}"/>
+                <a16:creationId xmlns:a16="http://schemas.microsoft.com/office/drawing/2014/main" id="{F05BBB0F-A129-4893-83B8-0303916DE418}"/>
               </a:ext>
             </a:extLst>
           </p:cNvPr>
@@ -16325,8 +15818,21 @@
                   <a:srgbClr val="FF0000"/>
                 </a:solidFill>
               </a:rPr>
-              <a:t>Особенно мало хороших данных</a:t>
-            </a:r>
+              <a:t>Задачи обработки данных. </a:t>
+            </a:r>
+            <a:r>
+              <a:rPr lang="en-US" sz="2800" b="1" dirty="0">
+                <a:solidFill>
+                  <a:srgbClr val="FF0000"/>
+                </a:solidFill>
+              </a:rPr>
+              <a:t>OLTP</a:t>
+            </a:r>
+            <a:endParaRPr lang="ru-RU" sz="2800" b="1" dirty="0">
+              <a:solidFill>
+                <a:srgbClr val="FF0000"/>
+              </a:solidFill>
+            </a:endParaRPr>
           </a:p>
         </p:txBody>
       </p:sp>
@@ -16335,7 +15841,7 @@
           <p:cNvPr id="6" name="Номер слайда 5">
             <a:extLst>
               <a:ext uri="{FF2B5EF4-FFF2-40B4-BE49-F238E27FC236}">
-                <a16:creationId xmlns:a16="http://schemas.microsoft.com/office/drawing/2014/main" id="{2A73E36B-93CF-4B6D-9D12-D242EBAEB367}"/>
+                <a16:creationId xmlns:a16="http://schemas.microsoft.com/office/drawing/2014/main" id="{BF0B3DC4-BB4F-B5B3-4AC5-926B80ACC53D}"/>
               </a:ext>
             </a:extLst>
           </p:cNvPr>
@@ -16354,1290 +15860,6 @@
             <a:fld id="{FF9AC15E-FCD1-4167-800F-1DB8497ABFCE}" type="slidenum">
               <a:rPr lang="ru-RU" smtClean="0"/>
               <a:t>23</a:t>
-            </a:fld>
-            <a:endParaRPr lang="ru-RU"/>
-          </a:p>
-        </p:txBody>
-      </p:sp>
-      <p:pic>
-        <p:nvPicPr>
-          <p:cNvPr id="9" name="Объект 1">
-            <a:extLst>
-              <a:ext uri="{FF2B5EF4-FFF2-40B4-BE49-F238E27FC236}">
-                <a16:creationId xmlns:a16="http://schemas.microsoft.com/office/drawing/2014/main" id="{D8975343-2B37-104D-8757-0404410E4582}"/>
-              </a:ext>
-            </a:extLst>
-          </p:cNvPr>
-          <p:cNvPicPr>
-            <a:picLocks noGrp="1" noChangeAspect="1"/>
-          </p:cNvPicPr>
-          <p:nvPr>
-            <p:ph idx="1"/>
-          </p:nvPr>
-        </p:nvPicPr>
-        <p:blipFill rotWithShape="1">
-          <a:blip r:embed="rId3" cstate="print">
-            <a:extLst>
-              <a:ext uri="{28A0092B-C50C-407E-A947-70E740481C1C}">
-                <a14:useLocalDpi xmlns:a14="http://schemas.microsoft.com/office/drawing/2010/main" val="0"/>
-              </a:ext>
-            </a:extLst>
-          </a:blip>
-          <a:srcRect r="40340"/>
-          <a:stretch/>
-        </p:blipFill>
-        <p:spPr>
-          <a:xfrm>
-            <a:off x="603100" y="319559"/>
-            <a:ext cx="1342931" cy="434420"/>
-          </a:xfrm>
-        </p:spPr>
-      </p:pic>
-      <p:sp>
-        <p:nvSpPr>
-          <p:cNvPr id="8" name="Содержимое 2">
-            <a:extLst>
-              <a:ext uri="{FF2B5EF4-FFF2-40B4-BE49-F238E27FC236}">
-                <a16:creationId xmlns:a16="http://schemas.microsoft.com/office/drawing/2014/main" id="{B5E9934B-FFF4-4B45-ACE3-BAD19AC420BE}"/>
-              </a:ext>
-            </a:extLst>
-          </p:cNvPr>
-          <p:cNvSpPr txBox="1">
-            <a:spLocks/>
-          </p:cNvSpPr>
-          <p:nvPr/>
-        </p:nvSpPr>
-        <p:spPr>
-          <a:xfrm>
-            <a:off x="1095375" y="1921669"/>
-            <a:ext cx="3333750" cy="3014662"/>
-          </a:xfrm>
-          <a:prstGeom prst="rect">
-            <a:avLst/>
-          </a:prstGeom>
-        </p:spPr>
-        <p:txBody>
-          <a:bodyPr vert="horz" lIns="91440" tIns="45720" rIns="91440" bIns="45720" rtlCol="0">
-            <a:normAutofit/>
-          </a:bodyPr>
-          <a:lstStyle>
-            <a:lvl1pPr marL="228600" indent="-228600" algn="l" defTabSz="914400" rtl="0" eaLnBrk="1" latinLnBrk="0" hangingPunct="1">
-              <a:lnSpc>
-                <a:spcPct val="90000"/>
-              </a:lnSpc>
-              <a:spcBef>
-                <a:spcPts val="1000"/>
-              </a:spcBef>
-              <a:buFont typeface="Arial" panose="020B0604020202020204" pitchFamily="34" charset="0"/>
-              <a:buChar char="•"/>
-              <a:defRPr sz="2800" kern="1200">
-                <a:solidFill>
-                  <a:schemeClr val="tx1"/>
-                </a:solidFill>
-                <a:latin typeface="+mn-lt"/>
-                <a:ea typeface="+mn-ea"/>
-                <a:cs typeface="+mn-cs"/>
-              </a:defRPr>
-            </a:lvl1pPr>
-            <a:lvl2pPr marL="685800" indent="-228600" algn="l" defTabSz="914400" rtl="0" eaLnBrk="1" latinLnBrk="0" hangingPunct="1">
-              <a:lnSpc>
-                <a:spcPct val="90000"/>
-              </a:lnSpc>
-              <a:spcBef>
-                <a:spcPts val="500"/>
-              </a:spcBef>
-              <a:buFont typeface="Arial" panose="020B0604020202020204" pitchFamily="34" charset="0"/>
-              <a:buChar char="•"/>
-              <a:defRPr sz="2400" kern="1200">
-                <a:solidFill>
-                  <a:schemeClr val="tx1"/>
-                </a:solidFill>
-                <a:latin typeface="+mn-lt"/>
-                <a:ea typeface="+mn-ea"/>
-                <a:cs typeface="+mn-cs"/>
-              </a:defRPr>
-            </a:lvl2pPr>
-            <a:lvl3pPr marL="1143000" indent="-228600" algn="l" defTabSz="914400" rtl="0" eaLnBrk="1" latinLnBrk="0" hangingPunct="1">
-              <a:lnSpc>
-                <a:spcPct val="90000"/>
-              </a:lnSpc>
-              <a:spcBef>
-                <a:spcPts val="500"/>
-              </a:spcBef>
-              <a:buFont typeface="Arial" panose="020B0604020202020204" pitchFamily="34" charset="0"/>
-              <a:buChar char="•"/>
-              <a:defRPr sz="2000" kern="1200">
-                <a:solidFill>
-                  <a:schemeClr val="tx1"/>
-                </a:solidFill>
-                <a:latin typeface="+mn-lt"/>
-                <a:ea typeface="+mn-ea"/>
-                <a:cs typeface="+mn-cs"/>
-              </a:defRPr>
-            </a:lvl3pPr>
-            <a:lvl4pPr marL="1600200" indent="-228600" algn="l" defTabSz="914400" rtl="0" eaLnBrk="1" latinLnBrk="0" hangingPunct="1">
-              <a:lnSpc>
-                <a:spcPct val="90000"/>
-              </a:lnSpc>
-              <a:spcBef>
-                <a:spcPts val="500"/>
-              </a:spcBef>
-              <a:buFont typeface="Arial" panose="020B0604020202020204" pitchFamily="34" charset="0"/>
-              <a:buChar char="•"/>
-              <a:defRPr sz="1800" kern="1200">
-                <a:solidFill>
-                  <a:schemeClr val="tx1"/>
-                </a:solidFill>
-                <a:latin typeface="+mn-lt"/>
-                <a:ea typeface="+mn-ea"/>
-                <a:cs typeface="+mn-cs"/>
-              </a:defRPr>
-            </a:lvl4pPr>
-            <a:lvl5pPr marL="2057400" indent="-228600" algn="l" defTabSz="914400" rtl="0" eaLnBrk="1" latinLnBrk="0" hangingPunct="1">
-              <a:lnSpc>
-                <a:spcPct val="90000"/>
-              </a:lnSpc>
-              <a:spcBef>
-                <a:spcPts val="500"/>
-              </a:spcBef>
-              <a:buFont typeface="Arial" panose="020B0604020202020204" pitchFamily="34" charset="0"/>
-              <a:buChar char="•"/>
-              <a:defRPr sz="1800" kern="1200">
-                <a:solidFill>
-                  <a:schemeClr val="tx1"/>
-                </a:solidFill>
-                <a:latin typeface="+mn-lt"/>
-                <a:ea typeface="+mn-ea"/>
-                <a:cs typeface="+mn-cs"/>
-              </a:defRPr>
-            </a:lvl5pPr>
-            <a:lvl6pPr marL="2514600" indent="-228600" algn="l" defTabSz="914400" rtl="0" eaLnBrk="1" latinLnBrk="0" hangingPunct="1">
-              <a:lnSpc>
-                <a:spcPct val="90000"/>
-              </a:lnSpc>
-              <a:spcBef>
-                <a:spcPts val="500"/>
-              </a:spcBef>
-              <a:buFont typeface="Arial" panose="020B0604020202020204" pitchFamily="34" charset="0"/>
-              <a:buChar char="•"/>
-              <a:defRPr sz="1800" kern="1200">
-                <a:solidFill>
-                  <a:schemeClr val="tx1"/>
-                </a:solidFill>
-                <a:latin typeface="+mn-lt"/>
-                <a:ea typeface="+mn-ea"/>
-                <a:cs typeface="+mn-cs"/>
-              </a:defRPr>
-            </a:lvl6pPr>
-            <a:lvl7pPr marL="2971800" indent="-228600" algn="l" defTabSz="914400" rtl="0" eaLnBrk="1" latinLnBrk="0" hangingPunct="1">
-              <a:lnSpc>
-                <a:spcPct val="90000"/>
-              </a:lnSpc>
-              <a:spcBef>
-                <a:spcPts val="500"/>
-              </a:spcBef>
-              <a:buFont typeface="Arial" panose="020B0604020202020204" pitchFamily="34" charset="0"/>
-              <a:buChar char="•"/>
-              <a:defRPr sz="1800" kern="1200">
-                <a:solidFill>
-                  <a:schemeClr val="tx1"/>
-                </a:solidFill>
-                <a:latin typeface="+mn-lt"/>
-                <a:ea typeface="+mn-ea"/>
-                <a:cs typeface="+mn-cs"/>
-              </a:defRPr>
-            </a:lvl7pPr>
-            <a:lvl8pPr marL="3429000" indent="-228600" algn="l" defTabSz="914400" rtl="0" eaLnBrk="1" latinLnBrk="0" hangingPunct="1">
-              <a:lnSpc>
-                <a:spcPct val="90000"/>
-              </a:lnSpc>
-              <a:spcBef>
-                <a:spcPts val="500"/>
-              </a:spcBef>
-              <a:buFont typeface="Arial" panose="020B0604020202020204" pitchFamily="34" charset="0"/>
-              <a:buChar char="•"/>
-              <a:defRPr sz="1800" kern="1200">
-                <a:solidFill>
-                  <a:schemeClr val="tx1"/>
-                </a:solidFill>
-                <a:latin typeface="+mn-lt"/>
-                <a:ea typeface="+mn-ea"/>
-                <a:cs typeface="+mn-cs"/>
-              </a:defRPr>
-            </a:lvl8pPr>
-            <a:lvl9pPr marL="3886200" indent="-228600" algn="l" defTabSz="914400" rtl="0" eaLnBrk="1" latinLnBrk="0" hangingPunct="1">
-              <a:lnSpc>
-                <a:spcPct val="90000"/>
-              </a:lnSpc>
-              <a:spcBef>
-                <a:spcPts val="500"/>
-              </a:spcBef>
-              <a:buFont typeface="Arial" panose="020B0604020202020204" pitchFamily="34" charset="0"/>
-              <a:buChar char="•"/>
-              <a:defRPr sz="1800" kern="1200">
-                <a:solidFill>
-                  <a:schemeClr val="tx1"/>
-                </a:solidFill>
-                <a:latin typeface="+mn-lt"/>
-                <a:ea typeface="+mn-ea"/>
-                <a:cs typeface="+mn-cs"/>
-              </a:defRPr>
-            </a:lvl9pPr>
-          </a:lstStyle>
-          <a:p>
-            <a:r>
-              <a:rPr lang="ru-RU" altLang="ru-RU" sz="2400" dirty="0"/>
-              <a:t>Очистка от шумов</a:t>
-            </a:r>
-          </a:p>
-          <a:p>
-            <a:r>
-              <a:rPr lang="ru-RU" altLang="ru-RU" sz="2400" dirty="0"/>
-              <a:t>Анализ пиков</a:t>
-            </a:r>
-          </a:p>
-          <a:p>
-            <a:r>
-              <a:rPr lang="ru-RU" altLang="ru-RU" sz="2400" dirty="0"/>
-              <a:t>Регуляризация</a:t>
-            </a:r>
-          </a:p>
-          <a:p>
-            <a:r>
-              <a:rPr lang="ru-RU" altLang="ru-RU" sz="2400" dirty="0"/>
-              <a:t>Приведение типов</a:t>
-            </a:r>
-          </a:p>
-          <a:p>
-            <a:r>
-              <a:rPr lang="ru-RU" altLang="ru-RU" sz="2400" dirty="0"/>
-              <a:t>Прореживание</a:t>
-            </a:r>
-          </a:p>
-          <a:p>
-            <a:r>
-              <a:rPr lang="ru-RU" altLang="ru-RU" sz="2400" dirty="0"/>
-              <a:t>Обогащение</a:t>
-            </a:r>
-          </a:p>
-        </p:txBody>
-      </p:sp>
-      <p:pic>
-        <p:nvPicPr>
-          <p:cNvPr id="10" name="image4.png">
-            <a:extLst>
-              <a:ext uri="{FF2B5EF4-FFF2-40B4-BE49-F238E27FC236}">
-                <a16:creationId xmlns:a16="http://schemas.microsoft.com/office/drawing/2014/main" id="{05B412BA-339A-4E2F-BBC3-0A37954D9EB1}"/>
-              </a:ext>
-            </a:extLst>
-          </p:cNvPr>
-          <p:cNvPicPr>
-            <a:picLocks noChangeAspect="1" noChangeArrowheads="1"/>
-          </p:cNvPicPr>
-          <p:nvPr/>
-        </p:nvPicPr>
-        <p:blipFill>
-          <a:blip r:embed="rId4">
-            <a:extLst>
-              <a:ext uri="{28A0092B-C50C-407E-A947-70E740481C1C}">
-                <a14:useLocalDpi xmlns:a14="http://schemas.microsoft.com/office/drawing/2010/main" val="0"/>
-              </a:ext>
-            </a:extLst>
-          </a:blip>
-          <a:srcRect/>
-          <a:stretch>
-            <a:fillRect/>
-          </a:stretch>
-        </p:blipFill>
-        <p:spPr bwMode="auto">
-          <a:xfrm>
-            <a:off x="5591875" y="1237004"/>
-            <a:ext cx="3897756" cy="2811952"/>
-          </a:xfrm>
-          <a:prstGeom prst="rect">
-            <a:avLst/>
-          </a:prstGeom>
-          <a:noFill/>
-          <a:ln>
-            <a:noFill/>
-          </a:ln>
-          <a:extLst>
-            <a:ext uri="{909E8E84-426E-40DD-AFC4-6F175D3DCCD1}">
-              <a14:hiddenFill xmlns:a14="http://schemas.microsoft.com/office/drawing/2010/main">
-                <a:solidFill>
-                  <a:srgbClr val="FFFFFF"/>
-                </a:solidFill>
-              </a14:hiddenFill>
-            </a:ext>
-            <a:ext uri="{91240B29-F687-4F45-9708-019B960494DF}">
-              <a14:hiddenLine xmlns:a14="http://schemas.microsoft.com/office/drawing/2010/main" w="9525">
-                <a:solidFill>
-                  <a:srgbClr val="000000"/>
-                </a:solidFill>
-                <a:miter lim="800000"/>
-                <a:headEnd/>
-                <a:tailEnd/>
-              </a14:hiddenLine>
-            </a:ext>
-          </a:extLst>
-        </p:spPr>
-      </p:pic>
-      <p:pic>
-        <p:nvPicPr>
-          <p:cNvPr id="11" name="Рисунок 1">
-            <a:extLst>
-              <a:ext uri="{FF2B5EF4-FFF2-40B4-BE49-F238E27FC236}">
-                <a16:creationId xmlns:a16="http://schemas.microsoft.com/office/drawing/2014/main" id="{DCCB08B6-A4F4-49A8-A399-1F106BC81D76}"/>
-              </a:ext>
-            </a:extLst>
-          </p:cNvPr>
-          <p:cNvPicPr>
-            <a:picLocks noChangeAspect="1" noChangeArrowheads="1"/>
-          </p:cNvPicPr>
-          <p:nvPr/>
-        </p:nvPicPr>
-        <p:blipFill>
-          <a:blip r:embed="rId5">
-            <a:extLst>
-              <a:ext uri="{28A0092B-C50C-407E-A947-70E740481C1C}">
-                <a14:useLocalDpi xmlns:a14="http://schemas.microsoft.com/office/drawing/2010/main" val="0"/>
-              </a:ext>
-            </a:extLst>
-          </a:blip>
-          <a:srcRect/>
-          <a:stretch>
-            <a:fillRect/>
-          </a:stretch>
-        </p:blipFill>
-        <p:spPr bwMode="auto">
-          <a:xfrm>
-            <a:off x="5690322" y="4342725"/>
-            <a:ext cx="3957637" cy="1846263"/>
-          </a:xfrm>
-          <a:prstGeom prst="rect">
-            <a:avLst/>
-          </a:prstGeom>
-          <a:noFill/>
-          <a:ln>
-            <a:noFill/>
-          </a:ln>
-          <a:extLst>
-            <a:ext uri="{909E8E84-426E-40DD-AFC4-6F175D3DCCD1}">
-              <a14:hiddenFill xmlns:a14="http://schemas.microsoft.com/office/drawing/2010/main">
-                <a:solidFill>
-                  <a:srgbClr val="FFFFFF"/>
-                </a:solidFill>
-              </a14:hiddenFill>
-            </a:ext>
-            <a:ext uri="{91240B29-F687-4F45-9708-019B960494DF}">
-              <a14:hiddenLine xmlns:a14="http://schemas.microsoft.com/office/drawing/2010/main" w="9525">
-                <a:solidFill>
-                  <a:srgbClr val="000000"/>
-                </a:solidFill>
-                <a:miter lim="800000"/>
-                <a:headEnd/>
-                <a:tailEnd/>
-              </a14:hiddenLine>
-            </a:ext>
-          </a:extLst>
-        </p:spPr>
-      </p:pic>
-    </p:spTree>
-    <p:extLst>
-      <p:ext uri="{BB962C8B-B14F-4D97-AF65-F5344CB8AC3E}">
-        <p14:creationId xmlns:p14="http://schemas.microsoft.com/office/powerpoint/2010/main" val="1555127823"/>
-      </p:ext>
-    </p:extLst>
-  </p:cSld>
-  <p:clrMapOvr>
-    <a:masterClrMapping/>
-  </p:clrMapOvr>
-</p:sld>
-</file>
-
-<file path=ppt/slides/slide24.xml><?xml version="1.0" encoding="utf-8"?>
-<p:sld xmlns:a="http://schemas.openxmlformats.org/drawingml/2006/main" xmlns:r="http://schemas.openxmlformats.org/officeDocument/2006/relationships" xmlns:p="http://schemas.openxmlformats.org/presentationml/2006/main">
-  <p:cSld>
-    <p:spTree>
-      <p:nvGrpSpPr>
-        <p:cNvPr id="1" name=""/>
-        <p:cNvGrpSpPr/>
-        <p:nvPr/>
-      </p:nvGrpSpPr>
-      <p:grpSpPr>
-        <a:xfrm>
-          <a:off x="0" y="0"/>
-          <a:ext cx="0" cy="0"/>
-          <a:chOff x="0" y="0"/>
-          <a:chExt cx="0" cy="0"/>
-        </a:xfrm>
-      </p:grpSpPr>
-      <p:sp>
-        <p:nvSpPr>
-          <p:cNvPr id="3" name="Прямоугольник 2"/>
-          <p:cNvSpPr/>
-          <p:nvPr/>
-        </p:nvSpPr>
-        <p:spPr>
-          <a:xfrm flipV="1">
-            <a:off x="925620" y="920165"/>
-            <a:ext cx="10865327" cy="21600"/>
-          </a:xfrm>
-          <a:prstGeom prst="rect">
-            <a:avLst/>
-          </a:prstGeom>
-          <a:solidFill>
-            <a:srgbClr val="E20443"/>
-          </a:solidFill>
-          <a:ln>
-            <a:noFill/>
-          </a:ln>
-        </p:spPr>
-        <p:style>
-          <a:lnRef idx="2">
-            <a:schemeClr val="accent1">
-              <a:shade val="50000"/>
-            </a:schemeClr>
-          </a:lnRef>
-          <a:fillRef idx="1">
-            <a:schemeClr val="accent1"/>
-          </a:fillRef>
-          <a:effectRef idx="0">
-            <a:schemeClr val="accent1"/>
-          </a:effectRef>
-          <a:fontRef idx="minor">
-            <a:schemeClr val="lt1"/>
-          </a:fontRef>
-        </p:style>
-        <p:txBody>
-          <a:bodyPr rtlCol="0" anchor="ctr"/>
-          <a:lstStyle/>
-          <a:p>
-            <a:pPr algn="ctr"/>
-            <a:endParaRPr lang="ru-RU">
-              <a:solidFill>
-                <a:srgbClr val="E20443"/>
-              </a:solidFill>
-            </a:endParaRPr>
-          </a:p>
-        </p:txBody>
-      </p:sp>
-      <p:sp>
-        <p:nvSpPr>
-          <p:cNvPr id="4" name="TextBox 9">
-            <a:extLst>
-              <a:ext uri="{FF2B5EF4-FFF2-40B4-BE49-F238E27FC236}">
-                <a16:creationId xmlns:a16="http://schemas.microsoft.com/office/drawing/2014/main" id="{6D1610F7-A0C9-4E50-9206-D9E394A55B73}"/>
-              </a:ext>
-            </a:extLst>
-          </p:cNvPr>
-          <p:cNvSpPr txBox="1"/>
-          <p:nvPr/>
-        </p:nvSpPr>
-        <p:spPr>
-          <a:xfrm>
-            <a:off x="2057400" y="219959"/>
-            <a:ext cx="9794965" cy="523220"/>
-          </a:xfrm>
-          <a:prstGeom prst="rect">
-            <a:avLst/>
-          </a:prstGeom>
-          <a:noFill/>
-        </p:spPr>
-        <p:txBody>
-          <a:bodyPr wrap="square" rtlCol="0">
-            <a:spAutoFit/>
-          </a:bodyPr>
-          <a:lstStyle>
-            <a:defPPr>
-              <a:defRPr lang="ru-RU"/>
-            </a:defPPr>
-            <a:lvl1pPr marL="0" algn="l" defTabSz="914400" rtl="0" eaLnBrk="1" latinLnBrk="0" hangingPunct="1">
-              <a:defRPr sz="1800" kern="1200">
-                <a:solidFill>
-                  <a:schemeClr val="tx1"/>
-                </a:solidFill>
-                <a:latin typeface="+mn-lt"/>
-                <a:ea typeface="+mn-ea"/>
-                <a:cs typeface="+mn-cs"/>
-              </a:defRPr>
-            </a:lvl1pPr>
-            <a:lvl2pPr marL="457200" algn="l" defTabSz="914400" rtl="0" eaLnBrk="1" latinLnBrk="0" hangingPunct="1">
-              <a:defRPr sz="1800" kern="1200">
-                <a:solidFill>
-                  <a:schemeClr val="tx1"/>
-                </a:solidFill>
-                <a:latin typeface="+mn-lt"/>
-                <a:ea typeface="+mn-ea"/>
-                <a:cs typeface="+mn-cs"/>
-              </a:defRPr>
-            </a:lvl2pPr>
-            <a:lvl3pPr marL="914400" algn="l" defTabSz="914400" rtl="0" eaLnBrk="1" latinLnBrk="0" hangingPunct="1">
-              <a:defRPr sz="1800" kern="1200">
-                <a:solidFill>
-                  <a:schemeClr val="tx1"/>
-                </a:solidFill>
-                <a:latin typeface="+mn-lt"/>
-                <a:ea typeface="+mn-ea"/>
-                <a:cs typeface="+mn-cs"/>
-              </a:defRPr>
-            </a:lvl3pPr>
-            <a:lvl4pPr marL="1371600" algn="l" defTabSz="914400" rtl="0" eaLnBrk="1" latinLnBrk="0" hangingPunct="1">
-              <a:defRPr sz="1800" kern="1200">
-                <a:solidFill>
-                  <a:schemeClr val="tx1"/>
-                </a:solidFill>
-                <a:latin typeface="+mn-lt"/>
-                <a:ea typeface="+mn-ea"/>
-                <a:cs typeface="+mn-cs"/>
-              </a:defRPr>
-            </a:lvl4pPr>
-            <a:lvl5pPr marL="1828800" algn="l" defTabSz="914400" rtl="0" eaLnBrk="1" latinLnBrk="0" hangingPunct="1">
-              <a:defRPr sz="1800" kern="1200">
-                <a:solidFill>
-                  <a:schemeClr val="tx1"/>
-                </a:solidFill>
-                <a:latin typeface="+mn-lt"/>
-                <a:ea typeface="+mn-ea"/>
-                <a:cs typeface="+mn-cs"/>
-              </a:defRPr>
-            </a:lvl5pPr>
-            <a:lvl6pPr marL="2286000" algn="l" defTabSz="914400" rtl="0" eaLnBrk="1" latinLnBrk="0" hangingPunct="1">
-              <a:defRPr sz="1800" kern="1200">
-                <a:solidFill>
-                  <a:schemeClr val="tx1"/>
-                </a:solidFill>
-                <a:latin typeface="+mn-lt"/>
-                <a:ea typeface="+mn-ea"/>
-                <a:cs typeface="+mn-cs"/>
-              </a:defRPr>
-            </a:lvl6pPr>
-            <a:lvl7pPr marL="2743200" algn="l" defTabSz="914400" rtl="0" eaLnBrk="1" latinLnBrk="0" hangingPunct="1">
-              <a:defRPr sz="1800" kern="1200">
-                <a:solidFill>
-                  <a:schemeClr val="tx1"/>
-                </a:solidFill>
-                <a:latin typeface="+mn-lt"/>
-                <a:ea typeface="+mn-ea"/>
-                <a:cs typeface="+mn-cs"/>
-              </a:defRPr>
-            </a:lvl7pPr>
-            <a:lvl8pPr marL="3200400" algn="l" defTabSz="914400" rtl="0" eaLnBrk="1" latinLnBrk="0" hangingPunct="1">
-              <a:defRPr sz="1800" kern="1200">
-                <a:solidFill>
-                  <a:schemeClr val="tx1"/>
-                </a:solidFill>
-                <a:latin typeface="+mn-lt"/>
-                <a:ea typeface="+mn-ea"/>
-                <a:cs typeface="+mn-cs"/>
-              </a:defRPr>
-            </a:lvl8pPr>
-            <a:lvl9pPr marL="3657600" algn="l" defTabSz="914400" rtl="0" eaLnBrk="1" latinLnBrk="0" hangingPunct="1">
-              <a:defRPr sz="1800" kern="1200">
-                <a:solidFill>
-                  <a:schemeClr val="tx1"/>
-                </a:solidFill>
-                <a:latin typeface="+mn-lt"/>
-                <a:ea typeface="+mn-ea"/>
-                <a:cs typeface="+mn-cs"/>
-              </a:defRPr>
-            </a:lvl9pPr>
-          </a:lstStyle>
-          <a:p>
-            <a:r>
-              <a:rPr lang="ru-RU" sz="2800" b="1" dirty="0">
-                <a:solidFill>
-                  <a:srgbClr val="FF0000"/>
-                </a:solidFill>
-              </a:rPr>
-              <a:t>Что можно делать с данными</a:t>
-            </a:r>
-          </a:p>
-        </p:txBody>
-      </p:sp>
-      <p:sp>
-        <p:nvSpPr>
-          <p:cNvPr id="6" name="Номер слайда 5">
-            <a:extLst>
-              <a:ext uri="{FF2B5EF4-FFF2-40B4-BE49-F238E27FC236}">
-                <a16:creationId xmlns:a16="http://schemas.microsoft.com/office/drawing/2014/main" id="{2A73E36B-93CF-4B6D-9D12-D242EBAEB367}"/>
-              </a:ext>
-            </a:extLst>
-          </p:cNvPr>
-          <p:cNvSpPr>
-            <a:spLocks noGrp="1"/>
-          </p:cNvSpPr>
-          <p:nvPr>
-            <p:ph type="sldNum" sz="quarter" idx="12"/>
-          </p:nvPr>
-        </p:nvSpPr>
-        <p:spPr/>
-        <p:txBody>
-          <a:bodyPr/>
-          <a:lstStyle/>
-          <a:p>
-            <a:fld id="{FF9AC15E-FCD1-4167-800F-1DB8497ABFCE}" type="slidenum">
-              <a:rPr lang="ru-RU" smtClean="0"/>
-              <a:t>24</a:t>
-            </a:fld>
-            <a:endParaRPr lang="ru-RU"/>
-          </a:p>
-        </p:txBody>
-      </p:sp>
-      <p:pic>
-        <p:nvPicPr>
-          <p:cNvPr id="9" name="Объект 1">
-            <a:extLst>
-              <a:ext uri="{FF2B5EF4-FFF2-40B4-BE49-F238E27FC236}">
-                <a16:creationId xmlns:a16="http://schemas.microsoft.com/office/drawing/2014/main" id="{D8975343-2B37-104D-8757-0404410E4582}"/>
-              </a:ext>
-            </a:extLst>
-          </p:cNvPr>
-          <p:cNvPicPr>
-            <a:picLocks noGrp="1" noChangeAspect="1"/>
-          </p:cNvPicPr>
-          <p:nvPr>
-            <p:ph idx="1"/>
-          </p:nvPr>
-        </p:nvPicPr>
-        <p:blipFill rotWithShape="1">
-          <a:blip r:embed="rId3" cstate="print">
-            <a:extLst>
-              <a:ext uri="{28A0092B-C50C-407E-A947-70E740481C1C}">
-                <a14:useLocalDpi xmlns:a14="http://schemas.microsoft.com/office/drawing/2010/main" val="0"/>
-              </a:ext>
-            </a:extLst>
-          </a:blip>
-          <a:srcRect r="40340"/>
-          <a:stretch/>
-        </p:blipFill>
-        <p:spPr>
-          <a:xfrm>
-            <a:off x="603100" y="319559"/>
-            <a:ext cx="1342931" cy="434420"/>
-          </a:xfrm>
-        </p:spPr>
-      </p:pic>
-      <p:sp>
-        <p:nvSpPr>
-          <p:cNvPr id="8" name="Содержимое 2">
-            <a:extLst>
-              <a:ext uri="{FF2B5EF4-FFF2-40B4-BE49-F238E27FC236}">
-                <a16:creationId xmlns:a16="http://schemas.microsoft.com/office/drawing/2014/main" id="{1911E992-A783-4615-9C07-413E34B01F15}"/>
-              </a:ext>
-            </a:extLst>
-          </p:cNvPr>
-          <p:cNvSpPr txBox="1">
-            <a:spLocks/>
-          </p:cNvSpPr>
-          <p:nvPr/>
-        </p:nvSpPr>
-        <p:spPr>
-          <a:xfrm>
-            <a:off x="743210" y="1251752"/>
-            <a:ext cx="5352790" cy="5165549"/>
-          </a:xfrm>
-          <a:prstGeom prst="rect">
-            <a:avLst/>
-          </a:prstGeom>
-        </p:spPr>
-        <p:txBody>
-          <a:bodyPr vert="horz" lIns="91440" tIns="45720" rIns="91440" bIns="45720" rtlCol="0">
-            <a:normAutofit/>
-          </a:bodyPr>
-          <a:lstStyle>
-            <a:lvl1pPr marL="228600" indent="-228600" algn="l" defTabSz="914400" rtl="0" eaLnBrk="1" latinLnBrk="0" hangingPunct="1">
-              <a:lnSpc>
-                <a:spcPct val="90000"/>
-              </a:lnSpc>
-              <a:spcBef>
-                <a:spcPts val="1000"/>
-              </a:spcBef>
-              <a:buFont typeface="Arial" panose="020B0604020202020204" pitchFamily="34" charset="0"/>
-              <a:buChar char="•"/>
-              <a:defRPr sz="2800" kern="1200">
-                <a:solidFill>
-                  <a:schemeClr val="tx1"/>
-                </a:solidFill>
-                <a:latin typeface="+mn-lt"/>
-                <a:ea typeface="+mn-ea"/>
-                <a:cs typeface="+mn-cs"/>
-              </a:defRPr>
-            </a:lvl1pPr>
-            <a:lvl2pPr marL="685800" indent="-228600" algn="l" defTabSz="914400" rtl="0" eaLnBrk="1" latinLnBrk="0" hangingPunct="1">
-              <a:lnSpc>
-                <a:spcPct val="90000"/>
-              </a:lnSpc>
-              <a:spcBef>
-                <a:spcPts val="500"/>
-              </a:spcBef>
-              <a:buFont typeface="Arial" panose="020B0604020202020204" pitchFamily="34" charset="0"/>
-              <a:buChar char="•"/>
-              <a:defRPr sz="2400" kern="1200">
-                <a:solidFill>
-                  <a:schemeClr val="tx1"/>
-                </a:solidFill>
-                <a:latin typeface="+mn-lt"/>
-                <a:ea typeface="+mn-ea"/>
-                <a:cs typeface="+mn-cs"/>
-              </a:defRPr>
-            </a:lvl2pPr>
-            <a:lvl3pPr marL="1143000" indent="-228600" algn="l" defTabSz="914400" rtl="0" eaLnBrk="1" latinLnBrk="0" hangingPunct="1">
-              <a:lnSpc>
-                <a:spcPct val="90000"/>
-              </a:lnSpc>
-              <a:spcBef>
-                <a:spcPts val="500"/>
-              </a:spcBef>
-              <a:buFont typeface="Arial" panose="020B0604020202020204" pitchFamily="34" charset="0"/>
-              <a:buChar char="•"/>
-              <a:defRPr sz="2000" kern="1200">
-                <a:solidFill>
-                  <a:schemeClr val="tx1"/>
-                </a:solidFill>
-                <a:latin typeface="+mn-lt"/>
-                <a:ea typeface="+mn-ea"/>
-                <a:cs typeface="+mn-cs"/>
-              </a:defRPr>
-            </a:lvl3pPr>
-            <a:lvl4pPr marL="1600200" indent="-228600" algn="l" defTabSz="914400" rtl="0" eaLnBrk="1" latinLnBrk="0" hangingPunct="1">
-              <a:lnSpc>
-                <a:spcPct val="90000"/>
-              </a:lnSpc>
-              <a:spcBef>
-                <a:spcPts val="500"/>
-              </a:spcBef>
-              <a:buFont typeface="Arial" panose="020B0604020202020204" pitchFamily="34" charset="0"/>
-              <a:buChar char="•"/>
-              <a:defRPr sz="1800" kern="1200">
-                <a:solidFill>
-                  <a:schemeClr val="tx1"/>
-                </a:solidFill>
-                <a:latin typeface="+mn-lt"/>
-                <a:ea typeface="+mn-ea"/>
-                <a:cs typeface="+mn-cs"/>
-              </a:defRPr>
-            </a:lvl4pPr>
-            <a:lvl5pPr marL="2057400" indent="-228600" algn="l" defTabSz="914400" rtl="0" eaLnBrk="1" latinLnBrk="0" hangingPunct="1">
-              <a:lnSpc>
-                <a:spcPct val="90000"/>
-              </a:lnSpc>
-              <a:spcBef>
-                <a:spcPts val="500"/>
-              </a:spcBef>
-              <a:buFont typeface="Arial" panose="020B0604020202020204" pitchFamily="34" charset="0"/>
-              <a:buChar char="•"/>
-              <a:defRPr sz="1800" kern="1200">
-                <a:solidFill>
-                  <a:schemeClr val="tx1"/>
-                </a:solidFill>
-                <a:latin typeface="+mn-lt"/>
-                <a:ea typeface="+mn-ea"/>
-                <a:cs typeface="+mn-cs"/>
-              </a:defRPr>
-            </a:lvl5pPr>
-            <a:lvl6pPr marL="2514600" indent="-228600" algn="l" defTabSz="914400" rtl="0" eaLnBrk="1" latinLnBrk="0" hangingPunct="1">
-              <a:lnSpc>
-                <a:spcPct val="90000"/>
-              </a:lnSpc>
-              <a:spcBef>
-                <a:spcPts val="500"/>
-              </a:spcBef>
-              <a:buFont typeface="Arial" panose="020B0604020202020204" pitchFamily="34" charset="0"/>
-              <a:buChar char="•"/>
-              <a:defRPr sz="1800" kern="1200">
-                <a:solidFill>
-                  <a:schemeClr val="tx1"/>
-                </a:solidFill>
-                <a:latin typeface="+mn-lt"/>
-                <a:ea typeface="+mn-ea"/>
-                <a:cs typeface="+mn-cs"/>
-              </a:defRPr>
-            </a:lvl6pPr>
-            <a:lvl7pPr marL="2971800" indent="-228600" algn="l" defTabSz="914400" rtl="0" eaLnBrk="1" latinLnBrk="0" hangingPunct="1">
-              <a:lnSpc>
-                <a:spcPct val="90000"/>
-              </a:lnSpc>
-              <a:spcBef>
-                <a:spcPts val="500"/>
-              </a:spcBef>
-              <a:buFont typeface="Arial" panose="020B0604020202020204" pitchFamily="34" charset="0"/>
-              <a:buChar char="•"/>
-              <a:defRPr sz="1800" kern="1200">
-                <a:solidFill>
-                  <a:schemeClr val="tx1"/>
-                </a:solidFill>
-                <a:latin typeface="+mn-lt"/>
-                <a:ea typeface="+mn-ea"/>
-                <a:cs typeface="+mn-cs"/>
-              </a:defRPr>
-            </a:lvl7pPr>
-            <a:lvl8pPr marL="3429000" indent="-228600" algn="l" defTabSz="914400" rtl="0" eaLnBrk="1" latinLnBrk="0" hangingPunct="1">
-              <a:lnSpc>
-                <a:spcPct val="90000"/>
-              </a:lnSpc>
-              <a:spcBef>
-                <a:spcPts val="500"/>
-              </a:spcBef>
-              <a:buFont typeface="Arial" panose="020B0604020202020204" pitchFamily="34" charset="0"/>
-              <a:buChar char="•"/>
-              <a:defRPr sz="1800" kern="1200">
-                <a:solidFill>
-                  <a:schemeClr val="tx1"/>
-                </a:solidFill>
-                <a:latin typeface="+mn-lt"/>
-                <a:ea typeface="+mn-ea"/>
-                <a:cs typeface="+mn-cs"/>
-              </a:defRPr>
-            </a:lvl8pPr>
-            <a:lvl9pPr marL="3886200" indent="-228600" algn="l" defTabSz="914400" rtl="0" eaLnBrk="1" latinLnBrk="0" hangingPunct="1">
-              <a:lnSpc>
-                <a:spcPct val="90000"/>
-              </a:lnSpc>
-              <a:spcBef>
-                <a:spcPts val="500"/>
-              </a:spcBef>
-              <a:buFont typeface="Arial" panose="020B0604020202020204" pitchFamily="34" charset="0"/>
-              <a:buChar char="•"/>
-              <a:defRPr sz="1800" kern="1200">
-                <a:solidFill>
-                  <a:schemeClr val="tx1"/>
-                </a:solidFill>
-                <a:latin typeface="+mn-lt"/>
-                <a:ea typeface="+mn-ea"/>
-                <a:cs typeface="+mn-cs"/>
-              </a:defRPr>
-            </a:lvl9pPr>
-          </a:lstStyle>
-          <a:p>
-            <a:r>
-              <a:rPr lang="ru-RU" altLang="ru-RU" dirty="0"/>
-              <a:t>Поиск, извлечение, сбор</a:t>
-            </a:r>
-          </a:p>
-          <a:p>
-            <a:r>
-              <a:rPr lang="ru-RU" altLang="ru-RU" dirty="0"/>
-              <a:t>Обработка</a:t>
-            </a:r>
-          </a:p>
-          <a:p>
-            <a:r>
-              <a:rPr lang="ru-RU" altLang="ru-RU" dirty="0"/>
-              <a:t>Передача и хранение</a:t>
-            </a:r>
-          </a:p>
-          <a:p>
-            <a:r>
-              <a:rPr lang="ru-RU" altLang="ru-RU" dirty="0"/>
-              <a:t>Анализ, верификация, исправление ошибок, подготовка к использованию</a:t>
-            </a:r>
-          </a:p>
-          <a:p>
-            <a:r>
-              <a:rPr lang="ru-RU" altLang="ru-RU" dirty="0"/>
-              <a:t>Организация доступа</a:t>
-            </a:r>
-          </a:p>
-          <a:p>
-            <a:r>
-              <a:rPr lang="ru-RU" altLang="ru-RU" dirty="0"/>
-              <a:t>Использование</a:t>
-            </a:r>
-          </a:p>
-          <a:p>
-            <a:r>
-              <a:rPr lang="ru-RU" altLang="ru-RU" dirty="0"/>
-              <a:t>Создание полезного продукта (визуализация, аналитика, автоматизация)</a:t>
-            </a:r>
-          </a:p>
-          <a:p>
-            <a:endParaRPr lang="ru-RU" altLang="ru-RU" dirty="0"/>
-          </a:p>
-        </p:txBody>
-      </p:sp>
-      <p:pic>
-        <p:nvPicPr>
-          <p:cNvPr id="10" name="Picture 2">
-            <a:extLst>
-              <a:ext uri="{FF2B5EF4-FFF2-40B4-BE49-F238E27FC236}">
-                <a16:creationId xmlns:a16="http://schemas.microsoft.com/office/drawing/2014/main" id="{66493536-D35C-4EAE-9BD3-D9746273E5C2}"/>
-              </a:ext>
-            </a:extLst>
-          </p:cNvPr>
-          <p:cNvPicPr>
-            <a:picLocks noChangeAspect="1" noChangeArrowheads="1"/>
-          </p:cNvPicPr>
-          <p:nvPr/>
-        </p:nvPicPr>
-        <p:blipFill>
-          <a:blip r:embed="rId4">
-            <a:extLst>
-              <a:ext uri="{28A0092B-C50C-407E-A947-70E740481C1C}">
-                <a14:useLocalDpi xmlns:a14="http://schemas.microsoft.com/office/drawing/2010/main" val="0"/>
-              </a:ext>
-            </a:extLst>
-          </a:blip>
-          <a:srcRect/>
-          <a:stretch>
-            <a:fillRect/>
-          </a:stretch>
-        </p:blipFill>
-        <p:spPr bwMode="auto">
-          <a:xfrm>
-            <a:off x="6668510" y="1251752"/>
-            <a:ext cx="5174282" cy="2444990"/>
-          </a:xfrm>
-          <a:prstGeom prst="rect">
-            <a:avLst/>
-          </a:prstGeom>
-          <a:noFill/>
-          <a:ln>
-            <a:noFill/>
-          </a:ln>
-          <a:extLst>
-            <a:ext uri="{909E8E84-426E-40DD-AFC4-6F175D3DCCD1}">
-              <a14:hiddenFill xmlns:a14="http://schemas.microsoft.com/office/drawing/2010/main">
-                <a:solidFill>
-                  <a:srgbClr val="FFFFFF"/>
-                </a:solidFill>
-              </a14:hiddenFill>
-            </a:ext>
-            <a:ext uri="{91240B29-F687-4F45-9708-019B960494DF}">
-              <a14:hiddenLine xmlns:a14="http://schemas.microsoft.com/office/drawing/2010/main" w="9525">
-                <a:solidFill>
-                  <a:srgbClr val="000000"/>
-                </a:solidFill>
-                <a:miter lim="800000"/>
-                <a:headEnd/>
-                <a:tailEnd/>
-              </a14:hiddenLine>
-            </a:ext>
-          </a:extLst>
-        </p:spPr>
-      </p:pic>
-      <p:pic>
-        <p:nvPicPr>
-          <p:cNvPr id="11" name="Picture 2">
-            <a:extLst>
-              <a:ext uri="{FF2B5EF4-FFF2-40B4-BE49-F238E27FC236}">
-                <a16:creationId xmlns:a16="http://schemas.microsoft.com/office/drawing/2014/main" id="{B205F4BD-BECF-439A-9F3E-6C07574BB76E}"/>
-              </a:ext>
-            </a:extLst>
-          </p:cNvPr>
-          <p:cNvPicPr>
-            <a:picLocks noChangeAspect="1" noChangeArrowheads="1"/>
-          </p:cNvPicPr>
-          <p:nvPr/>
-        </p:nvPicPr>
-        <p:blipFill>
-          <a:blip r:embed="rId5">
-            <a:extLst>
-              <a:ext uri="{28A0092B-C50C-407E-A947-70E740481C1C}">
-                <a14:useLocalDpi xmlns:a14="http://schemas.microsoft.com/office/drawing/2010/main" val="0"/>
-              </a:ext>
-            </a:extLst>
-          </a:blip>
-          <a:srcRect/>
-          <a:stretch>
-            <a:fillRect/>
-          </a:stretch>
-        </p:blipFill>
-        <p:spPr bwMode="auto">
-          <a:xfrm>
-            <a:off x="6668510" y="3811003"/>
-            <a:ext cx="5183855" cy="2499456"/>
-          </a:xfrm>
-          <a:prstGeom prst="rect">
-            <a:avLst/>
-          </a:prstGeom>
-          <a:noFill/>
-          <a:ln>
-            <a:noFill/>
-          </a:ln>
-          <a:extLst>
-            <a:ext uri="{909E8E84-426E-40DD-AFC4-6F175D3DCCD1}">
-              <a14:hiddenFill xmlns:a14="http://schemas.microsoft.com/office/drawing/2010/main">
-                <a:solidFill>
-                  <a:srgbClr val="FFFFFF"/>
-                </a:solidFill>
-              </a14:hiddenFill>
-            </a:ext>
-            <a:ext uri="{91240B29-F687-4F45-9708-019B960494DF}">
-              <a14:hiddenLine xmlns:a14="http://schemas.microsoft.com/office/drawing/2010/main" w="9525">
-                <a:solidFill>
-                  <a:srgbClr val="000000"/>
-                </a:solidFill>
-                <a:miter lim="800000"/>
-                <a:headEnd/>
-                <a:tailEnd/>
-              </a14:hiddenLine>
-            </a:ext>
-          </a:extLst>
-        </p:spPr>
-      </p:pic>
-    </p:spTree>
-    <p:extLst>
-      <p:ext uri="{BB962C8B-B14F-4D97-AF65-F5344CB8AC3E}">
-        <p14:creationId xmlns:p14="http://schemas.microsoft.com/office/powerpoint/2010/main" val="871366438"/>
-      </p:ext>
-    </p:extLst>
-  </p:cSld>
-  <p:clrMapOvr>
-    <a:masterClrMapping/>
-  </p:clrMapOvr>
-</p:sld>
-</file>
-
-<file path=ppt/slides/slide25.xml><?xml version="1.0" encoding="utf-8"?>
-<p:sld xmlns:a="http://schemas.openxmlformats.org/drawingml/2006/main" xmlns:r="http://schemas.openxmlformats.org/officeDocument/2006/relationships" xmlns:p="http://schemas.openxmlformats.org/presentationml/2006/main">
-  <p:cSld>
-    <p:spTree>
-      <p:nvGrpSpPr>
-        <p:cNvPr id="1" name="">
-          <a:extLst>
-            <a:ext uri="{FF2B5EF4-FFF2-40B4-BE49-F238E27FC236}">
-              <a16:creationId xmlns:a16="http://schemas.microsoft.com/office/drawing/2014/main" id="{577301C0-FA7A-3623-C320-711F5F141BE3}"/>
-            </a:ext>
-          </a:extLst>
-        </p:cNvPr>
-        <p:cNvGrpSpPr/>
-        <p:nvPr/>
-      </p:nvGrpSpPr>
-      <p:grpSpPr>
-        <a:xfrm>
-          <a:off x="0" y="0"/>
-          <a:ext cx="0" cy="0"/>
-          <a:chOff x="0" y="0"/>
-          <a:chExt cx="0" cy="0"/>
-        </a:xfrm>
-      </p:grpSpPr>
-      <p:sp>
-        <p:nvSpPr>
-          <p:cNvPr id="3" name="Прямоугольник 2">
-            <a:extLst>
-              <a:ext uri="{FF2B5EF4-FFF2-40B4-BE49-F238E27FC236}">
-                <a16:creationId xmlns:a16="http://schemas.microsoft.com/office/drawing/2014/main" id="{87D26C56-559A-4EF7-6010-FF64E3A9E949}"/>
-              </a:ext>
-            </a:extLst>
-          </p:cNvPr>
-          <p:cNvSpPr/>
-          <p:nvPr/>
-        </p:nvSpPr>
-        <p:spPr>
-          <a:xfrm flipV="1">
-            <a:off x="925620" y="920165"/>
-            <a:ext cx="10865327" cy="21600"/>
-          </a:xfrm>
-          <a:prstGeom prst="rect">
-            <a:avLst/>
-          </a:prstGeom>
-          <a:solidFill>
-            <a:srgbClr val="E20443"/>
-          </a:solidFill>
-          <a:ln>
-            <a:noFill/>
-          </a:ln>
-        </p:spPr>
-        <p:style>
-          <a:lnRef idx="2">
-            <a:schemeClr val="accent1">
-              <a:shade val="50000"/>
-            </a:schemeClr>
-          </a:lnRef>
-          <a:fillRef idx="1">
-            <a:schemeClr val="accent1"/>
-          </a:fillRef>
-          <a:effectRef idx="0">
-            <a:schemeClr val="accent1"/>
-          </a:effectRef>
-          <a:fontRef idx="minor">
-            <a:schemeClr val="lt1"/>
-          </a:fontRef>
-        </p:style>
-        <p:txBody>
-          <a:bodyPr rtlCol="0" anchor="ctr"/>
-          <a:lstStyle/>
-          <a:p>
-            <a:pPr algn="ctr"/>
-            <a:endParaRPr lang="ru-RU">
-              <a:solidFill>
-                <a:srgbClr val="E20443"/>
-              </a:solidFill>
-            </a:endParaRPr>
-          </a:p>
-        </p:txBody>
-      </p:sp>
-      <p:sp>
-        <p:nvSpPr>
-          <p:cNvPr id="4" name="TextBox 9">
-            <a:extLst>
-              <a:ext uri="{FF2B5EF4-FFF2-40B4-BE49-F238E27FC236}">
-                <a16:creationId xmlns:a16="http://schemas.microsoft.com/office/drawing/2014/main" id="{F05BBB0F-A129-4893-83B8-0303916DE418}"/>
-              </a:ext>
-            </a:extLst>
-          </p:cNvPr>
-          <p:cNvSpPr txBox="1"/>
-          <p:nvPr/>
-        </p:nvSpPr>
-        <p:spPr>
-          <a:xfrm>
-            <a:off x="2057400" y="219959"/>
-            <a:ext cx="9794965" cy="523220"/>
-          </a:xfrm>
-          <a:prstGeom prst="rect">
-            <a:avLst/>
-          </a:prstGeom>
-          <a:noFill/>
-        </p:spPr>
-        <p:txBody>
-          <a:bodyPr wrap="square" rtlCol="0">
-            <a:spAutoFit/>
-          </a:bodyPr>
-          <a:lstStyle>
-            <a:defPPr>
-              <a:defRPr lang="ru-RU"/>
-            </a:defPPr>
-            <a:lvl1pPr marL="0" algn="l" defTabSz="914400" rtl="0" eaLnBrk="1" latinLnBrk="0" hangingPunct="1">
-              <a:defRPr sz="1800" kern="1200">
-                <a:solidFill>
-                  <a:schemeClr val="tx1"/>
-                </a:solidFill>
-                <a:latin typeface="+mn-lt"/>
-                <a:ea typeface="+mn-ea"/>
-                <a:cs typeface="+mn-cs"/>
-              </a:defRPr>
-            </a:lvl1pPr>
-            <a:lvl2pPr marL="457200" algn="l" defTabSz="914400" rtl="0" eaLnBrk="1" latinLnBrk="0" hangingPunct="1">
-              <a:defRPr sz="1800" kern="1200">
-                <a:solidFill>
-                  <a:schemeClr val="tx1"/>
-                </a:solidFill>
-                <a:latin typeface="+mn-lt"/>
-                <a:ea typeface="+mn-ea"/>
-                <a:cs typeface="+mn-cs"/>
-              </a:defRPr>
-            </a:lvl2pPr>
-            <a:lvl3pPr marL="914400" algn="l" defTabSz="914400" rtl="0" eaLnBrk="1" latinLnBrk="0" hangingPunct="1">
-              <a:defRPr sz="1800" kern="1200">
-                <a:solidFill>
-                  <a:schemeClr val="tx1"/>
-                </a:solidFill>
-                <a:latin typeface="+mn-lt"/>
-                <a:ea typeface="+mn-ea"/>
-                <a:cs typeface="+mn-cs"/>
-              </a:defRPr>
-            </a:lvl3pPr>
-            <a:lvl4pPr marL="1371600" algn="l" defTabSz="914400" rtl="0" eaLnBrk="1" latinLnBrk="0" hangingPunct="1">
-              <a:defRPr sz="1800" kern="1200">
-                <a:solidFill>
-                  <a:schemeClr val="tx1"/>
-                </a:solidFill>
-                <a:latin typeface="+mn-lt"/>
-                <a:ea typeface="+mn-ea"/>
-                <a:cs typeface="+mn-cs"/>
-              </a:defRPr>
-            </a:lvl4pPr>
-            <a:lvl5pPr marL="1828800" algn="l" defTabSz="914400" rtl="0" eaLnBrk="1" latinLnBrk="0" hangingPunct="1">
-              <a:defRPr sz="1800" kern="1200">
-                <a:solidFill>
-                  <a:schemeClr val="tx1"/>
-                </a:solidFill>
-                <a:latin typeface="+mn-lt"/>
-                <a:ea typeface="+mn-ea"/>
-                <a:cs typeface="+mn-cs"/>
-              </a:defRPr>
-            </a:lvl5pPr>
-            <a:lvl6pPr marL="2286000" algn="l" defTabSz="914400" rtl="0" eaLnBrk="1" latinLnBrk="0" hangingPunct="1">
-              <a:defRPr sz="1800" kern="1200">
-                <a:solidFill>
-                  <a:schemeClr val="tx1"/>
-                </a:solidFill>
-                <a:latin typeface="+mn-lt"/>
-                <a:ea typeface="+mn-ea"/>
-                <a:cs typeface="+mn-cs"/>
-              </a:defRPr>
-            </a:lvl6pPr>
-            <a:lvl7pPr marL="2743200" algn="l" defTabSz="914400" rtl="0" eaLnBrk="1" latinLnBrk="0" hangingPunct="1">
-              <a:defRPr sz="1800" kern="1200">
-                <a:solidFill>
-                  <a:schemeClr val="tx1"/>
-                </a:solidFill>
-                <a:latin typeface="+mn-lt"/>
-                <a:ea typeface="+mn-ea"/>
-                <a:cs typeface="+mn-cs"/>
-              </a:defRPr>
-            </a:lvl7pPr>
-            <a:lvl8pPr marL="3200400" algn="l" defTabSz="914400" rtl="0" eaLnBrk="1" latinLnBrk="0" hangingPunct="1">
-              <a:defRPr sz="1800" kern="1200">
-                <a:solidFill>
-                  <a:schemeClr val="tx1"/>
-                </a:solidFill>
-                <a:latin typeface="+mn-lt"/>
-                <a:ea typeface="+mn-ea"/>
-                <a:cs typeface="+mn-cs"/>
-              </a:defRPr>
-            </a:lvl8pPr>
-            <a:lvl9pPr marL="3657600" algn="l" defTabSz="914400" rtl="0" eaLnBrk="1" latinLnBrk="0" hangingPunct="1">
-              <a:defRPr sz="1800" kern="1200">
-                <a:solidFill>
-                  <a:schemeClr val="tx1"/>
-                </a:solidFill>
-                <a:latin typeface="+mn-lt"/>
-                <a:ea typeface="+mn-ea"/>
-                <a:cs typeface="+mn-cs"/>
-              </a:defRPr>
-            </a:lvl9pPr>
-          </a:lstStyle>
-          <a:p>
-            <a:r>
-              <a:rPr lang="ru-RU" sz="2800" b="1" dirty="0">
-                <a:solidFill>
-                  <a:srgbClr val="FF0000"/>
-                </a:solidFill>
-              </a:rPr>
-              <a:t>Задачи обработки данных. </a:t>
-            </a:r>
-            <a:r>
-              <a:rPr lang="en-US" sz="2800" b="1" dirty="0">
-                <a:solidFill>
-                  <a:srgbClr val="FF0000"/>
-                </a:solidFill>
-              </a:rPr>
-              <a:t>OLTP</a:t>
-            </a:r>
-            <a:endParaRPr lang="ru-RU" sz="2800" b="1" dirty="0">
-              <a:solidFill>
-                <a:srgbClr val="FF0000"/>
-              </a:solidFill>
-            </a:endParaRPr>
-          </a:p>
-        </p:txBody>
-      </p:sp>
-      <p:sp>
-        <p:nvSpPr>
-          <p:cNvPr id="6" name="Номер слайда 5">
-            <a:extLst>
-              <a:ext uri="{FF2B5EF4-FFF2-40B4-BE49-F238E27FC236}">
-                <a16:creationId xmlns:a16="http://schemas.microsoft.com/office/drawing/2014/main" id="{BF0B3DC4-BB4F-B5B3-4AC5-926B80ACC53D}"/>
-              </a:ext>
-            </a:extLst>
-          </p:cNvPr>
-          <p:cNvSpPr>
-            <a:spLocks noGrp="1"/>
-          </p:cNvSpPr>
-          <p:nvPr>
-            <p:ph type="sldNum" sz="quarter" idx="12"/>
-          </p:nvPr>
-        </p:nvSpPr>
-        <p:spPr/>
-        <p:txBody>
-          <a:bodyPr/>
-          <a:lstStyle/>
-          <a:p>
-            <a:fld id="{FF9AC15E-FCD1-4167-800F-1DB8497ABFCE}" type="slidenum">
-              <a:rPr lang="ru-RU" smtClean="0"/>
-              <a:t>25</a:t>
             </a:fld>
             <a:endParaRPr lang="ru-RU"/>
           </a:p>
@@ -18138,7 +16360,7 @@
 </p:sld>
 </file>
 
-<file path=ppt/slides/slide26.xml><?xml version="1.0" encoding="utf-8"?>
+<file path=ppt/slides/slide24.xml><?xml version="1.0" encoding="utf-8"?>
 <p:sld xmlns:a="http://schemas.openxmlformats.org/drawingml/2006/main" xmlns:r="http://schemas.openxmlformats.org/officeDocument/2006/relationships" xmlns:p="http://schemas.openxmlformats.org/presentationml/2006/main">
   <p:cSld>
     <p:spTree>
@@ -18386,7 +16608,7 @@
           <a:p>
             <a:fld id="{FF9AC15E-FCD1-4167-800F-1DB8497ABFCE}" type="slidenum">
               <a:rPr lang="ru-RU" smtClean="0"/>
-              <a:t>26</a:t>
+              <a:t>24</a:t>
             </a:fld>
             <a:endParaRPr lang="ru-RU" dirty="0"/>
           </a:p>
@@ -19505,7 +17727,7 @@
 </p:sld>
 </file>
 
-<file path=ppt/slides/slide27.xml><?xml version="1.0" encoding="utf-8"?>
+<file path=ppt/slides/slide25.xml><?xml version="1.0" encoding="utf-8"?>
 <p:sld xmlns:a="http://schemas.openxmlformats.org/drawingml/2006/main" xmlns:r="http://schemas.openxmlformats.org/officeDocument/2006/relationships" xmlns:p="http://schemas.openxmlformats.org/presentationml/2006/main">
   <p:cSld>
     <p:spTree>
@@ -19700,7 +17922,7 @@
                   <a:srgbClr val="FF0000"/>
                 </a:solidFill>
               </a:rPr>
-              <a:t>Прочитать «роман» в данных</a:t>
+              <a:t>Развитие СППР – цифровые двойники</a:t>
             </a:r>
           </a:p>
         </p:txBody>
@@ -19728,1694 +17950,7 @@
           <a:p>
             <a:fld id="{FF9AC15E-FCD1-4167-800F-1DB8497ABFCE}" type="slidenum">
               <a:rPr lang="ru-RU" smtClean="0"/>
-              <a:t>27</a:t>
-            </a:fld>
-            <a:endParaRPr lang="ru-RU"/>
-          </a:p>
-        </p:txBody>
-      </p:sp>
-      <p:pic>
-        <p:nvPicPr>
-          <p:cNvPr id="9" name="Объект 1">
-            <a:extLst>
-              <a:ext uri="{FF2B5EF4-FFF2-40B4-BE49-F238E27FC236}">
-                <a16:creationId xmlns:a16="http://schemas.microsoft.com/office/drawing/2014/main" id="{D8975343-2B37-104D-8757-0404410E4582}"/>
-              </a:ext>
-            </a:extLst>
-          </p:cNvPr>
-          <p:cNvPicPr>
-            <a:picLocks noGrp="1" noChangeAspect="1"/>
-          </p:cNvPicPr>
-          <p:nvPr>
-            <p:ph idx="1"/>
-          </p:nvPr>
-        </p:nvPicPr>
-        <p:blipFill rotWithShape="1">
-          <a:blip r:embed="rId3" cstate="print">
-            <a:extLst>
-              <a:ext uri="{28A0092B-C50C-407E-A947-70E740481C1C}">
-                <a14:useLocalDpi xmlns:a14="http://schemas.microsoft.com/office/drawing/2010/main" val="0"/>
-              </a:ext>
-            </a:extLst>
-          </a:blip>
-          <a:srcRect r="40340"/>
-          <a:stretch/>
-        </p:blipFill>
-        <p:spPr>
-          <a:xfrm>
-            <a:off x="603100" y="319559"/>
-            <a:ext cx="1342931" cy="434420"/>
-          </a:xfrm>
-        </p:spPr>
-      </p:pic>
-      <p:sp>
-        <p:nvSpPr>
-          <p:cNvPr id="12" name="Содержимое 2">
-            <a:extLst>
-              <a:ext uri="{FF2B5EF4-FFF2-40B4-BE49-F238E27FC236}">
-                <a16:creationId xmlns:a16="http://schemas.microsoft.com/office/drawing/2014/main" id="{06E6E911-FD56-490A-ADC0-1CE16AA0B424}"/>
-              </a:ext>
-            </a:extLst>
-          </p:cNvPr>
-          <p:cNvSpPr txBox="1">
-            <a:spLocks/>
-          </p:cNvSpPr>
-          <p:nvPr/>
-        </p:nvSpPr>
-        <p:spPr>
-          <a:xfrm>
-            <a:off x="279400" y="1417638"/>
-            <a:ext cx="3200400" cy="4525962"/>
-          </a:xfrm>
-          <a:prstGeom prst="rect">
-            <a:avLst/>
-          </a:prstGeom>
-        </p:spPr>
-        <p:txBody>
-          <a:bodyPr vert="horz" lIns="91440" tIns="45720" rIns="91440" bIns="45720" rtlCol="0">
-            <a:normAutofit/>
-          </a:bodyPr>
-          <a:lstStyle>
-            <a:lvl1pPr marL="228600" indent="-228600" algn="l" defTabSz="914400" rtl="0" eaLnBrk="1" latinLnBrk="0" hangingPunct="1">
-              <a:lnSpc>
-                <a:spcPct val="90000"/>
-              </a:lnSpc>
-              <a:spcBef>
-                <a:spcPts val="1000"/>
-              </a:spcBef>
-              <a:buFont typeface="Arial" panose="020B0604020202020204" pitchFamily="34" charset="0"/>
-              <a:buChar char="•"/>
-              <a:defRPr sz="2800" kern="1200">
-                <a:solidFill>
-                  <a:schemeClr val="tx1"/>
-                </a:solidFill>
-                <a:latin typeface="+mn-lt"/>
-                <a:ea typeface="+mn-ea"/>
-                <a:cs typeface="+mn-cs"/>
-              </a:defRPr>
-            </a:lvl1pPr>
-            <a:lvl2pPr marL="685800" indent="-228600" algn="l" defTabSz="914400" rtl="0" eaLnBrk="1" latinLnBrk="0" hangingPunct="1">
-              <a:lnSpc>
-                <a:spcPct val="90000"/>
-              </a:lnSpc>
-              <a:spcBef>
-                <a:spcPts val="500"/>
-              </a:spcBef>
-              <a:buFont typeface="Arial" panose="020B0604020202020204" pitchFamily="34" charset="0"/>
-              <a:buChar char="•"/>
-              <a:defRPr sz="2400" kern="1200">
-                <a:solidFill>
-                  <a:schemeClr val="tx1"/>
-                </a:solidFill>
-                <a:latin typeface="+mn-lt"/>
-                <a:ea typeface="+mn-ea"/>
-                <a:cs typeface="+mn-cs"/>
-              </a:defRPr>
-            </a:lvl2pPr>
-            <a:lvl3pPr marL="1143000" indent="-228600" algn="l" defTabSz="914400" rtl="0" eaLnBrk="1" latinLnBrk="0" hangingPunct="1">
-              <a:lnSpc>
-                <a:spcPct val="90000"/>
-              </a:lnSpc>
-              <a:spcBef>
-                <a:spcPts val="500"/>
-              </a:spcBef>
-              <a:buFont typeface="Arial" panose="020B0604020202020204" pitchFamily="34" charset="0"/>
-              <a:buChar char="•"/>
-              <a:defRPr sz="2000" kern="1200">
-                <a:solidFill>
-                  <a:schemeClr val="tx1"/>
-                </a:solidFill>
-                <a:latin typeface="+mn-lt"/>
-                <a:ea typeface="+mn-ea"/>
-                <a:cs typeface="+mn-cs"/>
-              </a:defRPr>
-            </a:lvl3pPr>
-            <a:lvl4pPr marL="1600200" indent="-228600" algn="l" defTabSz="914400" rtl="0" eaLnBrk="1" latinLnBrk="0" hangingPunct="1">
-              <a:lnSpc>
-                <a:spcPct val="90000"/>
-              </a:lnSpc>
-              <a:spcBef>
-                <a:spcPts val="500"/>
-              </a:spcBef>
-              <a:buFont typeface="Arial" panose="020B0604020202020204" pitchFamily="34" charset="0"/>
-              <a:buChar char="•"/>
-              <a:defRPr sz="1800" kern="1200">
-                <a:solidFill>
-                  <a:schemeClr val="tx1"/>
-                </a:solidFill>
-                <a:latin typeface="+mn-lt"/>
-                <a:ea typeface="+mn-ea"/>
-                <a:cs typeface="+mn-cs"/>
-              </a:defRPr>
-            </a:lvl4pPr>
-            <a:lvl5pPr marL="2057400" indent="-228600" algn="l" defTabSz="914400" rtl="0" eaLnBrk="1" latinLnBrk="0" hangingPunct="1">
-              <a:lnSpc>
-                <a:spcPct val="90000"/>
-              </a:lnSpc>
-              <a:spcBef>
-                <a:spcPts val="500"/>
-              </a:spcBef>
-              <a:buFont typeface="Arial" panose="020B0604020202020204" pitchFamily="34" charset="0"/>
-              <a:buChar char="•"/>
-              <a:defRPr sz="1800" kern="1200">
-                <a:solidFill>
-                  <a:schemeClr val="tx1"/>
-                </a:solidFill>
-                <a:latin typeface="+mn-lt"/>
-                <a:ea typeface="+mn-ea"/>
-                <a:cs typeface="+mn-cs"/>
-              </a:defRPr>
-            </a:lvl5pPr>
-            <a:lvl6pPr marL="2514600" indent="-228600" algn="l" defTabSz="914400" rtl="0" eaLnBrk="1" latinLnBrk="0" hangingPunct="1">
-              <a:lnSpc>
-                <a:spcPct val="90000"/>
-              </a:lnSpc>
-              <a:spcBef>
-                <a:spcPts val="500"/>
-              </a:spcBef>
-              <a:buFont typeface="Arial" panose="020B0604020202020204" pitchFamily="34" charset="0"/>
-              <a:buChar char="•"/>
-              <a:defRPr sz="1800" kern="1200">
-                <a:solidFill>
-                  <a:schemeClr val="tx1"/>
-                </a:solidFill>
-                <a:latin typeface="+mn-lt"/>
-                <a:ea typeface="+mn-ea"/>
-                <a:cs typeface="+mn-cs"/>
-              </a:defRPr>
-            </a:lvl6pPr>
-            <a:lvl7pPr marL="2971800" indent="-228600" algn="l" defTabSz="914400" rtl="0" eaLnBrk="1" latinLnBrk="0" hangingPunct="1">
-              <a:lnSpc>
-                <a:spcPct val="90000"/>
-              </a:lnSpc>
-              <a:spcBef>
-                <a:spcPts val="500"/>
-              </a:spcBef>
-              <a:buFont typeface="Arial" panose="020B0604020202020204" pitchFamily="34" charset="0"/>
-              <a:buChar char="•"/>
-              <a:defRPr sz="1800" kern="1200">
-                <a:solidFill>
-                  <a:schemeClr val="tx1"/>
-                </a:solidFill>
-                <a:latin typeface="+mn-lt"/>
-                <a:ea typeface="+mn-ea"/>
-                <a:cs typeface="+mn-cs"/>
-              </a:defRPr>
-            </a:lvl7pPr>
-            <a:lvl8pPr marL="3429000" indent="-228600" algn="l" defTabSz="914400" rtl="0" eaLnBrk="1" latinLnBrk="0" hangingPunct="1">
-              <a:lnSpc>
-                <a:spcPct val="90000"/>
-              </a:lnSpc>
-              <a:spcBef>
-                <a:spcPts val="500"/>
-              </a:spcBef>
-              <a:buFont typeface="Arial" panose="020B0604020202020204" pitchFamily="34" charset="0"/>
-              <a:buChar char="•"/>
-              <a:defRPr sz="1800" kern="1200">
-                <a:solidFill>
-                  <a:schemeClr val="tx1"/>
-                </a:solidFill>
-                <a:latin typeface="+mn-lt"/>
-                <a:ea typeface="+mn-ea"/>
-                <a:cs typeface="+mn-cs"/>
-              </a:defRPr>
-            </a:lvl8pPr>
-            <a:lvl9pPr marL="3886200" indent="-228600" algn="l" defTabSz="914400" rtl="0" eaLnBrk="1" latinLnBrk="0" hangingPunct="1">
-              <a:lnSpc>
-                <a:spcPct val="90000"/>
-              </a:lnSpc>
-              <a:spcBef>
-                <a:spcPts val="500"/>
-              </a:spcBef>
-              <a:buFont typeface="Arial" panose="020B0604020202020204" pitchFamily="34" charset="0"/>
-              <a:buChar char="•"/>
-              <a:defRPr sz="1800" kern="1200">
-                <a:solidFill>
-                  <a:schemeClr val="tx1"/>
-                </a:solidFill>
-                <a:latin typeface="+mn-lt"/>
-                <a:ea typeface="+mn-ea"/>
-                <a:cs typeface="+mn-cs"/>
-              </a:defRPr>
-            </a:lvl9pPr>
-          </a:lstStyle>
-          <a:p>
-            <a:r>
-              <a:rPr lang="ru-RU" altLang="ru-RU" sz="2400" dirty="0"/>
-              <a:t>Разведка </a:t>
-            </a:r>
-            <a:r>
-              <a:rPr lang="en-US" altLang="ru-RU" sz="2400" dirty="0"/>
-              <a:t>EDA</a:t>
-            </a:r>
-            <a:endParaRPr lang="ru-RU" altLang="ru-RU" sz="2400" dirty="0"/>
-          </a:p>
-          <a:p>
-            <a:r>
-              <a:rPr lang="ru-RU" altLang="ru-RU" sz="2400" dirty="0"/>
-              <a:t>Выявление скрытых закономерностей</a:t>
-            </a:r>
-            <a:endParaRPr lang="en-US" altLang="ru-RU" sz="2400" dirty="0"/>
-          </a:p>
-          <a:p>
-            <a:r>
-              <a:rPr lang="ru-RU" altLang="ru-RU" sz="2400" dirty="0"/>
-              <a:t>Определение ключевых характеристик</a:t>
-            </a:r>
-          </a:p>
-          <a:p>
-            <a:r>
-              <a:rPr lang="ru-RU" altLang="ru-RU" sz="2400" dirty="0"/>
-              <a:t>Поиск взаимосвязей (корреляции)</a:t>
-            </a:r>
-          </a:p>
-          <a:p>
-            <a:r>
-              <a:rPr lang="ru-RU" altLang="ru-RU" sz="2400" dirty="0"/>
-              <a:t>Оптимизация, машинное обучение</a:t>
-            </a:r>
-          </a:p>
-        </p:txBody>
-      </p:sp>
-      <p:pic>
-        <p:nvPicPr>
-          <p:cNvPr id="13" name="Рисунок 2">
-            <a:extLst>
-              <a:ext uri="{FF2B5EF4-FFF2-40B4-BE49-F238E27FC236}">
-                <a16:creationId xmlns:a16="http://schemas.microsoft.com/office/drawing/2014/main" id="{BF4FCB66-61BA-405D-A89E-0273F776CCBC}"/>
-              </a:ext>
-            </a:extLst>
-          </p:cNvPr>
-          <p:cNvPicPr>
-            <a:picLocks noChangeAspect="1" noChangeArrowheads="1"/>
-          </p:cNvPicPr>
-          <p:nvPr/>
-        </p:nvPicPr>
-        <p:blipFill>
-          <a:blip r:embed="rId4">
-            <a:extLst>
-              <a:ext uri="{28A0092B-C50C-407E-A947-70E740481C1C}">
-                <a14:useLocalDpi xmlns:a14="http://schemas.microsoft.com/office/drawing/2010/main" val="0"/>
-              </a:ext>
-            </a:extLst>
-          </a:blip>
-          <a:srcRect/>
-          <a:stretch>
-            <a:fillRect/>
-          </a:stretch>
-        </p:blipFill>
-        <p:spPr bwMode="auto">
-          <a:xfrm>
-            <a:off x="3707506" y="1348096"/>
-            <a:ext cx="3200400" cy="4487273"/>
-          </a:xfrm>
-          <a:prstGeom prst="rect">
-            <a:avLst/>
-          </a:prstGeom>
-          <a:noFill/>
-          <a:ln>
-            <a:noFill/>
-          </a:ln>
-          <a:extLst>
-            <a:ext uri="{909E8E84-426E-40DD-AFC4-6F175D3DCCD1}">
-              <a14:hiddenFill xmlns:a14="http://schemas.microsoft.com/office/drawing/2010/main">
-                <a:solidFill>
-                  <a:srgbClr val="FFFFFF"/>
-                </a:solidFill>
-              </a14:hiddenFill>
-            </a:ext>
-            <a:ext uri="{91240B29-F687-4F45-9708-019B960494DF}">
-              <a14:hiddenLine xmlns:a14="http://schemas.microsoft.com/office/drawing/2010/main" w="9525">
-                <a:solidFill>
-                  <a:srgbClr val="000000"/>
-                </a:solidFill>
-                <a:miter lim="800000"/>
-                <a:headEnd/>
-                <a:tailEnd/>
-              </a14:hiddenLine>
-            </a:ext>
-          </a:extLst>
-        </p:spPr>
-      </p:pic>
-      <p:pic>
-        <p:nvPicPr>
-          <p:cNvPr id="14" name="Рисунок 3">
-            <a:extLst>
-              <a:ext uri="{FF2B5EF4-FFF2-40B4-BE49-F238E27FC236}">
-                <a16:creationId xmlns:a16="http://schemas.microsoft.com/office/drawing/2014/main" id="{2D44B70E-2FBD-4CB4-8C4B-C07BDC939A48}"/>
-              </a:ext>
-            </a:extLst>
-          </p:cNvPr>
-          <p:cNvPicPr>
-            <a:picLocks noChangeAspect="1" noChangeArrowheads="1"/>
-          </p:cNvPicPr>
-          <p:nvPr/>
-        </p:nvPicPr>
-        <p:blipFill>
-          <a:blip r:embed="rId5">
-            <a:extLst>
-              <a:ext uri="{28A0092B-C50C-407E-A947-70E740481C1C}">
-                <a14:useLocalDpi xmlns:a14="http://schemas.microsoft.com/office/drawing/2010/main" val="0"/>
-              </a:ext>
-            </a:extLst>
-          </a:blip>
-          <a:srcRect/>
-          <a:stretch>
-            <a:fillRect/>
-          </a:stretch>
-        </p:blipFill>
-        <p:spPr bwMode="auto">
-          <a:xfrm>
-            <a:off x="7522014" y="4393482"/>
-            <a:ext cx="3971925" cy="1655762"/>
-          </a:xfrm>
-          <a:prstGeom prst="rect">
-            <a:avLst/>
-          </a:prstGeom>
-          <a:noFill/>
-          <a:ln>
-            <a:noFill/>
-          </a:ln>
-          <a:extLst>
-            <a:ext uri="{909E8E84-426E-40DD-AFC4-6F175D3DCCD1}">
-              <a14:hiddenFill xmlns:a14="http://schemas.microsoft.com/office/drawing/2010/main">
-                <a:solidFill>
-                  <a:srgbClr val="FFFFFF"/>
-                </a:solidFill>
-              </a14:hiddenFill>
-            </a:ext>
-            <a:ext uri="{91240B29-F687-4F45-9708-019B960494DF}">
-              <a14:hiddenLine xmlns:a14="http://schemas.microsoft.com/office/drawing/2010/main" w="9525">
-                <a:solidFill>
-                  <a:srgbClr val="000000"/>
-                </a:solidFill>
-                <a:miter lim="800000"/>
-                <a:headEnd/>
-                <a:tailEnd/>
-              </a14:hiddenLine>
-            </a:ext>
-          </a:extLst>
-        </p:spPr>
-      </p:pic>
-      <p:pic>
-        <p:nvPicPr>
-          <p:cNvPr id="15" name="Рисунок 4">
-            <a:extLst>
-              <a:ext uri="{FF2B5EF4-FFF2-40B4-BE49-F238E27FC236}">
-                <a16:creationId xmlns:a16="http://schemas.microsoft.com/office/drawing/2014/main" id="{44FDF789-85A8-475E-B6EB-0E21E4384B8B}"/>
-              </a:ext>
-            </a:extLst>
-          </p:cNvPr>
-          <p:cNvPicPr>
-            <a:picLocks noChangeAspect="1" noChangeArrowheads="1"/>
-          </p:cNvPicPr>
-          <p:nvPr/>
-        </p:nvPicPr>
-        <p:blipFill>
-          <a:blip r:embed="rId6">
-            <a:extLst>
-              <a:ext uri="{28A0092B-C50C-407E-A947-70E740481C1C}">
-                <a14:useLocalDpi xmlns:a14="http://schemas.microsoft.com/office/drawing/2010/main" val="0"/>
-              </a:ext>
-            </a:extLst>
-          </a:blip>
-          <a:srcRect/>
-          <a:stretch>
-            <a:fillRect/>
-          </a:stretch>
-        </p:blipFill>
-        <p:spPr bwMode="auto">
-          <a:xfrm>
-            <a:off x="7584521" y="1191551"/>
-            <a:ext cx="3592465" cy="3037398"/>
-          </a:xfrm>
-          <a:prstGeom prst="rect">
-            <a:avLst/>
-          </a:prstGeom>
-          <a:noFill/>
-          <a:ln>
-            <a:noFill/>
-          </a:ln>
-          <a:extLst>
-            <a:ext uri="{909E8E84-426E-40DD-AFC4-6F175D3DCCD1}">
-              <a14:hiddenFill xmlns:a14="http://schemas.microsoft.com/office/drawing/2010/main">
-                <a:solidFill>
-                  <a:srgbClr val="FFFFFF"/>
-                </a:solidFill>
-              </a14:hiddenFill>
-            </a:ext>
-            <a:ext uri="{91240B29-F687-4F45-9708-019B960494DF}">
-              <a14:hiddenLine xmlns:a14="http://schemas.microsoft.com/office/drawing/2010/main" w="9525">
-                <a:solidFill>
-                  <a:srgbClr val="000000"/>
-                </a:solidFill>
-                <a:miter lim="800000"/>
-                <a:headEnd/>
-                <a:tailEnd/>
-              </a14:hiddenLine>
-            </a:ext>
-          </a:extLst>
-        </p:spPr>
-      </p:pic>
-    </p:spTree>
-    <p:extLst>
-      <p:ext uri="{BB962C8B-B14F-4D97-AF65-F5344CB8AC3E}">
-        <p14:creationId xmlns:p14="http://schemas.microsoft.com/office/powerpoint/2010/main" val="3348554082"/>
-      </p:ext>
-    </p:extLst>
-  </p:cSld>
-  <p:clrMapOvr>
-    <a:masterClrMapping/>
-  </p:clrMapOvr>
-</p:sld>
-</file>
-
-<file path=ppt/slides/slide28.xml><?xml version="1.0" encoding="utf-8"?>
-<p:sld xmlns:a="http://schemas.openxmlformats.org/drawingml/2006/main" xmlns:r="http://schemas.openxmlformats.org/officeDocument/2006/relationships" xmlns:p="http://schemas.openxmlformats.org/presentationml/2006/main">
-  <p:cSld>
-    <p:spTree>
-      <p:nvGrpSpPr>
-        <p:cNvPr id="1" name=""/>
-        <p:cNvGrpSpPr/>
-        <p:nvPr/>
-      </p:nvGrpSpPr>
-      <p:grpSpPr>
-        <a:xfrm>
-          <a:off x="0" y="0"/>
-          <a:ext cx="0" cy="0"/>
-          <a:chOff x="0" y="0"/>
-          <a:chExt cx="0" cy="0"/>
-        </a:xfrm>
-      </p:grpSpPr>
-      <p:sp>
-        <p:nvSpPr>
-          <p:cNvPr id="3" name="Прямоугольник 2"/>
-          <p:cNvSpPr/>
-          <p:nvPr/>
-        </p:nvSpPr>
-        <p:spPr>
-          <a:xfrm flipV="1">
-            <a:off x="925620" y="920165"/>
-            <a:ext cx="10865327" cy="21600"/>
-          </a:xfrm>
-          <a:prstGeom prst="rect">
-            <a:avLst/>
-          </a:prstGeom>
-          <a:solidFill>
-            <a:srgbClr val="E20443"/>
-          </a:solidFill>
-          <a:ln>
-            <a:noFill/>
-          </a:ln>
-        </p:spPr>
-        <p:style>
-          <a:lnRef idx="2">
-            <a:schemeClr val="accent1">
-              <a:shade val="50000"/>
-            </a:schemeClr>
-          </a:lnRef>
-          <a:fillRef idx="1">
-            <a:schemeClr val="accent1"/>
-          </a:fillRef>
-          <a:effectRef idx="0">
-            <a:schemeClr val="accent1"/>
-          </a:effectRef>
-          <a:fontRef idx="minor">
-            <a:schemeClr val="lt1"/>
-          </a:fontRef>
-        </p:style>
-        <p:txBody>
-          <a:bodyPr rtlCol="0" anchor="ctr"/>
-          <a:lstStyle/>
-          <a:p>
-            <a:pPr algn="ctr"/>
-            <a:endParaRPr lang="ru-RU">
-              <a:solidFill>
-                <a:srgbClr val="E20443"/>
-              </a:solidFill>
-            </a:endParaRPr>
-          </a:p>
-        </p:txBody>
-      </p:sp>
-      <p:sp>
-        <p:nvSpPr>
-          <p:cNvPr id="4" name="TextBox 9">
-            <a:extLst>
-              <a:ext uri="{FF2B5EF4-FFF2-40B4-BE49-F238E27FC236}">
-                <a16:creationId xmlns:a16="http://schemas.microsoft.com/office/drawing/2014/main" id="{6D1610F7-A0C9-4E50-9206-D9E394A55B73}"/>
-              </a:ext>
-            </a:extLst>
-          </p:cNvPr>
-          <p:cNvSpPr txBox="1"/>
-          <p:nvPr/>
-        </p:nvSpPr>
-        <p:spPr>
-          <a:xfrm>
-            <a:off x="2057400" y="219959"/>
-            <a:ext cx="9794965" cy="523220"/>
-          </a:xfrm>
-          <a:prstGeom prst="rect">
-            <a:avLst/>
-          </a:prstGeom>
-          <a:noFill/>
-        </p:spPr>
-        <p:txBody>
-          <a:bodyPr wrap="square" rtlCol="0">
-            <a:spAutoFit/>
-          </a:bodyPr>
-          <a:lstStyle>
-            <a:defPPr>
-              <a:defRPr lang="ru-RU"/>
-            </a:defPPr>
-            <a:lvl1pPr marL="0" algn="l" defTabSz="914400" rtl="0" eaLnBrk="1" latinLnBrk="0" hangingPunct="1">
-              <a:defRPr sz="1800" kern="1200">
-                <a:solidFill>
-                  <a:schemeClr val="tx1"/>
-                </a:solidFill>
-                <a:latin typeface="+mn-lt"/>
-                <a:ea typeface="+mn-ea"/>
-                <a:cs typeface="+mn-cs"/>
-              </a:defRPr>
-            </a:lvl1pPr>
-            <a:lvl2pPr marL="457200" algn="l" defTabSz="914400" rtl="0" eaLnBrk="1" latinLnBrk="0" hangingPunct="1">
-              <a:defRPr sz="1800" kern="1200">
-                <a:solidFill>
-                  <a:schemeClr val="tx1"/>
-                </a:solidFill>
-                <a:latin typeface="+mn-lt"/>
-                <a:ea typeface="+mn-ea"/>
-                <a:cs typeface="+mn-cs"/>
-              </a:defRPr>
-            </a:lvl2pPr>
-            <a:lvl3pPr marL="914400" algn="l" defTabSz="914400" rtl="0" eaLnBrk="1" latinLnBrk="0" hangingPunct="1">
-              <a:defRPr sz="1800" kern="1200">
-                <a:solidFill>
-                  <a:schemeClr val="tx1"/>
-                </a:solidFill>
-                <a:latin typeface="+mn-lt"/>
-                <a:ea typeface="+mn-ea"/>
-                <a:cs typeface="+mn-cs"/>
-              </a:defRPr>
-            </a:lvl3pPr>
-            <a:lvl4pPr marL="1371600" algn="l" defTabSz="914400" rtl="0" eaLnBrk="1" latinLnBrk="0" hangingPunct="1">
-              <a:defRPr sz="1800" kern="1200">
-                <a:solidFill>
-                  <a:schemeClr val="tx1"/>
-                </a:solidFill>
-                <a:latin typeface="+mn-lt"/>
-                <a:ea typeface="+mn-ea"/>
-                <a:cs typeface="+mn-cs"/>
-              </a:defRPr>
-            </a:lvl4pPr>
-            <a:lvl5pPr marL="1828800" algn="l" defTabSz="914400" rtl="0" eaLnBrk="1" latinLnBrk="0" hangingPunct="1">
-              <a:defRPr sz="1800" kern="1200">
-                <a:solidFill>
-                  <a:schemeClr val="tx1"/>
-                </a:solidFill>
-                <a:latin typeface="+mn-lt"/>
-                <a:ea typeface="+mn-ea"/>
-                <a:cs typeface="+mn-cs"/>
-              </a:defRPr>
-            </a:lvl5pPr>
-            <a:lvl6pPr marL="2286000" algn="l" defTabSz="914400" rtl="0" eaLnBrk="1" latinLnBrk="0" hangingPunct="1">
-              <a:defRPr sz="1800" kern="1200">
-                <a:solidFill>
-                  <a:schemeClr val="tx1"/>
-                </a:solidFill>
-                <a:latin typeface="+mn-lt"/>
-                <a:ea typeface="+mn-ea"/>
-                <a:cs typeface="+mn-cs"/>
-              </a:defRPr>
-            </a:lvl6pPr>
-            <a:lvl7pPr marL="2743200" algn="l" defTabSz="914400" rtl="0" eaLnBrk="1" latinLnBrk="0" hangingPunct="1">
-              <a:defRPr sz="1800" kern="1200">
-                <a:solidFill>
-                  <a:schemeClr val="tx1"/>
-                </a:solidFill>
-                <a:latin typeface="+mn-lt"/>
-                <a:ea typeface="+mn-ea"/>
-                <a:cs typeface="+mn-cs"/>
-              </a:defRPr>
-            </a:lvl7pPr>
-            <a:lvl8pPr marL="3200400" algn="l" defTabSz="914400" rtl="0" eaLnBrk="1" latinLnBrk="0" hangingPunct="1">
-              <a:defRPr sz="1800" kern="1200">
-                <a:solidFill>
-                  <a:schemeClr val="tx1"/>
-                </a:solidFill>
-                <a:latin typeface="+mn-lt"/>
-                <a:ea typeface="+mn-ea"/>
-                <a:cs typeface="+mn-cs"/>
-              </a:defRPr>
-            </a:lvl8pPr>
-            <a:lvl9pPr marL="3657600" algn="l" defTabSz="914400" rtl="0" eaLnBrk="1" latinLnBrk="0" hangingPunct="1">
-              <a:defRPr sz="1800" kern="1200">
-                <a:solidFill>
-                  <a:schemeClr val="tx1"/>
-                </a:solidFill>
-                <a:latin typeface="+mn-lt"/>
-                <a:ea typeface="+mn-ea"/>
-                <a:cs typeface="+mn-cs"/>
-              </a:defRPr>
-            </a:lvl9pPr>
-          </a:lstStyle>
-          <a:p>
-            <a:r>
-              <a:rPr lang="ru-RU" sz="2800" b="1" dirty="0">
-                <a:solidFill>
-                  <a:srgbClr val="FF0000"/>
-                </a:solidFill>
-              </a:rPr>
-              <a:t>Посмотреть «картину» или «фильм» с данными</a:t>
-            </a:r>
-          </a:p>
-        </p:txBody>
-      </p:sp>
-      <p:sp>
-        <p:nvSpPr>
-          <p:cNvPr id="6" name="Номер слайда 5">
-            <a:extLst>
-              <a:ext uri="{FF2B5EF4-FFF2-40B4-BE49-F238E27FC236}">
-                <a16:creationId xmlns:a16="http://schemas.microsoft.com/office/drawing/2014/main" id="{2A73E36B-93CF-4B6D-9D12-D242EBAEB367}"/>
-              </a:ext>
-            </a:extLst>
-          </p:cNvPr>
-          <p:cNvSpPr>
-            <a:spLocks noGrp="1"/>
-          </p:cNvSpPr>
-          <p:nvPr>
-            <p:ph type="sldNum" sz="quarter" idx="12"/>
-          </p:nvPr>
-        </p:nvSpPr>
-        <p:spPr/>
-        <p:txBody>
-          <a:bodyPr/>
-          <a:lstStyle/>
-          <a:p>
-            <a:fld id="{FF9AC15E-FCD1-4167-800F-1DB8497ABFCE}" type="slidenum">
-              <a:rPr lang="ru-RU" smtClean="0"/>
-              <a:t>28</a:t>
-            </a:fld>
-            <a:endParaRPr lang="ru-RU"/>
-          </a:p>
-        </p:txBody>
-      </p:sp>
-      <p:pic>
-        <p:nvPicPr>
-          <p:cNvPr id="9" name="Объект 1">
-            <a:extLst>
-              <a:ext uri="{FF2B5EF4-FFF2-40B4-BE49-F238E27FC236}">
-                <a16:creationId xmlns:a16="http://schemas.microsoft.com/office/drawing/2014/main" id="{D8975343-2B37-104D-8757-0404410E4582}"/>
-              </a:ext>
-            </a:extLst>
-          </p:cNvPr>
-          <p:cNvPicPr>
-            <a:picLocks noGrp="1" noChangeAspect="1"/>
-          </p:cNvPicPr>
-          <p:nvPr>
-            <p:ph idx="1"/>
-          </p:nvPr>
-        </p:nvPicPr>
-        <p:blipFill rotWithShape="1">
-          <a:blip r:embed="rId3" cstate="print">
-            <a:extLst>
-              <a:ext uri="{28A0092B-C50C-407E-A947-70E740481C1C}">
-                <a14:useLocalDpi xmlns:a14="http://schemas.microsoft.com/office/drawing/2010/main" val="0"/>
-              </a:ext>
-            </a:extLst>
-          </a:blip>
-          <a:srcRect r="40340"/>
-          <a:stretch/>
-        </p:blipFill>
-        <p:spPr>
-          <a:xfrm>
-            <a:off x="603100" y="319559"/>
-            <a:ext cx="1342931" cy="434420"/>
-          </a:xfrm>
-        </p:spPr>
-      </p:pic>
-      <p:sp>
-        <p:nvSpPr>
-          <p:cNvPr id="7" name="Содержимое 2">
-            <a:extLst>
-              <a:ext uri="{FF2B5EF4-FFF2-40B4-BE49-F238E27FC236}">
-                <a16:creationId xmlns:a16="http://schemas.microsoft.com/office/drawing/2014/main" id="{C7924E1C-C155-4F29-9BF9-02F29C8B51F8}"/>
-              </a:ext>
-            </a:extLst>
-          </p:cNvPr>
-          <p:cNvSpPr txBox="1">
-            <a:spLocks/>
-          </p:cNvSpPr>
-          <p:nvPr/>
-        </p:nvSpPr>
-        <p:spPr>
-          <a:xfrm>
-            <a:off x="937334" y="1187490"/>
-            <a:ext cx="4731946" cy="4525963"/>
-          </a:xfrm>
-          <a:prstGeom prst="rect">
-            <a:avLst/>
-          </a:prstGeom>
-        </p:spPr>
-        <p:txBody>
-          <a:bodyPr vert="horz" lIns="91440" tIns="45720" rIns="91440" bIns="45720" rtlCol="0">
-            <a:normAutofit/>
-          </a:bodyPr>
-          <a:lstStyle>
-            <a:lvl1pPr marL="228600" indent="-228600" algn="l" defTabSz="914400" rtl="0" eaLnBrk="1" latinLnBrk="0" hangingPunct="1">
-              <a:lnSpc>
-                <a:spcPct val="90000"/>
-              </a:lnSpc>
-              <a:spcBef>
-                <a:spcPts val="1000"/>
-              </a:spcBef>
-              <a:buFont typeface="Arial" panose="020B0604020202020204" pitchFamily="34" charset="0"/>
-              <a:buChar char="•"/>
-              <a:defRPr sz="2800" kern="1200">
-                <a:solidFill>
-                  <a:schemeClr val="tx1"/>
-                </a:solidFill>
-                <a:latin typeface="+mn-lt"/>
-                <a:ea typeface="+mn-ea"/>
-                <a:cs typeface="+mn-cs"/>
-              </a:defRPr>
-            </a:lvl1pPr>
-            <a:lvl2pPr marL="685800" indent="-228600" algn="l" defTabSz="914400" rtl="0" eaLnBrk="1" latinLnBrk="0" hangingPunct="1">
-              <a:lnSpc>
-                <a:spcPct val="90000"/>
-              </a:lnSpc>
-              <a:spcBef>
-                <a:spcPts val="500"/>
-              </a:spcBef>
-              <a:buFont typeface="Arial" panose="020B0604020202020204" pitchFamily="34" charset="0"/>
-              <a:buChar char="•"/>
-              <a:defRPr sz="2400" kern="1200">
-                <a:solidFill>
-                  <a:schemeClr val="tx1"/>
-                </a:solidFill>
-                <a:latin typeface="+mn-lt"/>
-                <a:ea typeface="+mn-ea"/>
-                <a:cs typeface="+mn-cs"/>
-              </a:defRPr>
-            </a:lvl2pPr>
-            <a:lvl3pPr marL="1143000" indent="-228600" algn="l" defTabSz="914400" rtl="0" eaLnBrk="1" latinLnBrk="0" hangingPunct="1">
-              <a:lnSpc>
-                <a:spcPct val="90000"/>
-              </a:lnSpc>
-              <a:spcBef>
-                <a:spcPts val="500"/>
-              </a:spcBef>
-              <a:buFont typeface="Arial" panose="020B0604020202020204" pitchFamily="34" charset="0"/>
-              <a:buChar char="•"/>
-              <a:defRPr sz="2000" kern="1200">
-                <a:solidFill>
-                  <a:schemeClr val="tx1"/>
-                </a:solidFill>
-                <a:latin typeface="+mn-lt"/>
-                <a:ea typeface="+mn-ea"/>
-                <a:cs typeface="+mn-cs"/>
-              </a:defRPr>
-            </a:lvl3pPr>
-            <a:lvl4pPr marL="1600200" indent="-228600" algn="l" defTabSz="914400" rtl="0" eaLnBrk="1" latinLnBrk="0" hangingPunct="1">
-              <a:lnSpc>
-                <a:spcPct val="90000"/>
-              </a:lnSpc>
-              <a:spcBef>
-                <a:spcPts val="500"/>
-              </a:spcBef>
-              <a:buFont typeface="Arial" panose="020B0604020202020204" pitchFamily="34" charset="0"/>
-              <a:buChar char="•"/>
-              <a:defRPr sz="1800" kern="1200">
-                <a:solidFill>
-                  <a:schemeClr val="tx1"/>
-                </a:solidFill>
-                <a:latin typeface="+mn-lt"/>
-                <a:ea typeface="+mn-ea"/>
-                <a:cs typeface="+mn-cs"/>
-              </a:defRPr>
-            </a:lvl4pPr>
-            <a:lvl5pPr marL="2057400" indent="-228600" algn="l" defTabSz="914400" rtl="0" eaLnBrk="1" latinLnBrk="0" hangingPunct="1">
-              <a:lnSpc>
-                <a:spcPct val="90000"/>
-              </a:lnSpc>
-              <a:spcBef>
-                <a:spcPts val="500"/>
-              </a:spcBef>
-              <a:buFont typeface="Arial" panose="020B0604020202020204" pitchFamily="34" charset="0"/>
-              <a:buChar char="•"/>
-              <a:defRPr sz="1800" kern="1200">
-                <a:solidFill>
-                  <a:schemeClr val="tx1"/>
-                </a:solidFill>
-                <a:latin typeface="+mn-lt"/>
-                <a:ea typeface="+mn-ea"/>
-                <a:cs typeface="+mn-cs"/>
-              </a:defRPr>
-            </a:lvl5pPr>
-            <a:lvl6pPr marL="2514600" indent="-228600" algn="l" defTabSz="914400" rtl="0" eaLnBrk="1" latinLnBrk="0" hangingPunct="1">
-              <a:lnSpc>
-                <a:spcPct val="90000"/>
-              </a:lnSpc>
-              <a:spcBef>
-                <a:spcPts val="500"/>
-              </a:spcBef>
-              <a:buFont typeface="Arial" panose="020B0604020202020204" pitchFamily="34" charset="0"/>
-              <a:buChar char="•"/>
-              <a:defRPr sz="1800" kern="1200">
-                <a:solidFill>
-                  <a:schemeClr val="tx1"/>
-                </a:solidFill>
-                <a:latin typeface="+mn-lt"/>
-                <a:ea typeface="+mn-ea"/>
-                <a:cs typeface="+mn-cs"/>
-              </a:defRPr>
-            </a:lvl6pPr>
-            <a:lvl7pPr marL="2971800" indent="-228600" algn="l" defTabSz="914400" rtl="0" eaLnBrk="1" latinLnBrk="0" hangingPunct="1">
-              <a:lnSpc>
-                <a:spcPct val="90000"/>
-              </a:lnSpc>
-              <a:spcBef>
-                <a:spcPts val="500"/>
-              </a:spcBef>
-              <a:buFont typeface="Arial" panose="020B0604020202020204" pitchFamily="34" charset="0"/>
-              <a:buChar char="•"/>
-              <a:defRPr sz="1800" kern="1200">
-                <a:solidFill>
-                  <a:schemeClr val="tx1"/>
-                </a:solidFill>
-                <a:latin typeface="+mn-lt"/>
-                <a:ea typeface="+mn-ea"/>
-                <a:cs typeface="+mn-cs"/>
-              </a:defRPr>
-            </a:lvl7pPr>
-            <a:lvl8pPr marL="3429000" indent="-228600" algn="l" defTabSz="914400" rtl="0" eaLnBrk="1" latinLnBrk="0" hangingPunct="1">
-              <a:lnSpc>
-                <a:spcPct val="90000"/>
-              </a:lnSpc>
-              <a:spcBef>
-                <a:spcPts val="500"/>
-              </a:spcBef>
-              <a:buFont typeface="Arial" panose="020B0604020202020204" pitchFamily="34" charset="0"/>
-              <a:buChar char="•"/>
-              <a:defRPr sz="1800" kern="1200">
-                <a:solidFill>
-                  <a:schemeClr val="tx1"/>
-                </a:solidFill>
-                <a:latin typeface="+mn-lt"/>
-                <a:ea typeface="+mn-ea"/>
-                <a:cs typeface="+mn-cs"/>
-              </a:defRPr>
-            </a:lvl8pPr>
-            <a:lvl9pPr marL="3886200" indent="-228600" algn="l" defTabSz="914400" rtl="0" eaLnBrk="1" latinLnBrk="0" hangingPunct="1">
-              <a:lnSpc>
-                <a:spcPct val="90000"/>
-              </a:lnSpc>
-              <a:spcBef>
-                <a:spcPts val="500"/>
-              </a:spcBef>
-              <a:buFont typeface="Arial" panose="020B0604020202020204" pitchFamily="34" charset="0"/>
-              <a:buChar char="•"/>
-              <a:defRPr sz="1800" kern="1200">
-                <a:solidFill>
-                  <a:schemeClr val="tx1"/>
-                </a:solidFill>
-                <a:latin typeface="+mn-lt"/>
-                <a:ea typeface="+mn-ea"/>
-                <a:cs typeface="+mn-cs"/>
-              </a:defRPr>
-            </a:lvl9pPr>
-          </a:lstStyle>
-          <a:p>
-            <a:r>
-              <a:rPr lang="ru-RU" altLang="ru-RU" dirty="0"/>
-              <a:t>Графики</a:t>
-            </a:r>
-          </a:p>
-          <a:p>
-            <a:r>
-              <a:rPr lang="ru-RU" altLang="ru-RU" dirty="0"/>
-              <a:t>Гистограммы</a:t>
-            </a:r>
-          </a:p>
-          <a:p>
-            <a:r>
-              <a:rPr lang="ru-RU" altLang="ru-RU" dirty="0"/>
-              <a:t>Сводные таблицы</a:t>
-            </a:r>
-          </a:p>
-          <a:p>
-            <a:r>
-              <a:rPr lang="ru-RU" altLang="ru-RU" dirty="0"/>
-              <a:t>Фильтры</a:t>
-            </a:r>
-          </a:p>
-          <a:p>
-            <a:r>
-              <a:rPr lang="ru-RU" altLang="ru-RU" dirty="0"/>
-              <a:t>Динамические </a:t>
-            </a:r>
-            <a:r>
-              <a:rPr lang="ru-RU" altLang="ru-RU" dirty="0" err="1"/>
-              <a:t>дашборды</a:t>
-            </a:r>
-            <a:endParaRPr lang="ru-RU" altLang="ru-RU" dirty="0"/>
-          </a:p>
-        </p:txBody>
-      </p:sp>
-      <p:pic>
-        <p:nvPicPr>
-          <p:cNvPr id="8" name="Рисунок 2">
-            <a:extLst>
-              <a:ext uri="{FF2B5EF4-FFF2-40B4-BE49-F238E27FC236}">
-                <a16:creationId xmlns:a16="http://schemas.microsoft.com/office/drawing/2014/main" id="{F1EA5D88-0CFF-4C82-9FC9-ABB6AEE5FED6}"/>
-              </a:ext>
-            </a:extLst>
-          </p:cNvPr>
-          <p:cNvPicPr>
-            <a:picLocks noChangeAspect="1" noChangeArrowheads="1"/>
-          </p:cNvPicPr>
-          <p:nvPr/>
-        </p:nvPicPr>
-        <p:blipFill>
-          <a:blip r:embed="rId4">
-            <a:extLst>
-              <a:ext uri="{28A0092B-C50C-407E-A947-70E740481C1C}">
-                <a14:useLocalDpi xmlns:a14="http://schemas.microsoft.com/office/drawing/2010/main" val="0"/>
-              </a:ext>
-            </a:extLst>
-          </a:blip>
-          <a:srcRect/>
-          <a:stretch>
-            <a:fillRect/>
-          </a:stretch>
-        </p:blipFill>
-        <p:spPr bwMode="auto">
-          <a:xfrm>
-            <a:off x="9422130" y="1177320"/>
-            <a:ext cx="1733550" cy="1154112"/>
-          </a:xfrm>
-          <a:prstGeom prst="rect">
-            <a:avLst/>
-          </a:prstGeom>
-          <a:noFill/>
-          <a:ln>
-            <a:noFill/>
-          </a:ln>
-          <a:extLst>
-            <a:ext uri="{909E8E84-426E-40DD-AFC4-6F175D3DCCD1}">
-              <a14:hiddenFill xmlns:a14="http://schemas.microsoft.com/office/drawing/2010/main">
-                <a:solidFill>
-                  <a:srgbClr val="FFFFFF"/>
-                </a:solidFill>
-              </a14:hiddenFill>
-            </a:ext>
-            <a:ext uri="{91240B29-F687-4F45-9708-019B960494DF}">
-              <a14:hiddenLine xmlns:a14="http://schemas.microsoft.com/office/drawing/2010/main" w="9525">
-                <a:solidFill>
-                  <a:srgbClr val="000000"/>
-                </a:solidFill>
-                <a:miter lim="800000"/>
-                <a:headEnd/>
-                <a:tailEnd/>
-              </a14:hiddenLine>
-            </a:ext>
-          </a:extLst>
-        </p:spPr>
-      </p:pic>
-      <p:pic>
-        <p:nvPicPr>
-          <p:cNvPr id="10" name="Рисунок 3">
-            <a:extLst>
-              <a:ext uri="{FF2B5EF4-FFF2-40B4-BE49-F238E27FC236}">
-                <a16:creationId xmlns:a16="http://schemas.microsoft.com/office/drawing/2014/main" id="{321BAED2-9CBA-4BF4-95F5-A1085F6DB419}"/>
-              </a:ext>
-            </a:extLst>
-          </p:cNvPr>
-          <p:cNvPicPr>
-            <a:picLocks noChangeAspect="1" noChangeArrowheads="1"/>
-          </p:cNvPicPr>
-          <p:nvPr/>
-        </p:nvPicPr>
-        <p:blipFill>
-          <a:blip r:embed="rId5">
-            <a:extLst>
-              <a:ext uri="{28A0092B-C50C-407E-A947-70E740481C1C}">
-                <a14:useLocalDpi xmlns:a14="http://schemas.microsoft.com/office/drawing/2010/main" val="0"/>
-              </a:ext>
-            </a:extLst>
-          </a:blip>
-          <a:srcRect/>
-          <a:stretch>
-            <a:fillRect/>
-          </a:stretch>
-        </p:blipFill>
-        <p:spPr bwMode="auto">
-          <a:xfrm>
-            <a:off x="6904355" y="1177320"/>
-            <a:ext cx="1733550" cy="1196975"/>
-          </a:xfrm>
-          <a:prstGeom prst="rect">
-            <a:avLst/>
-          </a:prstGeom>
-          <a:noFill/>
-          <a:ln>
-            <a:noFill/>
-          </a:ln>
-          <a:extLst>
-            <a:ext uri="{909E8E84-426E-40DD-AFC4-6F175D3DCCD1}">
-              <a14:hiddenFill xmlns:a14="http://schemas.microsoft.com/office/drawing/2010/main">
-                <a:solidFill>
-                  <a:srgbClr val="FFFFFF"/>
-                </a:solidFill>
-              </a14:hiddenFill>
-            </a:ext>
-            <a:ext uri="{91240B29-F687-4F45-9708-019B960494DF}">
-              <a14:hiddenLine xmlns:a14="http://schemas.microsoft.com/office/drawing/2010/main" w="9525">
-                <a:solidFill>
-                  <a:srgbClr val="000000"/>
-                </a:solidFill>
-                <a:miter lim="800000"/>
-                <a:headEnd/>
-                <a:tailEnd/>
-              </a14:hiddenLine>
-            </a:ext>
-          </a:extLst>
-        </p:spPr>
-      </p:pic>
-      <p:pic>
-        <p:nvPicPr>
-          <p:cNvPr id="11" name="Рисунок 4">
-            <a:extLst>
-              <a:ext uri="{FF2B5EF4-FFF2-40B4-BE49-F238E27FC236}">
-                <a16:creationId xmlns:a16="http://schemas.microsoft.com/office/drawing/2014/main" id="{CB459568-C7EC-4016-BF4D-BAE31E9E98E2}"/>
-              </a:ext>
-            </a:extLst>
-          </p:cNvPr>
-          <p:cNvPicPr>
-            <a:picLocks noChangeAspect="1" noChangeArrowheads="1"/>
-          </p:cNvPicPr>
-          <p:nvPr/>
-        </p:nvPicPr>
-        <p:blipFill>
-          <a:blip r:embed="rId6">
-            <a:extLst>
-              <a:ext uri="{28A0092B-C50C-407E-A947-70E740481C1C}">
-                <a14:useLocalDpi xmlns:a14="http://schemas.microsoft.com/office/drawing/2010/main" val="0"/>
-              </a:ext>
-            </a:extLst>
-          </a:blip>
-          <a:srcRect/>
-          <a:stretch>
-            <a:fillRect/>
-          </a:stretch>
-        </p:blipFill>
-        <p:spPr bwMode="auto">
-          <a:xfrm>
-            <a:off x="9325293" y="2604482"/>
-            <a:ext cx="1733550" cy="1168400"/>
-          </a:xfrm>
-          <a:prstGeom prst="rect">
-            <a:avLst/>
-          </a:prstGeom>
-          <a:noFill/>
-          <a:ln>
-            <a:noFill/>
-          </a:ln>
-          <a:extLst>
-            <a:ext uri="{909E8E84-426E-40DD-AFC4-6F175D3DCCD1}">
-              <a14:hiddenFill xmlns:a14="http://schemas.microsoft.com/office/drawing/2010/main">
-                <a:solidFill>
-                  <a:srgbClr val="FFFFFF"/>
-                </a:solidFill>
-              </a14:hiddenFill>
-            </a:ext>
-            <a:ext uri="{91240B29-F687-4F45-9708-019B960494DF}">
-              <a14:hiddenLine xmlns:a14="http://schemas.microsoft.com/office/drawing/2010/main" w="9525">
-                <a:solidFill>
-                  <a:srgbClr val="000000"/>
-                </a:solidFill>
-                <a:miter lim="800000"/>
-                <a:headEnd/>
-                <a:tailEnd/>
-              </a14:hiddenLine>
-            </a:ext>
-          </a:extLst>
-        </p:spPr>
-      </p:pic>
-      <p:pic>
-        <p:nvPicPr>
-          <p:cNvPr id="12" name="Рисунок 5">
-            <a:extLst>
-              <a:ext uri="{FF2B5EF4-FFF2-40B4-BE49-F238E27FC236}">
-                <a16:creationId xmlns:a16="http://schemas.microsoft.com/office/drawing/2014/main" id="{12076075-5B03-462E-8811-BC1F932E39D0}"/>
-              </a:ext>
-            </a:extLst>
-          </p:cNvPr>
-          <p:cNvPicPr>
-            <a:picLocks noChangeAspect="1" noChangeArrowheads="1"/>
-          </p:cNvPicPr>
-          <p:nvPr/>
-        </p:nvPicPr>
-        <p:blipFill>
-          <a:blip r:embed="rId7">
-            <a:extLst>
-              <a:ext uri="{28A0092B-C50C-407E-A947-70E740481C1C}">
-                <a14:useLocalDpi xmlns:a14="http://schemas.microsoft.com/office/drawing/2010/main" val="0"/>
-              </a:ext>
-            </a:extLst>
-          </a:blip>
-          <a:srcRect/>
-          <a:stretch>
-            <a:fillRect/>
-          </a:stretch>
-        </p:blipFill>
-        <p:spPr bwMode="auto">
-          <a:xfrm>
-            <a:off x="6904355" y="2475895"/>
-            <a:ext cx="1387475" cy="1338262"/>
-          </a:xfrm>
-          <a:prstGeom prst="rect">
-            <a:avLst/>
-          </a:prstGeom>
-          <a:noFill/>
-          <a:ln>
-            <a:noFill/>
-          </a:ln>
-          <a:extLst>
-            <a:ext uri="{909E8E84-426E-40DD-AFC4-6F175D3DCCD1}">
-              <a14:hiddenFill xmlns:a14="http://schemas.microsoft.com/office/drawing/2010/main">
-                <a:solidFill>
-                  <a:srgbClr val="FFFFFF"/>
-                </a:solidFill>
-              </a14:hiddenFill>
-            </a:ext>
-            <a:ext uri="{91240B29-F687-4F45-9708-019B960494DF}">
-              <a14:hiddenLine xmlns:a14="http://schemas.microsoft.com/office/drawing/2010/main" w="9525">
-                <a:solidFill>
-                  <a:srgbClr val="000000"/>
-                </a:solidFill>
-                <a:miter lim="800000"/>
-                <a:headEnd/>
-                <a:tailEnd/>
-              </a14:hiddenLine>
-            </a:ext>
-          </a:extLst>
-        </p:spPr>
-      </p:pic>
-      <p:sp>
-        <p:nvSpPr>
-          <p:cNvPr id="14" name="Прямоугольник 8">
-            <a:extLst>
-              <a:ext uri="{FF2B5EF4-FFF2-40B4-BE49-F238E27FC236}">
-                <a16:creationId xmlns:a16="http://schemas.microsoft.com/office/drawing/2014/main" id="{D2C3666A-DEF6-4C77-BCAB-174B8FFA713D}"/>
-              </a:ext>
-            </a:extLst>
-          </p:cNvPr>
-          <p:cNvSpPr>
-            <a:spLocks noChangeArrowheads="1"/>
-          </p:cNvSpPr>
-          <p:nvPr/>
-        </p:nvSpPr>
-        <p:spPr bwMode="auto">
-          <a:xfrm>
-            <a:off x="945356" y="5828810"/>
-            <a:ext cx="2224087" cy="369888"/>
-          </a:xfrm>
-          <a:prstGeom prst="rect">
-            <a:avLst/>
-          </a:prstGeom>
-          <a:noFill/>
-          <a:ln>
-            <a:noFill/>
-          </a:ln>
-          <a:extLst>
-            <a:ext uri="{909E8E84-426E-40DD-AFC4-6F175D3DCCD1}">
-              <a14:hiddenFill xmlns:a14="http://schemas.microsoft.com/office/drawing/2010/main">
-                <a:solidFill>
-                  <a:srgbClr val="FFFFFF"/>
-                </a:solidFill>
-              </a14:hiddenFill>
-            </a:ext>
-            <a:ext uri="{91240B29-F687-4F45-9708-019B960494DF}">
-              <a14:hiddenLine xmlns:a14="http://schemas.microsoft.com/office/drawing/2010/main" w="9525">
-                <a:solidFill>
-                  <a:srgbClr val="000000"/>
-                </a:solidFill>
-                <a:miter lim="800000"/>
-                <a:headEnd/>
-                <a:tailEnd/>
-              </a14:hiddenLine>
-            </a:ext>
-          </a:extLst>
-        </p:spPr>
-        <p:txBody>
-          <a:bodyPr wrap="none">
-            <a:spAutoFit/>
-          </a:bodyPr>
-          <a:lstStyle>
-            <a:lvl1pPr>
-              <a:spcBef>
-                <a:spcPct val="20000"/>
-              </a:spcBef>
-              <a:buFont typeface="Arial" panose="020B0604020202020204" pitchFamily="34" charset="0"/>
-              <a:buChar char="•"/>
-              <a:defRPr sz="3200">
-                <a:solidFill>
-                  <a:schemeClr val="tx1"/>
-                </a:solidFill>
-                <a:latin typeface="Calibri" panose="020F0502020204030204" pitchFamily="34" charset="0"/>
-              </a:defRPr>
-            </a:lvl1pPr>
-            <a:lvl2pPr marL="742950" indent="-285750">
-              <a:spcBef>
-                <a:spcPct val="20000"/>
-              </a:spcBef>
-              <a:buFont typeface="Arial" panose="020B0604020202020204" pitchFamily="34" charset="0"/>
-              <a:buChar char="–"/>
-              <a:defRPr sz="2800">
-                <a:solidFill>
-                  <a:schemeClr val="tx1"/>
-                </a:solidFill>
-                <a:latin typeface="Calibri" panose="020F0502020204030204" pitchFamily="34" charset="0"/>
-              </a:defRPr>
-            </a:lvl2pPr>
-            <a:lvl3pPr marL="1143000" indent="-228600">
-              <a:spcBef>
-                <a:spcPct val="20000"/>
-              </a:spcBef>
-              <a:buFont typeface="Arial" panose="020B0604020202020204" pitchFamily="34" charset="0"/>
-              <a:buChar char="•"/>
-              <a:defRPr sz="2400">
-                <a:solidFill>
-                  <a:schemeClr val="tx1"/>
-                </a:solidFill>
-                <a:latin typeface="Calibri" panose="020F0502020204030204" pitchFamily="34" charset="0"/>
-              </a:defRPr>
-            </a:lvl3pPr>
-            <a:lvl4pPr marL="1600200" indent="-228600">
-              <a:spcBef>
-                <a:spcPct val="20000"/>
-              </a:spcBef>
-              <a:buFont typeface="Arial" panose="020B0604020202020204" pitchFamily="34" charset="0"/>
-              <a:buChar char="–"/>
-              <a:defRPr sz="2000">
-                <a:solidFill>
-                  <a:schemeClr val="tx1"/>
-                </a:solidFill>
-                <a:latin typeface="Calibri" panose="020F0502020204030204" pitchFamily="34" charset="0"/>
-              </a:defRPr>
-            </a:lvl4pPr>
-            <a:lvl5pPr marL="2057400" indent="-228600">
-              <a:spcBef>
-                <a:spcPct val="20000"/>
-              </a:spcBef>
-              <a:buFont typeface="Arial" panose="020B0604020202020204" pitchFamily="34" charset="0"/>
-              <a:buChar char="»"/>
-              <a:defRPr sz="2000">
-                <a:solidFill>
-                  <a:schemeClr val="tx1"/>
-                </a:solidFill>
-                <a:latin typeface="Calibri" panose="020F0502020204030204" pitchFamily="34" charset="0"/>
-              </a:defRPr>
-            </a:lvl5pPr>
-            <a:lvl6pPr marL="2514600" indent="-228600" eaLnBrk="0" fontAlgn="base" hangingPunct="0">
-              <a:spcBef>
-                <a:spcPct val="20000"/>
-              </a:spcBef>
-              <a:spcAft>
-                <a:spcPct val="0"/>
-              </a:spcAft>
-              <a:buFont typeface="Arial" panose="020B0604020202020204" pitchFamily="34" charset="0"/>
-              <a:buChar char="»"/>
-              <a:defRPr sz="2000">
-                <a:solidFill>
-                  <a:schemeClr val="tx1"/>
-                </a:solidFill>
-                <a:latin typeface="Calibri" panose="020F0502020204030204" pitchFamily="34" charset="0"/>
-              </a:defRPr>
-            </a:lvl6pPr>
-            <a:lvl7pPr marL="2971800" indent="-228600" eaLnBrk="0" fontAlgn="base" hangingPunct="0">
-              <a:spcBef>
-                <a:spcPct val="20000"/>
-              </a:spcBef>
-              <a:spcAft>
-                <a:spcPct val="0"/>
-              </a:spcAft>
-              <a:buFont typeface="Arial" panose="020B0604020202020204" pitchFamily="34" charset="0"/>
-              <a:buChar char="»"/>
-              <a:defRPr sz="2000">
-                <a:solidFill>
-                  <a:schemeClr val="tx1"/>
-                </a:solidFill>
-                <a:latin typeface="Calibri" panose="020F0502020204030204" pitchFamily="34" charset="0"/>
-              </a:defRPr>
-            </a:lvl7pPr>
-            <a:lvl8pPr marL="3429000" indent="-228600" eaLnBrk="0" fontAlgn="base" hangingPunct="0">
-              <a:spcBef>
-                <a:spcPct val="20000"/>
-              </a:spcBef>
-              <a:spcAft>
-                <a:spcPct val="0"/>
-              </a:spcAft>
-              <a:buFont typeface="Arial" panose="020B0604020202020204" pitchFamily="34" charset="0"/>
-              <a:buChar char="»"/>
-              <a:defRPr sz="2000">
-                <a:solidFill>
-                  <a:schemeClr val="tx1"/>
-                </a:solidFill>
-                <a:latin typeface="Calibri" panose="020F0502020204030204" pitchFamily="34" charset="0"/>
-              </a:defRPr>
-            </a:lvl8pPr>
-            <a:lvl9pPr marL="3886200" indent="-228600" eaLnBrk="0" fontAlgn="base" hangingPunct="0">
-              <a:spcBef>
-                <a:spcPct val="20000"/>
-              </a:spcBef>
-              <a:spcAft>
-                <a:spcPct val="0"/>
-              </a:spcAft>
-              <a:buFont typeface="Arial" panose="020B0604020202020204" pitchFamily="34" charset="0"/>
-              <a:buChar char="»"/>
-              <a:defRPr sz="2000">
-                <a:solidFill>
-                  <a:schemeClr val="tx1"/>
-                </a:solidFill>
-                <a:latin typeface="Calibri" panose="020F0502020204030204" pitchFamily="34" charset="0"/>
-              </a:defRPr>
-            </a:lvl9pPr>
-          </a:lstStyle>
-          <a:p>
-            <a:pPr>
-              <a:spcBef>
-                <a:spcPct val="0"/>
-              </a:spcBef>
-              <a:buFontTx/>
-              <a:buNone/>
-            </a:pPr>
-            <a:r>
-              <a:rPr lang="ru-RU" altLang="ru-RU" sz="1800">
-                <a:latin typeface="Arial" panose="020B0604020202020204" pitchFamily="34" charset="0"/>
-              </a:rPr>
-              <a:t>https://grafana.com/</a:t>
-            </a:r>
-          </a:p>
-        </p:txBody>
-      </p:sp>
-      <p:pic>
-        <p:nvPicPr>
-          <p:cNvPr id="15" name="Рисунок 9">
-            <a:extLst>
-              <a:ext uri="{FF2B5EF4-FFF2-40B4-BE49-F238E27FC236}">
-                <a16:creationId xmlns:a16="http://schemas.microsoft.com/office/drawing/2014/main" id="{BB89BE86-883D-4BF8-9346-2FE2EDECE689}"/>
-              </a:ext>
-            </a:extLst>
-          </p:cNvPr>
-          <p:cNvPicPr>
-            <a:picLocks noChangeAspect="1" noChangeArrowheads="1"/>
-          </p:cNvPicPr>
-          <p:nvPr/>
-        </p:nvPicPr>
-        <p:blipFill>
-          <a:blip r:embed="rId8">
-            <a:extLst>
-              <a:ext uri="{28A0092B-C50C-407E-A947-70E740481C1C}">
-                <a14:useLocalDpi xmlns:a14="http://schemas.microsoft.com/office/drawing/2010/main" val="0"/>
-              </a:ext>
-            </a:extLst>
-          </a:blip>
-          <a:srcRect/>
-          <a:stretch>
-            <a:fillRect/>
-          </a:stretch>
-        </p:blipFill>
-        <p:spPr bwMode="auto">
-          <a:xfrm>
-            <a:off x="7177405" y="3914170"/>
-            <a:ext cx="3733800" cy="2297112"/>
-          </a:xfrm>
-          <a:prstGeom prst="rect">
-            <a:avLst/>
-          </a:prstGeom>
-          <a:noFill/>
-          <a:ln>
-            <a:noFill/>
-          </a:ln>
-          <a:extLst>
-            <a:ext uri="{909E8E84-426E-40DD-AFC4-6F175D3DCCD1}">
-              <a14:hiddenFill xmlns:a14="http://schemas.microsoft.com/office/drawing/2010/main">
-                <a:solidFill>
-                  <a:srgbClr val="FFFFFF"/>
-                </a:solidFill>
-              </a14:hiddenFill>
-            </a:ext>
-            <a:ext uri="{91240B29-F687-4F45-9708-019B960494DF}">
-              <a14:hiddenLine xmlns:a14="http://schemas.microsoft.com/office/drawing/2010/main" w="9525">
-                <a:solidFill>
-                  <a:srgbClr val="000000"/>
-                </a:solidFill>
-                <a:miter lim="800000"/>
-                <a:headEnd/>
-                <a:tailEnd/>
-              </a14:hiddenLine>
-            </a:ext>
-          </a:extLst>
-        </p:spPr>
-      </p:pic>
-    </p:spTree>
-    <p:extLst>
-      <p:ext uri="{BB962C8B-B14F-4D97-AF65-F5344CB8AC3E}">
-        <p14:creationId xmlns:p14="http://schemas.microsoft.com/office/powerpoint/2010/main" val="3951738829"/>
-      </p:ext>
-    </p:extLst>
-  </p:cSld>
-  <p:clrMapOvr>
-    <a:masterClrMapping/>
-  </p:clrMapOvr>
-</p:sld>
-</file>
-
-<file path=ppt/slides/slide29.xml><?xml version="1.0" encoding="utf-8"?>
-<p:sld xmlns:a="http://schemas.openxmlformats.org/drawingml/2006/main" xmlns:r="http://schemas.openxmlformats.org/officeDocument/2006/relationships" xmlns:p="http://schemas.openxmlformats.org/presentationml/2006/main">
-  <p:cSld>
-    <p:spTree>
-      <p:nvGrpSpPr>
-        <p:cNvPr id="1" name=""/>
-        <p:cNvGrpSpPr/>
-        <p:nvPr/>
-      </p:nvGrpSpPr>
-      <p:grpSpPr>
-        <a:xfrm>
-          <a:off x="0" y="0"/>
-          <a:ext cx="0" cy="0"/>
-          <a:chOff x="0" y="0"/>
-          <a:chExt cx="0" cy="0"/>
-        </a:xfrm>
-      </p:grpSpPr>
-      <p:sp>
-        <p:nvSpPr>
-          <p:cNvPr id="3" name="Прямоугольник 2"/>
-          <p:cNvSpPr/>
-          <p:nvPr/>
-        </p:nvSpPr>
-        <p:spPr>
-          <a:xfrm flipV="1">
-            <a:off x="925620" y="920165"/>
-            <a:ext cx="10865327" cy="21600"/>
-          </a:xfrm>
-          <a:prstGeom prst="rect">
-            <a:avLst/>
-          </a:prstGeom>
-          <a:solidFill>
-            <a:srgbClr val="E20443"/>
-          </a:solidFill>
-          <a:ln>
-            <a:noFill/>
-          </a:ln>
-        </p:spPr>
-        <p:style>
-          <a:lnRef idx="2">
-            <a:schemeClr val="accent1">
-              <a:shade val="50000"/>
-            </a:schemeClr>
-          </a:lnRef>
-          <a:fillRef idx="1">
-            <a:schemeClr val="accent1"/>
-          </a:fillRef>
-          <a:effectRef idx="0">
-            <a:schemeClr val="accent1"/>
-          </a:effectRef>
-          <a:fontRef idx="minor">
-            <a:schemeClr val="lt1"/>
-          </a:fontRef>
-        </p:style>
-        <p:txBody>
-          <a:bodyPr rtlCol="0" anchor="ctr"/>
-          <a:lstStyle/>
-          <a:p>
-            <a:pPr algn="ctr"/>
-            <a:endParaRPr lang="ru-RU">
-              <a:solidFill>
-                <a:srgbClr val="E20443"/>
-              </a:solidFill>
-            </a:endParaRPr>
-          </a:p>
-        </p:txBody>
-      </p:sp>
-      <p:sp>
-        <p:nvSpPr>
-          <p:cNvPr id="4" name="TextBox 9">
-            <a:extLst>
-              <a:ext uri="{FF2B5EF4-FFF2-40B4-BE49-F238E27FC236}">
-                <a16:creationId xmlns:a16="http://schemas.microsoft.com/office/drawing/2014/main" id="{6D1610F7-A0C9-4E50-9206-D9E394A55B73}"/>
-              </a:ext>
-            </a:extLst>
-          </p:cNvPr>
-          <p:cNvSpPr txBox="1"/>
-          <p:nvPr/>
-        </p:nvSpPr>
-        <p:spPr>
-          <a:xfrm>
-            <a:off x="2057400" y="219959"/>
-            <a:ext cx="9794965" cy="523220"/>
-          </a:xfrm>
-          <a:prstGeom prst="rect">
-            <a:avLst/>
-          </a:prstGeom>
-          <a:noFill/>
-        </p:spPr>
-        <p:txBody>
-          <a:bodyPr wrap="square" rtlCol="0">
-            <a:spAutoFit/>
-          </a:bodyPr>
-          <a:lstStyle>
-            <a:defPPr>
-              <a:defRPr lang="ru-RU"/>
-            </a:defPPr>
-            <a:lvl1pPr marL="0" algn="l" defTabSz="914400" rtl="0" eaLnBrk="1" latinLnBrk="0" hangingPunct="1">
-              <a:defRPr sz="1800" kern="1200">
-                <a:solidFill>
-                  <a:schemeClr val="tx1"/>
-                </a:solidFill>
-                <a:latin typeface="+mn-lt"/>
-                <a:ea typeface="+mn-ea"/>
-                <a:cs typeface="+mn-cs"/>
-              </a:defRPr>
-            </a:lvl1pPr>
-            <a:lvl2pPr marL="457200" algn="l" defTabSz="914400" rtl="0" eaLnBrk="1" latinLnBrk="0" hangingPunct="1">
-              <a:defRPr sz="1800" kern="1200">
-                <a:solidFill>
-                  <a:schemeClr val="tx1"/>
-                </a:solidFill>
-                <a:latin typeface="+mn-lt"/>
-                <a:ea typeface="+mn-ea"/>
-                <a:cs typeface="+mn-cs"/>
-              </a:defRPr>
-            </a:lvl2pPr>
-            <a:lvl3pPr marL="914400" algn="l" defTabSz="914400" rtl="0" eaLnBrk="1" latinLnBrk="0" hangingPunct="1">
-              <a:defRPr sz="1800" kern="1200">
-                <a:solidFill>
-                  <a:schemeClr val="tx1"/>
-                </a:solidFill>
-                <a:latin typeface="+mn-lt"/>
-                <a:ea typeface="+mn-ea"/>
-                <a:cs typeface="+mn-cs"/>
-              </a:defRPr>
-            </a:lvl3pPr>
-            <a:lvl4pPr marL="1371600" algn="l" defTabSz="914400" rtl="0" eaLnBrk="1" latinLnBrk="0" hangingPunct="1">
-              <a:defRPr sz="1800" kern="1200">
-                <a:solidFill>
-                  <a:schemeClr val="tx1"/>
-                </a:solidFill>
-                <a:latin typeface="+mn-lt"/>
-                <a:ea typeface="+mn-ea"/>
-                <a:cs typeface="+mn-cs"/>
-              </a:defRPr>
-            </a:lvl4pPr>
-            <a:lvl5pPr marL="1828800" algn="l" defTabSz="914400" rtl="0" eaLnBrk="1" latinLnBrk="0" hangingPunct="1">
-              <a:defRPr sz="1800" kern="1200">
-                <a:solidFill>
-                  <a:schemeClr val="tx1"/>
-                </a:solidFill>
-                <a:latin typeface="+mn-lt"/>
-                <a:ea typeface="+mn-ea"/>
-                <a:cs typeface="+mn-cs"/>
-              </a:defRPr>
-            </a:lvl5pPr>
-            <a:lvl6pPr marL="2286000" algn="l" defTabSz="914400" rtl="0" eaLnBrk="1" latinLnBrk="0" hangingPunct="1">
-              <a:defRPr sz="1800" kern="1200">
-                <a:solidFill>
-                  <a:schemeClr val="tx1"/>
-                </a:solidFill>
-                <a:latin typeface="+mn-lt"/>
-                <a:ea typeface="+mn-ea"/>
-                <a:cs typeface="+mn-cs"/>
-              </a:defRPr>
-            </a:lvl6pPr>
-            <a:lvl7pPr marL="2743200" algn="l" defTabSz="914400" rtl="0" eaLnBrk="1" latinLnBrk="0" hangingPunct="1">
-              <a:defRPr sz="1800" kern="1200">
-                <a:solidFill>
-                  <a:schemeClr val="tx1"/>
-                </a:solidFill>
-                <a:latin typeface="+mn-lt"/>
-                <a:ea typeface="+mn-ea"/>
-                <a:cs typeface="+mn-cs"/>
-              </a:defRPr>
-            </a:lvl7pPr>
-            <a:lvl8pPr marL="3200400" algn="l" defTabSz="914400" rtl="0" eaLnBrk="1" latinLnBrk="0" hangingPunct="1">
-              <a:defRPr sz="1800" kern="1200">
-                <a:solidFill>
-                  <a:schemeClr val="tx1"/>
-                </a:solidFill>
-                <a:latin typeface="+mn-lt"/>
-                <a:ea typeface="+mn-ea"/>
-                <a:cs typeface="+mn-cs"/>
-              </a:defRPr>
-            </a:lvl8pPr>
-            <a:lvl9pPr marL="3657600" algn="l" defTabSz="914400" rtl="0" eaLnBrk="1" latinLnBrk="0" hangingPunct="1">
-              <a:defRPr sz="1800" kern="1200">
-                <a:solidFill>
-                  <a:schemeClr val="tx1"/>
-                </a:solidFill>
-                <a:latin typeface="+mn-lt"/>
-                <a:ea typeface="+mn-ea"/>
-                <a:cs typeface="+mn-cs"/>
-              </a:defRPr>
-            </a:lvl9pPr>
-          </a:lstStyle>
-          <a:p>
-            <a:r>
-              <a:rPr lang="ru-RU" sz="2800" b="1" dirty="0">
-                <a:solidFill>
-                  <a:srgbClr val="FF0000"/>
-                </a:solidFill>
-              </a:rPr>
-              <a:t>Развитие СППР – цифровые двойники</a:t>
-            </a:r>
-          </a:p>
-        </p:txBody>
-      </p:sp>
-      <p:sp>
-        <p:nvSpPr>
-          <p:cNvPr id="6" name="Номер слайда 5">
-            <a:extLst>
-              <a:ext uri="{FF2B5EF4-FFF2-40B4-BE49-F238E27FC236}">
-                <a16:creationId xmlns:a16="http://schemas.microsoft.com/office/drawing/2014/main" id="{2A73E36B-93CF-4B6D-9D12-D242EBAEB367}"/>
-              </a:ext>
-            </a:extLst>
-          </p:cNvPr>
-          <p:cNvSpPr>
-            <a:spLocks noGrp="1"/>
-          </p:cNvSpPr>
-          <p:nvPr>
-            <p:ph type="sldNum" sz="quarter" idx="12"/>
-          </p:nvPr>
-        </p:nvSpPr>
-        <p:spPr/>
-        <p:txBody>
-          <a:bodyPr/>
-          <a:lstStyle/>
-          <a:p>
-            <a:fld id="{FF9AC15E-FCD1-4167-800F-1DB8497ABFCE}" type="slidenum">
-              <a:rPr lang="ru-RU" smtClean="0"/>
-              <a:t>29</a:t>
+              <a:t>25</a:t>
             </a:fld>
             <a:endParaRPr lang="ru-RU"/>
           </a:p>
@@ -21620,18 +18155,12 @@
 </p:sld>
 </file>
 
-<file path=ppt/slides/slide3.xml><?xml version="1.0" encoding="utf-8"?>
+<file path=ppt/slides/slide26.xml><?xml version="1.0" encoding="utf-8"?>
 <p:sld xmlns:a="http://schemas.openxmlformats.org/drawingml/2006/main" xmlns:r="http://schemas.openxmlformats.org/officeDocument/2006/relationships" xmlns:p="http://schemas.openxmlformats.org/presentationml/2006/main">
   <p:cSld>
     <p:spTree>
       <p:nvGrpSpPr>
-        <p:cNvPr id="1" name="">
-          <a:extLst>
-            <a:ext uri="{FF2B5EF4-FFF2-40B4-BE49-F238E27FC236}">
-              <a16:creationId xmlns:a16="http://schemas.microsoft.com/office/drawing/2014/main" id="{848272CE-CF20-CD39-2496-8671A6315AB5}"/>
-            </a:ext>
-          </a:extLst>
-        </p:cNvPr>
+        <p:cNvPr id="1" name=""/>
         <p:cNvGrpSpPr/>
         <p:nvPr/>
       </p:nvGrpSpPr>
@@ -21645,13 +18174,7 @@
       </p:grpSpPr>
       <p:sp>
         <p:nvSpPr>
-          <p:cNvPr id="3" name="Прямоугольник 2">
-            <a:extLst>
-              <a:ext uri="{FF2B5EF4-FFF2-40B4-BE49-F238E27FC236}">
-                <a16:creationId xmlns:a16="http://schemas.microsoft.com/office/drawing/2014/main" id="{9A5D8014-037B-E853-36BB-DE184B5BB136}"/>
-              </a:ext>
-            </a:extLst>
-          </p:cNvPr>
+          <p:cNvPr id="3" name="Прямоугольник 2"/>
           <p:cNvSpPr/>
           <p:nvPr/>
         </p:nvSpPr>
@@ -21704,7 +18227,7 @@
           <p:cNvPr id="4" name="TextBox 9">
             <a:extLst>
               <a:ext uri="{FF2B5EF4-FFF2-40B4-BE49-F238E27FC236}">
-                <a16:creationId xmlns:a16="http://schemas.microsoft.com/office/drawing/2014/main" id="{B64D7E29-E638-ED5E-9F16-7CA593248006}"/>
+                <a16:creationId xmlns:a16="http://schemas.microsoft.com/office/drawing/2014/main" id="{6D1610F7-A0C9-4E50-9206-D9E394A55B73}"/>
               </a:ext>
             </a:extLst>
           </p:cNvPr>
@@ -21713,8 +18236,8 @@
         </p:nvSpPr>
         <p:spPr>
           <a:xfrm>
-            <a:off x="2477193" y="219959"/>
-            <a:ext cx="9375172" cy="523220"/>
+            <a:off x="2243150" y="230759"/>
+            <a:ext cx="9794965" cy="523220"/>
           </a:xfrm>
           <a:prstGeom prst="rect">
             <a:avLst/>
@@ -21827,21 +18350,8 @@
                   <a:srgbClr val="FF0000"/>
                 </a:solidFill>
               </a:rPr>
-              <a:t>Кто я такой и что я тут делаю</a:t>
-            </a:r>
-            <a:r>
-              <a:rPr lang="en-US" sz="2800" b="1" dirty="0">
-                <a:solidFill>
-                  <a:srgbClr val="FF0000"/>
-                </a:solidFill>
-              </a:rPr>
-              <a:t>?</a:t>
-            </a:r>
-            <a:endParaRPr lang="ru-RU" sz="2800" b="1" dirty="0">
-              <a:solidFill>
-                <a:srgbClr val="FF0000"/>
-              </a:solidFill>
-            </a:endParaRPr>
+              <a:t>Уже почти все… Давайте подведем краткие итоги…</a:t>
+            </a:r>
           </a:p>
         </p:txBody>
       </p:sp>
@@ -21850,7 +18360,7 @@
           <p:cNvPr id="6" name="Номер слайда 5">
             <a:extLst>
               <a:ext uri="{FF2B5EF4-FFF2-40B4-BE49-F238E27FC236}">
-                <a16:creationId xmlns:a16="http://schemas.microsoft.com/office/drawing/2014/main" id="{D5DEF263-553A-F4F9-3776-BEE5623B1ADC}"/>
+                <a16:creationId xmlns:a16="http://schemas.microsoft.com/office/drawing/2014/main" id="{2A73E36B-93CF-4B6D-9D12-D242EBAEB367}"/>
               </a:ext>
             </a:extLst>
           </p:cNvPr>
@@ -21868,7 +18378,7 @@
           <a:p>
             <a:fld id="{FF9AC15E-FCD1-4167-800F-1DB8497ABFCE}" type="slidenum">
               <a:rPr lang="ru-RU" smtClean="0"/>
-              <a:t>3</a:t>
+              <a:t>26</a:t>
             </a:fld>
             <a:endParaRPr lang="ru-RU"/>
           </a:p>
@@ -21879,7 +18389,7 @@
           <p:cNvPr id="9" name="Объект 1">
             <a:extLst>
               <a:ext uri="{FF2B5EF4-FFF2-40B4-BE49-F238E27FC236}">
-                <a16:creationId xmlns:a16="http://schemas.microsoft.com/office/drawing/2014/main" id="{46B00A59-CAD1-626B-8BA0-56EE2FA62DCE}"/>
+                <a16:creationId xmlns:a16="http://schemas.microsoft.com/office/drawing/2014/main" id="{D8975343-2B37-104D-8757-0404410E4582}"/>
               </a:ext>
             </a:extLst>
           </p:cNvPr>
@@ -21910,10 +18420,10 @@
       </p:pic>
       <p:sp>
         <p:nvSpPr>
-          <p:cNvPr id="8" name="Содержимое 2">
+          <p:cNvPr id="7" name="Содержимое 2">
             <a:extLst>
               <a:ext uri="{FF2B5EF4-FFF2-40B4-BE49-F238E27FC236}">
-                <a16:creationId xmlns:a16="http://schemas.microsoft.com/office/drawing/2014/main" id="{E1B6C54F-101A-20CB-A036-71C851646F7F}"/>
+                <a16:creationId xmlns:a16="http://schemas.microsoft.com/office/drawing/2014/main" id="{618EC86C-9A58-4647-B7FB-0BD4EF13EB60}"/>
               </a:ext>
             </a:extLst>
           </p:cNvPr>
@@ -21924,8 +18434,8 @@
         </p:nvSpPr>
         <p:spPr>
           <a:xfrm>
-            <a:off x="925620" y="1839151"/>
-            <a:ext cx="7272062" cy="4298542"/>
+            <a:off x="741355" y="1455509"/>
+            <a:ext cx="10612445" cy="4900841"/>
           </a:xfrm>
           <a:prstGeom prst="rect">
             <a:avLst/>
@@ -22100,119 +18610,58 @@
             </a:lvl9pPr>
           </a:lstStyle>
           <a:p>
-            <a:pPr>
-              <a:buFont typeface="Arial" panose="020B0604020202020204" pitchFamily="34" charset="0"/>
-              <a:buNone/>
-            </a:pPr>
-            <a:r>
-              <a:rPr lang="ru-RU" altLang="ru-RU" sz="2400" b="1" dirty="0"/>
-              <a:t>Домуховский Николай Анатольевич</a:t>
-            </a:r>
-          </a:p>
-          <a:p>
-            <a:r>
-              <a:rPr lang="ru-RU" altLang="ru-RU" sz="2400" dirty="0"/>
-              <a:t>Окончил </a:t>
-            </a:r>
-            <a:r>
-              <a:rPr lang="ru-RU" altLang="ru-RU" sz="2400" dirty="0" err="1"/>
-              <a:t>матмех</a:t>
-            </a:r>
-            <a:r>
-              <a:rPr lang="ru-RU" altLang="ru-RU" sz="2400" dirty="0"/>
-              <a:t> </a:t>
-            </a:r>
-            <a:r>
-              <a:rPr lang="ru-RU" altLang="ru-RU" sz="2400" dirty="0" err="1"/>
-              <a:t>УрГУ</a:t>
-            </a:r>
-            <a:r>
-              <a:rPr lang="ru-RU" altLang="ru-RU" sz="2400" dirty="0"/>
-              <a:t> в далеком 2005-м, специальность – компьютерная безопасность</a:t>
-            </a:r>
-          </a:p>
-          <a:p>
-            <a:r>
-              <a:rPr lang="ru-RU" altLang="ru-RU" sz="2400" dirty="0"/>
-              <a:t>Более 20 лет опыта работы в сфере ИБ</a:t>
-            </a:r>
-            <a:r>
-              <a:rPr lang="en-US" altLang="ru-RU" sz="2400" dirty="0"/>
-              <a:t>: </a:t>
-            </a:r>
-            <a:r>
-              <a:rPr lang="ru-RU" altLang="ru-RU" sz="2400" dirty="0"/>
-              <a:t>проектный, продуктовый бизнес, научно-исследовательская работа</a:t>
-            </a:r>
-          </a:p>
-          <a:p>
-            <a:r>
-              <a:rPr lang="ru-RU" altLang="ru-RU" sz="2400" dirty="0"/>
-              <a:t>С ноября 2025 полностью перешел в сферу образования и науки</a:t>
-            </a:r>
-            <a:r>
-              <a:rPr lang="ru-RU" altLang="ru-RU" sz="2400" strike="sngStrike" dirty="0"/>
-              <a:t>, чтобы наконец защитить кандидатскую</a:t>
-            </a:r>
-            <a:r>
-              <a:rPr lang="ru-RU" altLang="ru-RU" sz="2400" dirty="0"/>
-              <a:t> </a:t>
+            <a:r>
+              <a:rPr lang="ru-RU" altLang="ru-RU" dirty="0"/>
+              <a:t>Данные окружают нас повсюду, НО не из каждого набора данных можно извлечь пользу</a:t>
+            </a:r>
+          </a:p>
+          <a:p>
+            <a:r>
+              <a:rPr lang="ru-RU" altLang="ru-RU" dirty="0"/>
+              <a:t>Во многих задачах (в т.ч. в информационной безопасности) разумная автоматизация позволяет решать задачи эффективнее, быстрее точнее</a:t>
+            </a:r>
+          </a:p>
+          <a:p>
+            <a:r>
+              <a:rPr lang="ru-RU" altLang="ru-RU" dirty="0"/>
+              <a:t>Существует множество готовых инструментов и библиотек для решения почти каждой задачи, но надо понимать границы их применения</a:t>
+            </a:r>
+          </a:p>
+          <a:p>
+            <a:r>
+              <a:rPr lang="ru-RU" altLang="ru-RU" dirty="0"/>
+              <a:t>ИИ это «</a:t>
+            </a:r>
+            <a:r>
+              <a:rPr lang="ru-RU" altLang="ru-RU" dirty="0" err="1"/>
+              <a:t>хайп</a:t>
+            </a:r>
+            <a:r>
+              <a:rPr lang="ru-RU" altLang="ru-RU" dirty="0"/>
+              <a:t>», но незаметно проникает почти везде</a:t>
+            </a:r>
+            <a:endParaRPr lang="en-US" altLang="ru-RU" dirty="0"/>
+          </a:p>
+          <a:p>
+            <a:r>
+              <a:rPr lang="ru-RU" altLang="ru-RU" dirty="0"/>
+              <a:t>Часто и быстро появляются новые технологии (например, </a:t>
+            </a:r>
+            <a:r>
+              <a:rPr lang="en-US" altLang="ru-RU" dirty="0"/>
+              <a:t>LLM, </a:t>
+            </a:r>
+            <a:r>
+              <a:rPr lang="ru-RU" altLang="ru-RU" dirty="0"/>
+              <a:t>ИИ-агенты), влияние которых нельзя недооценивать</a:t>
             </a:r>
           </a:p>
         </p:txBody>
       </p:sp>
-      <p:pic>
-        <p:nvPicPr>
-          <p:cNvPr id="5" name="Рисунок 8">
-            <a:extLst>
-              <a:ext uri="{FF2B5EF4-FFF2-40B4-BE49-F238E27FC236}">
-                <a16:creationId xmlns:a16="http://schemas.microsoft.com/office/drawing/2014/main" id="{4B54A7AB-0FB5-7C6B-470B-F32B18A6D91E}"/>
-              </a:ext>
-            </a:extLst>
-          </p:cNvPr>
-          <p:cNvPicPr>
-            <a:picLocks noChangeAspect="1"/>
-          </p:cNvPicPr>
-          <p:nvPr/>
-        </p:nvPicPr>
-        <p:blipFill>
-          <a:blip r:embed="rId4" cstate="print">
-            <a:extLst>
-              <a:ext uri="{BEBA8EAE-BF5A-486C-A8C5-ECC9F3942E4B}">
-                <a14:imgProps xmlns:a14="http://schemas.microsoft.com/office/drawing/2010/main">
-                  <a14:imgLayer r:embed="rId5">
-                    <a14:imgEffect>
-                      <a14:colorTemperature colorTemp="4700"/>
-                    </a14:imgEffect>
-                    <a14:imgEffect>
-                      <a14:saturation sat="0"/>
-                    </a14:imgEffect>
-                  </a14:imgLayer>
-                </a14:imgProps>
-              </a:ext>
-              <a:ext uri="{28A0092B-C50C-407E-A947-70E740481C1C}">
-                <a14:useLocalDpi xmlns:a14="http://schemas.microsoft.com/office/drawing/2010/main" val="0"/>
-              </a:ext>
-            </a:extLst>
-          </a:blip>
-          <a:stretch>
-            <a:fillRect/>
-          </a:stretch>
-        </p:blipFill>
-        <p:spPr>
-          <a:xfrm>
-            <a:off x="8767027" y="2433884"/>
-            <a:ext cx="2430346" cy="2430346"/>
-          </a:xfrm>
-          <a:prstGeom prst="rect">
-            <a:avLst/>
-          </a:prstGeom>
-        </p:spPr>
-      </p:pic>
     </p:spTree>
     <p:extLst>
       <p:ext uri="{BB962C8B-B14F-4D97-AF65-F5344CB8AC3E}">
-        <p14:creationId xmlns:p14="http://schemas.microsoft.com/office/powerpoint/2010/main" val="3951117252"/>
+        <p14:creationId xmlns:p14="http://schemas.microsoft.com/office/powerpoint/2010/main" val="3891917979"/>
       </p:ext>
     </p:extLst>
   </p:cSld>
@@ -22222,7 +18671,7 @@
 </p:sld>
 </file>
 
-<file path=ppt/slides/slide30.xml><?xml version="1.0" encoding="utf-8"?>
+<file path=ppt/slides/slide27.xml><?xml version="1.0" encoding="utf-8"?>
 <p:sld xmlns:a="http://schemas.openxmlformats.org/drawingml/2006/main" xmlns:r="http://schemas.openxmlformats.org/officeDocument/2006/relationships" xmlns:p="http://schemas.openxmlformats.org/presentationml/2006/main">
   <p:cSld>
     <p:spTree>
@@ -22303,7 +18752,7 @@
         </p:nvSpPr>
         <p:spPr>
           <a:xfrm>
-            <a:off x="2243150" y="230759"/>
+            <a:off x="2057400" y="219959"/>
             <a:ext cx="9794965" cy="523220"/>
           </a:xfrm>
           <a:prstGeom prst="rect">
@@ -22417,7 +18866,7 @@
                   <a:srgbClr val="FF0000"/>
                 </a:solidFill>
               </a:rPr>
-              <a:t>Уже почти все… Давайте подведем краткие итоги…</a:t>
+              <a:t>Что понадобится для эффективного прохождения курса</a:t>
             </a:r>
           </a:p>
         </p:txBody>
@@ -22445,7 +18894,7 @@
           <a:p>
             <a:fld id="{FF9AC15E-FCD1-4167-800F-1DB8497ABFCE}" type="slidenum">
               <a:rPr lang="ru-RU" smtClean="0"/>
-              <a:t>30</a:t>
+              <a:t>27</a:t>
             </a:fld>
             <a:endParaRPr lang="ru-RU"/>
           </a:p>
@@ -22501,8 +18950,8 @@
         </p:nvSpPr>
         <p:spPr>
           <a:xfrm>
-            <a:off x="741355" y="1455509"/>
-            <a:ext cx="10612445" cy="4900841"/>
+            <a:off x="925620" y="1396069"/>
+            <a:ext cx="10496067" cy="5282206"/>
           </a:xfrm>
           <a:prstGeom prst="rect">
             <a:avLst/>
@@ -22678,49 +19127,129 @@
           </a:lstStyle>
           <a:p>
             <a:r>
-              <a:rPr lang="ru-RU" altLang="ru-RU" dirty="0"/>
-              <a:t>Данные окружают нас повсюду, НО не из каждого набора данных можно извлечь пользу</a:t>
-            </a:r>
-          </a:p>
-          <a:p>
-            <a:r>
-              <a:rPr lang="ru-RU" altLang="ru-RU" dirty="0"/>
-              <a:t>Во многих задачах (в т.ч. в информационной безопасности) разумная автоматизация позволяет решать задачи эффективнее, быстрее точнее</a:t>
-            </a:r>
-          </a:p>
-          <a:p>
-            <a:r>
-              <a:rPr lang="ru-RU" altLang="ru-RU" dirty="0"/>
-              <a:t>Существует множество готовых инструментов и библиотек для решения почти каждой задачи, но надо понимать границы их применения</a:t>
-            </a:r>
-          </a:p>
-          <a:p>
-            <a:r>
-              <a:rPr lang="ru-RU" altLang="ru-RU" dirty="0"/>
-              <a:t>ИИ это «</a:t>
-            </a:r>
-            <a:r>
-              <a:rPr lang="ru-RU" altLang="ru-RU" dirty="0" err="1"/>
-              <a:t>хайп</a:t>
-            </a:r>
-            <a:r>
-              <a:rPr lang="ru-RU" altLang="ru-RU" dirty="0"/>
-              <a:t>», но незаметно проникает почти везде</a:t>
-            </a:r>
-            <a:endParaRPr lang="en-US" altLang="ru-RU" dirty="0"/>
-          </a:p>
-          <a:p>
-            <a:r>
-              <a:rPr lang="ru-RU" altLang="ru-RU" dirty="0"/>
-              <a:t>Часто и быстро появляются новые технологии (например, </a:t>
-            </a:r>
-            <a:r>
-              <a:rPr lang="en-US" altLang="ru-RU" dirty="0"/>
-              <a:t>LLM, </a:t>
-            </a:r>
-            <a:r>
-              <a:rPr lang="ru-RU" altLang="ru-RU" dirty="0"/>
-              <a:t>ИИ-агенты), влияние которых нельзя недооценивать</a:t>
+              <a:rPr lang="ru-RU" altLang="ru-RU" sz="1800" dirty="0"/>
+              <a:t>Математика: линейная алгебра (векторы, матрицы), математический анализ (производные, градиент, ряды, оптимизация функций), теория вероятности и статистика (вероятность, случайные величины и их характеристики, корреляция, статистические распределения)</a:t>
+            </a:r>
+          </a:p>
+          <a:p>
+            <a:r>
+              <a:rPr lang="ru-RU" altLang="ru-RU" sz="1800" dirty="0"/>
+              <a:t>Программирование</a:t>
+            </a:r>
+            <a:r>
+              <a:rPr lang="en-US" altLang="ru-RU" sz="1800" dirty="0"/>
+              <a:t>: python</a:t>
+            </a:r>
+            <a:r>
+              <a:rPr lang="ru-RU" altLang="ru-RU" sz="1800" dirty="0"/>
+              <a:t> и библиотеки</a:t>
+            </a:r>
+          </a:p>
+          <a:p>
+            <a:r>
+              <a:rPr lang="ru-RU" altLang="ru-RU" sz="1800" dirty="0"/>
+              <a:t>Инструменты для работы с данными</a:t>
+            </a:r>
+          </a:p>
+          <a:p>
+            <a:r>
+              <a:rPr lang="ru-RU" altLang="ru-RU" sz="1800" dirty="0"/>
+              <a:t>Английский язык</a:t>
+            </a:r>
+          </a:p>
+          <a:p>
+            <a:r>
+              <a:rPr lang="ru-RU" altLang="ru-RU" sz="1800" dirty="0"/>
+              <a:t>Предметная область: сети передачи данных, операционные системы, информационная безопасность</a:t>
+            </a:r>
+          </a:p>
+          <a:p>
+            <a:r>
+              <a:rPr lang="ru-RU" altLang="ru-RU" sz="1800" dirty="0"/>
+              <a:t>Любознательность и здравый смысл</a:t>
+            </a:r>
+            <a:endParaRPr lang="en-US" altLang="ru-RU" sz="1800" dirty="0"/>
+          </a:p>
+          <a:p>
+            <a:r>
+              <a:rPr lang="ru-RU" altLang="ru-RU" sz="1800" dirty="0"/>
+              <a:t>Полезные ресурсы (стоит зарегистрироваться)</a:t>
+            </a:r>
+            <a:r>
+              <a:rPr lang="en-US" altLang="ru-RU" sz="1800" dirty="0"/>
+              <a:t>:</a:t>
+            </a:r>
+          </a:p>
+          <a:p>
+            <a:pPr lvl="1"/>
+            <a:r>
+              <a:rPr lang="en-US" altLang="ru-RU" sz="1800" dirty="0">
+                <a:hlinkClick r:id="rId4"/>
+              </a:rPr>
+              <a:t>https://colab.research.google.com/</a:t>
+            </a:r>
+            <a:r>
+              <a:rPr lang="ru-RU" altLang="ru-RU" sz="1800" dirty="0"/>
+              <a:t> - бесплатное облачное решение для анализа данных (по типу </a:t>
+            </a:r>
+            <a:r>
+              <a:rPr lang="en-US" altLang="ru-RU" sz="1800" dirty="0" err="1"/>
+              <a:t>Jupyter</a:t>
+            </a:r>
+            <a:r>
+              <a:rPr lang="en-US" altLang="ru-RU" sz="1800" dirty="0"/>
+              <a:t> Notebook)</a:t>
+            </a:r>
+          </a:p>
+          <a:p>
+            <a:pPr lvl="1"/>
+            <a:r>
+              <a:rPr lang="en-US" altLang="ru-RU" sz="1800" dirty="0">
+                <a:hlinkClick r:id="rId5"/>
+              </a:rPr>
+              <a:t>https://console.yandex.cloud/</a:t>
+            </a:r>
+            <a:r>
+              <a:rPr lang="en-US" altLang="ru-RU" sz="1800" dirty="0"/>
+              <a:t> - </a:t>
+            </a:r>
+            <a:r>
+              <a:rPr lang="ru-RU" altLang="ru-RU" sz="1800" dirty="0"/>
+              <a:t>облачная платформа, где можно получить немного бесплатного ресурса (если еще не регистрировались)</a:t>
+            </a:r>
+            <a:endParaRPr lang="en-US" altLang="ru-RU" sz="1800" dirty="0"/>
+          </a:p>
+          <a:p>
+            <a:pPr lvl="1"/>
+            <a:r>
+              <a:rPr lang="en-US" altLang="ru-RU" sz="1800" dirty="0">
+                <a:hlinkClick r:id="rId6"/>
+              </a:rPr>
+              <a:t>https://chat.deepseek.com/</a:t>
+            </a:r>
+            <a:r>
+              <a:rPr lang="en-US" altLang="ru-RU" sz="1800" dirty="0"/>
+              <a:t> </a:t>
+            </a:r>
+            <a:r>
+              <a:rPr lang="ru-RU" altLang="ru-RU" sz="1800" dirty="0"/>
+              <a:t> </a:t>
+            </a:r>
+            <a:r>
+              <a:rPr lang="en-US" altLang="ru-RU" sz="1800" dirty="0"/>
+              <a:t>- </a:t>
+            </a:r>
+            <a:r>
+              <a:rPr lang="ru-RU" altLang="ru-RU" sz="1800" dirty="0"/>
+              <a:t>бесплатная </a:t>
+            </a:r>
+            <a:r>
+              <a:rPr lang="en-US" altLang="ru-RU" sz="1800" dirty="0"/>
+              <a:t>LLM </a:t>
+            </a:r>
+            <a:r>
+              <a:rPr lang="ru-RU" altLang="ru-RU" sz="1800" dirty="0"/>
+              <a:t>со свободным доступом с территории РФ</a:t>
             </a:r>
           </a:p>
         </p:txBody>
@@ -22728,7 +19257,7 @@
     </p:spTree>
     <p:extLst>
       <p:ext uri="{BB962C8B-B14F-4D97-AF65-F5344CB8AC3E}">
-        <p14:creationId xmlns:p14="http://schemas.microsoft.com/office/powerpoint/2010/main" val="3891917979"/>
+        <p14:creationId xmlns:p14="http://schemas.microsoft.com/office/powerpoint/2010/main" val="2089905453"/>
       </p:ext>
     </p:extLst>
   </p:cSld>
@@ -22738,7 +19267,7 @@
 </p:sld>
 </file>
 
-<file path=ppt/slides/slide31.xml><?xml version="1.0" encoding="utf-8"?>
+<file path=ppt/slides/slide28.xml><?xml version="1.0" encoding="utf-8"?>
 <p:sld xmlns:a="http://schemas.openxmlformats.org/drawingml/2006/main" xmlns:r="http://schemas.openxmlformats.org/officeDocument/2006/relationships" xmlns:p="http://schemas.openxmlformats.org/presentationml/2006/main">
   <p:cSld>
     <p:spTree>
@@ -22819,8 +19348,8 @@
         </p:nvSpPr>
         <p:spPr>
           <a:xfrm>
-            <a:off x="2057400" y="219959"/>
-            <a:ext cx="9794965" cy="523220"/>
+            <a:off x="603100" y="1878519"/>
+            <a:ext cx="5924068" cy="769441"/>
           </a:xfrm>
           <a:prstGeom prst="rect">
             <a:avLst/>
@@ -22927,64 +19456,34 @@
             </a:lvl9pPr>
           </a:lstStyle>
           <a:p>
-            <a:r>
-              <a:rPr lang="ru-RU" sz="2800" b="1" dirty="0">
+            <a:pPr algn="ctr"/>
+            <a:r>
+              <a:rPr lang="ru-RU" sz="4400" b="1" dirty="0">
                 <a:solidFill>
                   <a:srgbClr val="FF0000"/>
                 </a:solidFill>
               </a:rPr>
-              <a:t>Что понадобится для эффективного прохождения курса</a:t>
-            </a:r>
-          </a:p>
-        </p:txBody>
-      </p:sp>
-      <p:sp>
-        <p:nvSpPr>
-          <p:cNvPr id="6" name="Номер слайда 5">
-            <a:extLst>
-              <a:ext uri="{FF2B5EF4-FFF2-40B4-BE49-F238E27FC236}">
-                <a16:creationId xmlns:a16="http://schemas.microsoft.com/office/drawing/2014/main" id="{2A73E36B-93CF-4B6D-9D12-D242EBAEB367}"/>
-              </a:ext>
-            </a:extLst>
-          </p:cNvPr>
-          <p:cNvSpPr>
-            <a:spLocks noGrp="1"/>
-          </p:cNvSpPr>
-          <p:nvPr>
-            <p:ph type="sldNum" sz="quarter" idx="12"/>
-          </p:nvPr>
-        </p:nvSpPr>
-        <p:spPr/>
-        <p:txBody>
-          <a:bodyPr/>
-          <a:lstStyle/>
-          <a:p>
-            <a:fld id="{FF9AC15E-FCD1-4167-800F-1DB8497ABFCE}" type="slidenum">
-              <a:rPr lang="ru-RU" smtClean="0"/>
-              <a:t>31</a:t>
-            </a:fld>
-            <a:endParaRPr lang="ru-RU"/>
+              <a:t>Спасибо за внимание!</a:t>
+            </a:r>
           </a:p>
         </p:txBody>
       </p:sp>
       <p:pic>
         <p:nvPicPr>
-          <p:cNvPr id="9" name="Объект 1">
+          <p:cNvPr id="7" name="Объект 1">
             <a:extLst>
               <a:ext uri="{FF2B5EF4-FFF2-40B4-BE49-F238E27FC236}">
-                <a16:creationId xmlns:a16="http://schemas.microsoft.com/office/drawing/2014/main" id="{D8975343-2B37-104D-8757-0404410E4582}"/>
+                <a16:creationId xmlns:a16="http://schemas.microsoft.com/office/drawing/2014/main" id="{3D7E922A-E574-C847-BA5B-E66D8477CB39}"/>
               </a:ext>
             </a:extLst>
           </p:cNvPr>
           <p:cNvPicPr>
-            <a:picLocks noGrp="1" noChangeAspect="1"/>
+            <a:picLocks noChangeAspect="1"/>
           </p:cNvPicPr>
-          <p:nvPr>
-            <p:ph idx="1"/>
-          </p:nvPr>
+          <p:nvPr/>
         </p:nvPicPr>
         <p:blipFill rotWithShape="1">
-          <a:blip r:embed="rId3" cstate="print">
+          <a:blip r:embed="rId2" cstate="print">
             <a:extLst>
               <a:ext uri="{28A0092B-C50C-407E-A947-70E740481C1C}">
                 <a14:useLocalDpi xmlns:a14="http://schemas.microsoft.com/office/drawing/2010/main" val="0"/>
@@ -22999,349 +19498,15 @@
             <a:off x="603100" y="319559"/>
             <a:ext cx="1342931" cy="434420"/>
           </a:xfrm>
-        </p:spPr>
-      </p:pic>
-      <p:sp>
-        <p:nvSpPr>
-          <p:cNvPr id="7" name="Содержимое 2">
-            <a:extLst>
-              <a:ext uri="{FF2B5EF4-FFF2-40B4-BE49-F238E27FC236}">
-                <a16:creationId xmlns:a16="http://schemas.microsoft.com/office/drawing/2014/main" id="{618EC86C-9A58-4647-B7FB-0BD4EF13EB60}"/>
-              </a:ext>
-            </a:extLst>
-          </p:cNvPr>
-          <p:cNvSpPr txBox="1">
-            <a:spLocks/>
-          </p:cNvSpPr>
-          <p:nvPr/>
-        </p:nvSpPr>
-        <p:spPr>
-          <a:xfrm>
-            <a:off x="925620" y="1396069"/>
-            <a:ext cx="10496067" cy="5282206"/>
-          </a:xfrm>
           <a:prstGeom prst="rect">
             <a:avLst/>
           </a:prstGeom>
         </p:spPr>
-        <p:txBody>
-          <a:bodyPr vert="horz" lIns="91440" tIns="45720" rIns="91440" bIns="45720" rtlCol="0">
-            <a:normAutofit/>
-          </a:bodyPr>
-          <a:lstStyle>
-            <a:lvl1pPr marL="228600" indent="-228600" algn="l" defTabSz="914400" rtl="0" eaLnBrk="1" latinLnBrk="0" hangingPunct="1">
-              <a:lnSpc>
-                <a:spcPct val="90000"/>
-              </a:lnSpc>
-              <a:spcBef>
-                <a:spcPts val="1000"/>
-              </a:spcBef>
-              <a:buFont typeface="Arial" panose="020B0604020202020204" pitchFamily="34" charset="0"/>
-              <a:buChar char="•"/>
-              <a:defRPr sz="2800" kern="1200">
-                <a:solidFill>
-                  <a:schemeClr val="tx1"/>
-                </a:solidFill>
-                <a:latin typeface="+mn-lt"/>
-                <a:ea typeface="+mn-ea"/>
-                <a:cs typeface="+mn-cs"/>
-              </a:defRPr>
-            </a:lvl1pPr>
-            <a:lvl2pPr marL="685800" indent="-228600" algn="l" defTabSz="914400" rtl="0" eaLnBrk="1" latinLnBrk="0" hangingPunct="1">
-              <a:lnSpc>
-                <a:spcPct val="90000"/>
-              </a:lnSpc>
-              <a:spcBef>
-                <a:spcPts val="500"/>
-              </a:spcBef>
-              <a:buFont typeface="Arial" panose="020B0604020202020204" pitchFamily="34" charset="0"/>
-              <a:buChar char="•"/>
-              <a:defRPr sz="2400" kern="1200">
-                <a:solidFill>
-                  <a:schemeClr val="tx1"/>
-                </a:solidFill>
-                <a:latin typeface="+mn-lt"/>
-                <a:ea typeface="+mn-ea"/>
-                <a:cs typeface="+mn-cs"/>
-              </a:defRPr>
-            </a:lvl2pPr>
-            <a:lvl3pPr marL="1143000" indent="-228600" algn="l" defTabSz="914400" rtl="0" eaLnBrk="1" latinLnBrk="0" hangingPunct="1">
-              <a:lnSpc>
-                <a:spcPct val="90000"/>
-              </a:lnSpc>
-              <a:spcBef>
-                <a:spcPts val="500"/>
-              </a:spcBef>
-              <a:buFont typeface="Arial" panose="020B0604020202020204" pitchFamily="34" charset="0"/>
-              <a:buChar char="•"/>
-              <a:defRPr sz="2000" kern="1200">
-                <a:solidFill>
-                  <a:schemeClr val="tx1"/>
-                </a:solidFill>
-                <a:latin typeface="+mn-lt"/>
-                <a:ea typeface="+mn-ea"/>
-                <a:cs typeface="+mn-cs"/>
-              </a:defRPr>
-            </a:lvl3pPr>
-            <a:lvl4pPr marL="1600200" indent="-228600" algn="l" defTabSz="914400" rtl="0" eaLnBrk="1" latinLnBrk="0" hangingPunct="1">
-              <a:lnSpc>
-                <a:spcPct val="90000"/>
-              </a:lnSpc>
-              <a:spcBef>
-                <a:spcPts val="500"/>
-              </a:spcBef>
-              <a:buFont typeface="Arial" panose="020B0604020202020204" pitchFamily="34" charset="0"/>
-              <a:buChar char="•"/>
-              <a:defRPr sz="1800" kern="1200">
-                <a:solidFill>
-                  <a:schemeClr val="tx1"/>
-                </a:solidFill>
-                <a:latin typeface="+mn-lt"/>
-                <a:ea typeface="+mn-ea"/>
-                <a:cs typeface="+mn-cs"/>
-              </a:defRPr>
-            </a:lvl4pPr>
-            <a:lvl5pPr marL="2057400" indent="-228600" algn="l" defTabSz="914400" rtl="0" eaLnBrk="1" latinLnBrk="0" hangingPunct="1">
-              <a:lnSpc>
-                <a:spcPct val="90000"/>
-              </a:lnSpc>
-              <a:spcBef>
-                <a:spcPts val="500"/>
-              </a:spcBef>
-              <a:buFont typeface="Arial" panose="020B0604020202020204" pitchFamily="34" charset="0"/>
-              <a:buChar char="•"/>
-              <a:defRPr sz="1800" kern="1200">
-                <a:solidFill>
-                  <a:schemeClr val="tx1"/>
-                </a:solidFill>
-                <a:latin typeface="+mn-lt"/>
-                <a:ea typeface="+mn-ea"/>
-                <a:cs typeface="+mn-cs"/>
-              </a:defRPr>
-            </a:lvl5pPr>
-            <a:lvl6pPr marL="2514600" indent="-228600" algn="l" defTabSz="914400" rtl="0" eaLnBrk="1" latinLnBrk="0" hangingPunct="1">
-              <a:lnSpc>
-                <a:spcPct val="90000"/>
-              </a:lnSpc>
-              <a:spcBef>
-                <a:spcPts val="500"/>
-              </a:spcBef>
-              <a:buFont typeface="Arial" panose="020B0604020202020204" pitchFamily="34" charset="0"/>
-              <a:buChar char="•"/>
-              <a:defRPr sz="1800" kern="1200">
-                <a:solidFill>
-                  <a:schemeClr val="tx1"/>
-                </a:solidFill>
-                <a:latin typeface="+mn-lt"/>
-                <a:ea typeface="+mn-ea"/>
-                <a:cs typeface="+mn-cs"/>
-              </a:defRPr>
-            </a:lvl6pPr>
-            <a:lvl7pPr marL="2971800" indent="-228600" algn="l" defTabSz="914400" rtl="0" eaLnBrk="1" latinLnBrk="0" hangingPunct="1">
-              <a:lnSpc>
-                <a:spcPct val="90000"/>
-              </a:lnSpc>
-              <a:spcBef>
-                <a:spcPts val="500"/>
-              </a:spcBef>
-              <a:buFont typeface="Arial" panose="020B0604020202020204" pitchFamily="34" charset="0"/>
-              <a:buChar char="•"/>
-              <a:defRPr sz="1800" kern="1200">
-                <a:solidFill>
-                  <a:schemeClr val="tx1"/>
-                </a:solidFill>
-                <a:latin typeface="+mn-lt"/>
-                <a:ea typeface="+mn-ea"/>
-                <a:cs typeface="+mn-cs"/>
-              </a:defRPr>
-            </a:lvl7pPr>
-            <a:lvl8pPr marL="3429000" indent="-228600" algn="l" defTabSz="914400" rtl="0" eaLnBrk="1" latinLnBrk="0" hangingPunct="1">
-              <a:lnSpc>
-                <a:spcPct val="90000"/>
-              </a:lnSpc>
-              <a:spcBef>
-                <a:spcPts val="500"/>
-              </a:spcBef>
-              <a:buFont typeface="Arial" panose="020B0604020202020204" pitchFamily="34" charset="0"/>
-              <a:buChar char="•"/>
-              <a:defRPr sz="1800" kern="1200">
-                <a:solidFill>
-                  <a:schemeClr val="tx1"/>
-                </a:solidFill>
-                <a:latin typeface="+mn-lt"/>
-                <a:ea typeface="+mn-ea"/>
-                <a:cs typeface="+mn-cs"/>
-              </a:defRPr>
-            </a:lvl8pPr>
-            <a:lvl9pPr marL="3886200" indent="-228600" algn="l" defTabSz="914400" rtl="0" eaLnBrk="1" latinLnBrk="0" hangingPunct="1">
-              <a:lnSpc>
-                <a:spcPct val="90000"/>
-              </a:lnSpc>
-              <a:spcBef>
-                <a:spcPts val="500"/>
-              </a:spcBef>
-              <a:buFont typeface="Arial" panose="020B0604020202020204" pitchFamily="34" charset="0"/>
-              <a:buChar char="•"/>
-              <a:defRPr sz="1800" kern="1200">
-                <a:solidFill>
-                  <a:schemeClr val="tx1"/>
-                </a:solidFill>
-                <a:latin typeface="+mn-lt"/>
-                <a:ea typeface="+mn-ea"/>
-                <a:cs typeface="+mn-cs"/>
-              </a:defRPr>
-            </a:lvl9pPr>
-          </a:lstStyle>
-          <a:p>
-            <a:r>
-              <a:rPr lang="ru-RU" altLang="ru-RU" sz="1800" dirty="0"/>
-              <a:t>Математика: линейная алгебра (векторы, матрицы), математический анализ (производные, градиент, ряды, оптимизация функций), теория вероятности и статистика (вероятность, случайные величины и их характеристики, корреляция, статистические распределения)</a:t>
-            </a:r>
-          </a:p>
-          <a:p>
-            <a:r>
-              <a:rPr lang="ru-RU" altLang="ru-RU" sz="1800" dirty="0"/>
-              <a:t>Программирование</a:t>
-            </a:r>
-            <a:r>
-              <a:rPr lang="en-US" altLang="ru-RU" sz="1800" dirty="0"/>
-              <a:t>: python</a:t>
-            </a:r>
-            <a:r>
-              <a:rPr lang="ru-RU" altLang="ru-RU" sz="1800" dirty="0"/>
-              <a:t> и библиотеки</a:t>
-            </a:r>
-          </a:p>
-          <a:p>
-            <a:r>
-              <a:rPr lang="ru-RU" altLang="ru-RU" sz="1800" dirty="0"/>
-              <a:t>Инструменты для работы с данными</a:t>
-            </a:r>
-          </a:p>
-          <a:p>
-            <a:r>
-              <a:rPr lang="ru-RU" altLang="ru-RU" sz="1800" dirty="0"/>
-              <a:t>Английский язык</a:t>
-            </a:r>
-          </a:p>
-          <a:p>
-            <a:r>
-              <a:rPr lang="ru-RU" altLang="ru-RU" sz="1800" dirty="0"/>
-              <a:t>Предметная область: сети передачи данных, операционные системы, информационная безопасность</a:t>
-            </a:r>
-          </a:p>
-          <a:p>
-            <a:r>
-              <a:rPr lang="ru-RU" altLang="ru-RU" sz="1800" dirty="0"/>
-              <a:t>Любознательность и здравый смысл</a:t>
-            </a:r>
-            <a:endParaRPr lang="en-US" altLang="ru-RU" sz="1800" dirty="0"/>
-          </a:p>
-          <a:p>
-            <a:r>
-              <a:rPr lang="ru-RU" altLang="ru-RU" sz="1800" dirty="0"/>
-              <a:t>Полезные ресурсы (стоит зарегистрироваться)</a:t>
-            </a:r>
-            <a:r>
-              <a:rPr lang="en-US" altLang="ru-RU" sz="1800" dirty="0"/>
-              <a:t>:</a:t>
-            </a:r>
-          </a:p>
-          <a:p>
-            <a:pPr lvl="1"/>
-            <a:r>
-              <a:rPr lang="en-US" altLang="ru-RU" sz="1800" dirty="0">
-                <a:hlinkClick r:id="rId4"/>
-              </a:rPr>
-              <a:t>https://www.kaggle.com/</a:t>
-            </a:r>
-            <a:r>
-              <a:rPr lang="en-US" altLang="ru-RU" sz="1800" dirty="0"/>
-              <a:t> - </a:t>
-            </a:r>
-            <a:r>
-              <a:rPr lang="ru-RU" altLang="ru-RU" sz="1800" dirty="0"/>
-              <a:t>платформа для обучения </a:t>
-            </a:r>
-            <a:r>
-              <a:rPr lang="en-US" altLang="ru-RU" sz="1800" dirty="0"/>
-              <a:t>ML </a:t>
-            </a:r>
-            <a:r>
-              <a:rPr lang="ru-RU" altLang="ru-RU" sz="1800" dirty="0"/>
-              <a:t>и участия в соревнованиях по анализу данных</a:t>
-            </a:r>
-          </a:p>
-          <a:p>
-            <a:pPr lvl="1"/>
-            <a:r>
-              <a:rPr lang="en-US" altLang="ru-RU" sz="1800" dirty="0">
-                <a:hlinkClick r:id="rId5"/>
-              </a:rPr>
-              <a:t>https://colab.research.google.com/</a:t>
-            </a:r>
-            <a:r>
-              <a:rPr lang="ru-RU" altLang="ru-RU" sz="1800" dirty="0"/>
-              <a:t> - бесплатное облачное решение для анализа данных (по типу </a:t>
-            </a:r>
-            <a:r>
-              <a:rPr lang="en-US" altLang="ru-RU" sz="1800" dirty="0" err="1"/>
-              <a:t>Jupyter</a:t>
-            </a:r>
-            <a:r>
-              <a:rPr lang="en-US" altLang="ru-RU" sz="1800" dirty="0"/>
-              <a:t> Notebook)</a:t>
-            </a:r>
-          </a:p>
-          <a:p>
-            <a:pPr lvl="1"/>
-            <a:r>
-              <a:rPr lang="en-US" altLang="ru-RU" sz="1800" dirty="0">
-                <a:hlinkClick r:id="rId6"/>
-              </a:rPr>
-              <a:t>https://console.yandex.cloud/</a:t>
-            </a:r>
-            <a:r>
-              <a:rPr lang="en-US" altLang="ru-RU" sz="1800" dirty="0"/>
-              <a:t> - </a:t>
-            </a:r>
-            <a:r>
-              <a:rPr lang="ru-RU" altLang="ru-RU" sz="1800" dirty="0"/>
-              <a:t>облачная платформа, где можно получить немного бесплатного ресурса (если еще не регистрировались)</a:t>
-            </a:r>
-            <a:endParaRPr lang="en-US" altLang="ru-RU" sz="1800" dirty="0"/>
-          </a:p>
-          <a:p>
-            <a:pPr lvl="1"/>
-            <a:r>
-              <a:rPr lang="en-US" altLang="ru-RU" sz="1800" dirty="0">
-                <a:hlinkClick r:id="rId7"/>
-              </a:rPr>
-              <a:t>https://chat.deepseek.com/</a:t>
-            </a:r>
-            <a:r>
-              <a:rPr lang="en-US" altLang="ru-RU" sz="1800" dirty="0"/>
-              <a:t> - </a:t>
-            </a:r>
-            <a:r>
-              <a:rPr lang="ru-RU" altLang="ru-RU" sz="1800" dirty="0"/>
-              <a:t>бесплатная </a:t>
-            </a:r>
-            <a:r>
-              <a:rPr lang="en-US" altLang="ru-RU" sz="1800" dirty="0"/>
-              <a:t>LLM </a:t>
-            </a:r>
-            <a:r>
-              <a:rPr lang="ru-RU" altLang="ru-RU" sz="1800" dirty="0"/>
-              <a:t>со свободным доступом с территории РФ</a:t>
-            </a:r>
-          </a:p>
-        </p:txBody>
-      </p:sp>
+      </p:pic>
     </p:spTree>
     <p:extLst>
       <p:ext uri="{BB962C8B-B14F-4D97-AF65-F5344CB8AC3E}">
-        <p14:creationId xmlns:p14="http://schemas.microsoft.com/office/powerpoint/2010/main" val="2089905453"/>
+        <p14:creationId xmlns:p14="http://schemas.microsoft.com/office/powerpoint/2010/main" val="2734981816"/>
       </p:ext>
     </p:extLst>
   </p:cSld>
@@ -23351,12 +19516,18 @@
 </p:sld>
 </file>
 
-<file path=ppt/slides/slide32.xml><?xml version="1.0" encoding="utf-8"?>
+<file path=ppt/slides/slide3.xml><?xml version="1.0" encoding="utf-8"?>
 <p:sld xmlns:a="http://schemas.openxmlformats.org/drawingml/2006/main" xmlns:r="http://schemas.openxmlformats.org/officeDocument/2006/relationships" xmlns:p="http://schemas.openxmlformats.org/presentationml/2006/main">
   <p:cSld>
     <p:spTree>
       <p:nvGrpSpPr>
-        <p:cNvPr id="1" name=""/>
+        <p:cNvPr id="1" name="">
+          <a:extLst>
+            <a:ext uri="{FF2B5EF4-FFF2-40B4-BE49-F238E27FC236}">
+              <a16:creationId xmlns:a16="http://schemas.microsoft.com/office/drawing/2014/main" id="{848272CE-CF20-CD39-2496-8671A6315AB5}"/>
+            </a:ext>
+          </a:extLst>
+        </p:cNvPr>
         <p:cNvGrpSpPr/>
         <p:nvPr/>
       </p:nvGrpSpPr>
@@ -23370,7 +19541,13 @@
       </p:grpSpPr>
       <p:sp>
         <p:nvSpPr>
-          <p:cNvPr id="3" name="Прямоугольник 2"/>
+          <p:cNvPr id="3" name="Прямоугольник 2">
+            <a:extLst>
+              <a:ext uri="{FF2B5EF4-FFF2-40B4-BE49-F238E27FC236}">
+                <a16:creationId xmlns:a16="http://schemas.microsoft.com/office/drawing/2014/main" id="{9A5D8014-037B-E853-36BB-DE184B5BB136}"/>
+              </a:ext>
+            </a:extLst>
+          </p:cNvPr>
           <p:cNvSpPr/>
           <p:nvPr/>
         </p:nvSpPr>
@@ -23423,7 +19600,7 @@
           <p:cNvPr id="4" name="TextBox 9">
             <a:extLst>
               <a:ext uri="{FF2B5EF4-FFF2-40B4-BE49-F238E27FC236}">
-                <a16:creationId xmlns:a16="http://schemas.microsoft.com/office/drawing/2014/main" id="{6D1610F7-A0C9-4E50-9206-D9E394A55B73}"/>
+                <a16:creationId xmlns:a16="http://schemas.microsoft.com/office/drawing/2014/main" id="{B64D7E29-E638-ED5E-9F16-7CA593248006}"/>
               </a:ext>
             </a:extLst>
           </p:cNvPr>
@@ -23432,8 +19609,8 @@
         </p:nvSpPr>
         <p:spPr>
           <a:xfrm>
-            <a:off x="603100" y="1878519"/>
-            <a:ext cx="5924068" cy="769441"/>
+            <a:off x="2477193" y="219959"/>
+            <a:ext cx="9375172" cy="523220"/>
           </a:xfrm>
           <a:prstGeom prst="rect">
             <a:avLst/>
@@ -23540,34 +19717,77 @@
             </a:lvl9pPr>
           </a:lstStyle>
           <a:p>
-            <a:pPr algn="ctr"/>
-            <a:r>
-              <a:rPr lang="ru-RU" sz="4400" b="1" dirty="0">
+            <a:r>
+              <a:rPr lang="ru-RU" sz="2800" b="1" dirty="0">
                 <a:solidFill>
                   <a:srgbClr val="FF0000"/>
                 </a:solidFill>
               </a:rPr>
-              <a:t>Спасибо за внимание!</a:t>
-            </a:r>
+              <a:t>Кто я такой и что я тут делаю</a:t>
+            </a:r>
+            <a:r>
+              <a:rPr lang="en-US" sz="2800" b="1" dirty="0">
+                <a:solidFill>
+                  <a:srgbClr val="FF0000"/>
+                </a:solidFill>
+              </a:rPr>
+              <a:t>?</a:t>
+            </a:r>
+            <a:endParaRPr lang="ru-RU" sz="2800" b="1" dirty="0">
+              <a:solidFill>
+                <a:srgbClr val="FF0000"/>
+              </a:solidFill>
+            </a:endParaRPr>
+          </a:p>
+        </p:txBody>
+      </p:sp>
+      <p:sp>
+        <p:nvSpPr>
+          <p:cNvPr id="6" name="Номер слайда 5">
+            <a:extLst>
+              <a:ext uri="{FF2B5EF4-FFF2-40B4-BE49-F238E27FC236}">
+                <a16:creationId xmlns:a16="http://schemas.microsoft.com/office/drawing/2014/main" id="{D5DEF263-553A-F4F9-3776-BEE5623B1ADC}"/>
+              </a:ext>
+            </a:extLst>
+          </p:cNvPr>
+          <p:cNvSpPr>
+            <a:spLocks noGrp="1"/>
+          </p:cNvSpPr>
+          <p:nvPr>
+            <p:ph type="sldNum" sz="quarter" idx="12"/>
+          </p:nvPr>
+        </p:nvSpPr>
+        <p:spPr/>
+        <p:txBody>
+          <a:bodyPr/>
+          <a:lstStyle/>
+          <a:p>
+            <a:fld id="{FF9AC15E-FCD1-4167-800F-1DB8497ABFCE}" type="slidenum">
+              <a:rPr lang="ru-RU" smtClean="0"/>
+              <a:t>3</a:t>
+            </a:fld>
+            <a:endParaRPr lang="ru-RU"/>
           </a:p>
         </p:txBody>
       </p:sp>
       <p:pic>
         <p:nvPicPr>
-          <p:cNvPr id="7" name="Объект 1">
+          <p:cNvPr id="9" name="Объект 1">
             <a:extLst>
               <a:ext uri="{FF2B5EF4-FFF2-40B4-BE49-F238E27FC236}">
-                <a16:creationId xmlns:a16="http://schemas.microsoft.com/office/drawing/2014/main" id="{3D7E922A-E574-C847-BA5B-E66D8477CB39}"/>
+                <a16:creationId xmlns:a16="http://schemas.microsoft.com/office/drawing/2014/main" id="{46B00A59-CAD1-626B-8BA0-56EE2FA62DCE}"/>
               </a:ext>
             </a:extLst>
           </p:cNvPr>
           <p:cNvPicPr>
-            <a:picLocks noChangeAspect="1"/>
+            <a:picLocks noGrp="1" noChangeAspect="1"/>
           </p:cNvPicPr>
-          <p:nvPr/>
+          <p:nvPr>
+            <p:ph idx="1"/>
+          </p:nvPr>
         </p:nvPicPr>
         <p:blipFill rotWithShape="1">
-          <a:blip r:embed="rId2" cstate="print">
+          <a:blip r:embed="rId3" cstate="print">
             <a:extLst>
               <a:ext uri="{28A0092B-C50C-407E-A947-70E740481C1C}">
                 <a14:useLocalDpi xmlns:a14="http://schemas.microsoft.com/office/drawing/2010/main" val="0"/>
@@ -23582,6 +19802,304 @@
             <a:off x="603100" y="319559"/>
             <a:ext cx="1342931" cy="434420"/>
           </a:xfrm>
+        </p:spPr>
+      </p:pic>
+      <p:sp>
+        <p:nvSpPr>
+          <p:cNvPr id="8" name="Содержимое 2">
+            <a:extLst>
+              <a:ext uri="{FF2B5EF4-FFF2-40B4-BE49-F238E27FC236}">
+                <a16:creationId xmlns:a16="http://schemas.microsoft.com/office/drawing/2014/main" id="{E1B6C54F-101A-20CB-A036-71C851646F7F}"/>
+              </a:ext>
+            </a:extLst>
+          </p:cNvPr>
+          <p:cNvSpPr txBox="1">
+            <a:spLocks/>
+          </p:cNvSpPr>
+          <p:nvPr/>
+        </p:nvSpPr>
+        <p:spPr>
+          <a:xfrm>
+            <a:off x="925620" y="1839151"/>
+            <a:ext cx="7272062" cy="4298542"/>
+          </a:xfrm>
+          <a:prstGeom prst="rect">
+            <a:avLst/>
+          </a:prstGeom>
+        </p:spPr>
+        <p:txBody>
+          <a:bodyPr vert="horz" lIns="91440" tIns="45720" rIns="91440" bIns="45720" rtlCol="0">
+            <a:normAutofit/>
+          </a:bodyPr>
+          <a:lstStyle>
+            <a:lvl1pPr marL="228600" indent="-228600" algn="l" defTabSz="914400" rtl="0" eaLnBrk="1" latinLnBrk="0" hangingPunct="1">
+              <a:lnSpc>
+                <a:spcPct val="90000"/>
+              </a:lnSpc>
+              <a:spcBef>
+                <a:spcPts val="1000"/>
+              </a:spcBef>
+              <a:buFont typeface="Arial" panose="020B0604020202020204" pitchFamily="34" charset="0"/>
+              <a:buChar char="•"/>
+              <a:defRPr sz="2800" kern="1200">
+                <a:solidFill>
+                  <a:schemeClr val="tx1"/>
+                </a:solidFill>
+                <a:latin typeface="+mn-lt"/>
+                <a:ea typeface="+mn-ea"/>
+                <a:cs typeface="+mn-cs"/>
+              </a:defRPr>
+            </a:lvl1pPr>
+            <a:lvl2pPr marL="685800" indent="-228600" algn="l" defTabSz="914400" rtl="0" eaLnBrk="1" latinLnBrk="0" hangingPunct="1">
+              <a:lnSpc>
+                <a:spcPct val="90000"/>
+              </a:lnSpc>
+              <a:spcBef>
+                <a:spcPts val="500"/>
+              </a:spcBef>
+              <a:buFont typeface="Arial" panose="020B0604020202020204" pitchFamily="34" charset="0"/>
+              <a:buChar char="•"/>
+              <a:defRPr sz="2400" kern="1200">
+                <a:solidFill>
+                  <a:schemeClr val="tx1"/>
+                </a:solidFill>
+                <a:latin typeface="+mn-lt"/>
+                <a:ea typeface="+mn-ea"/>
+                <a:cs typeface="+mn-cs"/>
+              </a:defRPr>
+            </a:lvl2pPr>
+            <a:lvl3pPr marL="1143000" indent="-228600" algn="l" defTabSz="914400" rtl="0" eaLnBrk="1" latinLnBrk="0" hangingPunct="1">
+              <a:lnSpc>
+                <a:spcPct val="90000"/>
+              </a:lnSpc>
+              <a:spcBef>
+                <a:spcPts val="500"/>
+              </a:spcBef>
+              <a:buFont typeface="Arial" panose="020B0604020202020204" pitchFamily="34" charset="0"/>
+              <a:buChar char="•"/>
+              <a:defRPr sz="2000" kern="1200">
+                <a:solidFill>
+                  <a:schemeClr val="tx1"/>
+                </a:solidFill>
+                <a:latin typeface="+mn-lt"/>
+                <a:ea typeface="+mn-ea"/>
+                <a:cs typeface="+mn-cs"/>
+              </a:defRPr>
+            </a:lvl3pPr>
+            <a:lvl4pPr marL="1600200" indent="-228600" algn="l" defTabSz="914400" rtl="0" eaLnBrk="1" latinLnBrk="0" hangingPunct="1">
+              <a:lnSpc>
+                <a:spcPct val="90000"/>
+              </a:lnSpc>
+              <a:spcBef>
+                <a:spcPts val="500"/>
+              </a:spcBef>
+              <a:buFont typeface="Arial" panose="020B0604020202020204" pitchFamily="34" charset="0"/>
+              <a:buChar char="•"/>
+              <a:defRPr sz="1800" kern="1200">
+                <a:solidFill>
+                  <a:schemeClr val="tx1"/>
+                </a:solidFill>
+                <a:latin typeface="+mn-lt"/>
+                <a:ea typeface="+mn-ea"/>
+                <a:cs typeface="+mn-cs"/>
+              </a:defRPr>
+            </a:lvl4pPr>
+            <a:lvl5pPr marL="2057400" indent="-228600" algn="l" defTabSz="914400" rtl="0" eaLnBrk="1" latinLnBrk="0" hangingPunct="1">
+              <a:lnSpc>
+                <a:spcPct val="90000"/>
+              </a:lnSpc>
+              <a:spcBef>
+                <a:spcPts val="500"/>
+              </a:spcBef>
+              <a:buFont typeface="Arial" panose="020B0604020202020204" pitchFamily="34" charset="0"/>
+              <a:buChar char="•"/>
+              <a:defRPr sz="1800" kern="1200">
+                <a:solidFill>
+                  <a:schemeClr val="tx1"/>
+                </a:solidFill>
+                <a:latin typeface="+mn-lt"/>
+                <a:ea typeface="+mn-ea"/>
+                <a:cs typeface="+mn-cs"/>
+              </a:defRPr>
+            </a:lvl5pPr>
+            <a:lvl6pPr marL="2514600" indent="-228600" algn="l" defTabSz="914400" rtl="0" eaLnBrk="1" latinLnBrk="0" hangingPunct="1">
+              <a:lnSpc>
+                <a:spcPct val="90000"/>
+              </a:lnSpc>
+              <a:spcBef>
+                <a:spcPts val="500"/>
+              </a:spcBef>
+              <a:buFont typeface="Arial" panose="020B0604020202020204" pitchFamily="34" charset="0"/>
+              <a:buChar char="•"/>
+              <a:defRPr sz="1800" kern="1200">
+                <a:solidFill>
+                  <a:schemeClr val="tx1"/>
+                </a:solidFill>
+                <a:latin typeface="+mn-lt"/>
+                <a:ea typeface="+mn-ea"/>
+                <a:cs typeface="+mn-cs"/>
+              </a:defRPr>
+            </a:lvl6pPr>
+            <a:lvl7pPr marL="2971800" indent="-228600" algn="l" defTabSz="914400" rtl="0" eaLnBrk="1" latinLnBrk="0" hangingPunct="1">
+              <a:lnSpc>
+                <a:spcPct val="90000"/>
+              </a:lnSpc>
+              <a:spcBef>
+                <a:spcPts val="500"/>
+              </a:spcBef>
+              <a:buFont typeface="Arial" panose="020B0604020202020204" pitchFamily="34" charset="0"/>
+              <a:buChar char="•"/>
+              <a:defRPr sz="1800" kern="1200">
+                <a:solidFill>
+                  <a:schemeClr val="tx1"/>
+                </a:solidFill>
+                <a:latin typeface="+mn-lt"/>
+                <a:ea typeface="+mn-ea"/>
+                <a:cs typeface="+mn-cs"/>
+              </a:defRPr>
+            </a:lvl7pPr>
+            <a:lvl8pPr marL="3429000" indent="-228600" algn="l" defTabSz="914400" rtl="0" eaLnBrk="1" latinLnBrk="0" hangingPunct="1">
+              <a:lnSpc>
+                <a:spcPct val="90000"/>
+              </a:lnSpc>
+              <a:spcBef>
+                <a:spcPts val="500"/>
+              </a:spcBef>
+              <a:buFont typeface="Arial" panose="020B0604020202020204" pitchFamily="34" charset="0"/>
+              <a:buChar char="•"/>
+              <a:defRPr sz="1800" kern="1200">
+                <a:solidFill>
+                  <a:schemeClr val="tx1"/>
+                </a:solidFill>
+                <a:latin typeface="+mn-lt"/>
+                <a:ea typeface="+mn-ea"/>
+                <a:cs typeface="+mn-cs"/>
+              </a:defRPr>
+            </a:lvl8pPr>
+            <a:lvl9pPr marL="3886200" indent="-228600" algn="l" defTabSz="914400" rtl="0" eaLnBrk="1" latinLnBrk="0" hangingPunct="1">
+              <a:lnSpc>
+                <a:spcPct val="90000"/>
+              </a:lnSpc>
+              <a:spcBef>
+                <a:spcPts val="500"/>
+              </a:spcBef>
+              <a:buFont typeface="Arial" panose="020B0604020202020204" pitchFamily="34" charset="0"/>
+              <a:buChar char="•"/>
+              <a:defRPr sz="1800" kern="1200">
+                <a:solidFill>
+                  <a:schemeClr val="tx1"/>
+                </a:solidFill>
+                <a:latin typeface="+mn-lt"/>
+                <a:ea typeface="+mn-ea"/>
+                <a:cs typeface="+mn-cs"/>
+              </a:defRPr>
+            </a:lvl9pPr>
+          </a:lstStyle>
+          <a:p>
+            <a:pPr>
+              <a:buFont typeface="Arial" panose="020B0604020202020204" pitchFamily="34" charset="0"/>
+              <a:buNone/>
+            </a:pPr>
+            <a:r>
+              <a:rPr lang="ru-RU" altLang="ru-RU" sz="2400" b="1" dirty="0"/>
+              <a:t>Домуховский Николай Анатольевич</a:t>
+            </a:r>
+          </a:p>
+          <a:p>
+            <a:r>
+              <a:rPr lang="ru-RU" altLang="ru-RU" sz="2400" dirty="0"/>
+              <a:t>Окончил </a:t>
+            </a:r>
+            <a:r>
+              <a:rPr lang="ru-RU" altLang="ru-RU" sz="2400" dirty="0" err="1"/>
+              <a:t>матмех</a:t>
+            </a:r>
+            <a:r>
+              <a:rPr lang="ru-RU" altLang="ru-RU" sz="2400" dirty="0"/>
+              <a:t> </a:t>
+            </a:r>
+            <a:r>
+              <a:rPr lang="ru-RU" altLang="ru-RU" sz="2400" dirty="0" err="1"/>
+              <a:t>УрГУ</a:t>
+            </a:r>
+            <a:r>
+              <a:rPr lang="ru-RU" altLang="ru-RU" sz="2400" dirty="0"/>
+              <a:t> в далеком 2005-м, специальность – компьютерная безопасность</a:t>
+            </a:r>
+          </a:p>
+          <a:p>
+            <a:r>
+              <a:rPr lang="ru-RU" altLang="ru-RU" sz="2400" dirty="0"/>
+              <a:t>Более 20 лет опыта работы в сфере ИБ</a:t>
+            </a:r>
+            <a:r>
+              <a:rPr lang="en-US" altLang="ru-RU" sz="2400" dirty="0"/>
+              <a:t>: </a:t>
+            </a:r>
+            <a:r>
+              <a:rPr lang="ru-RU" altLang="ru-RU" sz="2400" dirty="0"/>
+              <a:t>проектный, продуктовый бизнес, научно-исследовательская работа</a:t>
+            </a:r>
+          </a:p>
+          <a:p>
+            <a:r>
+              <a:rPr lang="ru-RU" altLang="ru-RU" sz="2400" dirty="0"/>
+              <a:t>С ноября 2025 полностью перешел в сферу образования и науки</a:t>
+            </a:r>
+            <a:r>
+              <a:rPr lang="ru-RU" altLang="ru-RU" sz="2400" strike="sngStrike" dirty="0"/>
+              <a:t>, чтобы наконец защитить кандидатскую</a:t>
+            </a:r>
+            <a:r>
+              <a:rPr lang="ru-RU" altLang="ru-RU" sz="2400" dirty="0"/>
+              <a:t> </a:t>
+            </a:r>
+          </a:p>
+        </p:txBody>
+      </p:sp>
+      <p:pic>
+        <p:nvPicPr>
+          <p:cNvPr id="5" name="Рисунок 8">
+            <a:extLst>
+              <a:ext uri="{FF2B5EF4-FFF2-40B4-BE49-F238E27FC236}">
+                <a16:creationId xmlns:a16="http://schemas.microsoft.com/office/drawing/2014/main" id="{4B54A7AB-0FB5-7C6B-470B-F32B18A6D91E}"/>
+              </a:ext>
+            </a:extLst>
+          </p:cNvPr>
+          <p:cNvPicPr>
+            <a:picLocks noChangeAspect="1"/>
+          </p:cNvPicPr>
+          <p:nvPr/>
+        </p:nvPicPr>
+        <p:blipFill>
+          <a:blip r:embed="rId4" cstate="print">
+            <a:extLst>
+              <a:ext uri="{BEBA8EAE-BF5A-486C-A8C5-ECC9F3942E4B}">
+                <a14:imgProps xmlns:a14="http://schemas.microsoft.com/office/drawing/2010/main">
+                  <a14:imgLayer r:embed="rId5">
+                    <a14:imgEffect>
+                      <a14:colorTemperature colorTemp="4700"/>
+                    </a14:imgEffect>
+                    <a14:imgEffect>
+                      <a14:saturation sat="0"/>
+                    </a14:imgEffect>
+                  </a14:imgLayer>
+                </a14:imgProps>
+              </a:ext>
+              <a:ext uri="{28A0092B-C50C-407E-A947-70E740481C1C}">
+                <a14:useLocalDpi xmlns:a14="http://schemas.microsoft.com/office/drawing/2010/main" val="0"/>
+              </a:ext>
+            </a:extLst>
+          </a:blip>
+          <a:stretch>
+            <a:fillRect/>
+          </a:stretch>
+        </p:blipFill>
+        <p:spPr>
+          <a:xfrm>
+            <a:off x="8767027" y="2433884"/>
+            <a:ext cx="2430346" cy="2430346"/>
+          </a:xfrm>
           <a:prstGeom prst="rect">
             <a:avLst/>
           </a:prstGeom>
@@ -23590,7 +20108,7 @@
     </p:spTree>
     <p:extLst>
       <p:ext uri="{BB962C8B-B14F-4D97-AF65-F5344CB8AC3E}">
-        <p14:creationId xmlns:p14="http://schemas.microsoft.com/office/powerpoint/2010/main" val="2734981816"/>
+        <p14:creationId xmlns:p14="http://schemas.microsoft.com/office/powerpoint/2010/main" val="3951117252"/>
       </p:ext>
     </p:extLst>
   </p:cSld>
